--- a/CLICX_Camp_Key_Insights.pptx
+++ b/CLICX_Camp_Key_Insights.pptx
@@ -15,9 +15,10 @@
     <p:sldId id="263" r:id="rId9"/>
     <p:sldId id="264" r:id="rId10"/>
     <p:sldId id="265" r:id="rId11"/>
+    <p:sldId id="266" r:id="rId12"/>
   </p:sldIdLst>
   <p:notesMasterIdLst>
-    <p:notesMasterId r:id="rId12"/>
+    <p:notesMasterId r:id="rId13"/>
   </p:notesMasterIdLst>
   <p:sldSz cx="12192000" cy="6858000"/>
   <p:notesSz cx="6858000" cy="12192000"/>
@@ -1562,7 +1563,7 @@
           <a:p>
             <a:r>
               <a:rPr lang="en-US" dirty="0"/>
-              <a:t>Reference table — volumes and stage rates exactly as printed; % of leads computed.</a:t>
+              <a:t>Sequencing matters: items 1 and 2 are prerequisites, 3 to 5 are the value levers, 6 is housekeeping.</a:t>
             </a:r>
             <a:endParaRPr lang="en-US" dirty="0"/>
           </a:p>
@@ -1586,6 +1587,94 @@
             <a:fld id="{F7021451-1387-4CA6-816F-3879F97B5CBC}" type="slidenum">
               <a:rPr lang="en-US"/>
               <a:t>10</a:t>
+            </a:fld>
+            <a:endParaRPr lang="en-US"/>
+          </a:p>
+        </p:txBody>
+      </p:sp>
+    </p:spTree>
+    <p:extLst>
+      <p:ext uri="{BB962C8B-B14F-4D97-AF65-F5344CB8AC3E}">
+        <p14:creationId xmlns:p14="http://schemas.microsoft.com/office/powerpoint/2010/main" val="1024086991"/>
+      </p:ext>
+    </p:extLst>
+  </p:cSld>
+  <p:clrMapOvr>
+    <a:masterClrMapping/>
+  </p:clrMapOvr>
+</p:notes>
+</file>
+
+<file path=ppt/notesSlides/notesSlide11.xml><?xml version="1.0" encoding="utf-8"?>
+<p:notes xmlns:a="http://schemas.openxmlformats.org/drawingml/2006/main" xmlns:r="http://schemas.openxmlformats.org/officeDocument/2006/relationships" xmlns:p="http://schemas.openxmlformats.org/presentationml/2006/main">
+  <p:cSld>
+    <p:spTree>
+      <p:nvGrpSpPr>
+        <p:cNvPr id="1" name=""/>
+        <p:cNvGrpSpPr/>
+        <p:nvPr/>
+      </p:nvGrpSpPr>
+      <p:grpSpPr>
+        <a:xfrm>
+          <a:off x="0" y="0"/>
+          <a:ext cx="0" cy="0"/>
+          <a:chOff x="0" y="0"/>
+          <a:chExt cx="0" cy="0"/>
+        </a:xfrm>
+      </p:grpSpPr>
+      <p:sp>
+        <p:nvSpPr>
+          <p:cNvPr id="2" name="Slide Image Placeholder 1"/>
+          <p:cNvSpPr>
+            <a:spLocks noGrp="1" noRot="1" noChangeAspect="1"/>
+          </p:cNvSpPr>
+          <p:nvPr>
+            <p:ph type="sldImg"/>
+          </p:nvPr>
+        </p:nvSpPr>
+        <p:spPr/>
+      </p:sp>
+      <p:sp>
+        <p:nvSpPr>
+          <p:cNvPr id="3" name="Notes Placeholder 2"/>
+          <p:cNvSpPr>
+            <a:spLocks noGrp="1"/>
+          </p:cNvSpPr>
+          <p:nvPr>
+            <p:ph type="body" idx="1"/>
+          </p:nvPr>
+        </p:nvSpPr>
+        <p:spPr/>
+        <p:txBody>
+          <a:bodyPr/>
+          <a:lstStyle/>
+          <a:p>
+            <a:r>
+              <a:rPr lang="en-US" dirty="0"/>
+              <a:t>Reference table — volumes and stage rates exactly as printed; % of leads computed.</a:t>
+            </a:r>
+            <a:endParaRPr lang="en-US" dirty="0"/>
+          </a:p>
+        </p:txBody>
+      </p:sp>
+      <p:sp>
+        <p:nvSpPr>
+          <p:cNvPr id="4" name="Slide Number Placeholder 3"/>
+          <p:cNvSpPr>
+            <a:spLocks noGrp="1"/>
+          </p:cNvSpPr>
+          <p:nvPr>
+            <p:ph type="sldNum" sz="quarter" idx="10"/>
+          </p:nvPr>
+        </p:nvSpPr>
+        <p:spPr/>
+        <p:txBody>
+          <a:bodyPr/>
+          <a:lstStyle/>
+          <a:p>
+            <a:fld id="{F7021451-1387-4CA6-816F-3879F97B5CBC}" type="slidenum">
+              <a:rPr lang="en-US"/>
+              <a:t>11</a:t>
             </a:fld>
             <a:endParaRPr lang="en-US"/>
           </a:p>
@@ -2002,7 +2091,7 @@
           <a:p>
             <a:r>
               <a:rPr lang="en-US" dirty="0"/>
-              <a:t>Amounts are shown in dashboard units, no currency stated on the source. The 0.1B rounding on both amount tiles is why the per-customer averages are the more useful figures.</a:t>
+              <a:t>Reconciliation: the four groups sum to 49 of 52 campaigns and 8,564.5K of 9,174.3K leads, leaving Administrative. Approvals (13.0K) and bookings (9.7K) match the all-groups totals exactly, so Loan accounts for 100% of both. Loan converts 1.36% of its leads into a booking against 0.11% blended — roughly 13x. Note also that the credit end of the funnel is identical under Loose and Strict criteria; only the top of the funnel moves.</a:t>
             </a:r>
             <a:endParaRPr lang="en-US" dirty="0"/>
           </a:p>
@@ -2090,7 +2179,7 @@
           <a:p>
             <a:r>
               <a:rPr lang="en-US" dirty="0"/>
-              <a:t>Frame these as prerequisites for decisions, not as a reason to stall: the 98.7% top-funnel loss survives any plausible re-baselining.</a:t>
+              <a:t>Amounts are shown in dashboard units, no currency stated on the source. The 0.1B rounding on both amount tiles is why the per-customer averages are the more useful figures.</a:t>
             </a:r>
             <a:endParaRPr lang="en-US" dirty="0"/>
           </a:p>
@@ -2178,7 +2267,7 @@
           <a:p>
             <a:r>
               <a:rPr lang="en-US" dirty="0"/>
-              <a:t>Combined case compounds: 9,174.3K × 20% view × 10% click × 30.5% app-in × 33.6% approve × 85% book = 15.98K bookings.</a:t>
+              <a:t>Frame these as prerequisites for decisions, not as a reason to stall: the 98.7% top-funnel loss survives any plausible re-baselining.</a:t>
             </a:r>
             <a:endParaRPr lang="en-US" dirty="0"/>
           </a:p>
@@ -2266,7 +2355,7 @@
           <a:p>
             <a:r>
               <a:rPr lang="en-US" dirty="0"/>
-              <a:t>Sequencing matters: items 1 and 2 are prerequisites, 3 to 5 are the value levers, 6 is housekeeping.</a:t>
+              <a:t>Combined case compounds: 9,174.3K × 20% view × 10% click × 30.5% app-in × 33.6% approve × 85% book = 15.98K bookings.</a:t>
             </a:r>
             <a:endParaRPr lang="en-US" dirty="0"/>
           </a:p>
@@ -3398,6 +3487,1343 @@
     <p:bg>
       <p:bgPr>
         <a:solidFill>
+          <a:srgbClr val="0E1E3C"/>
+        </a:solidFill>
+      </p:bgPr>
+    </p:bg>
+    <p:spTree>
+      <p:nvGrpSpPr>
+        <p:cNvPr id="1" name=""/>
+        <p:cNvGrpSpPr/>
+        <p:nvPr/>
+      </p:nvGrpSpPr>
+      <p:grpSpPr>
+        <a:xfrm>
+          <a:off x="0" y="0"/>
+          <a:ext cx="0" cy="0"/>
+          <a:chOff x="0" y="0"/>
+          <a:chExt cx="0" cy="0"/>
+        </a:xfrm>
+      </p:grpSpPr>
+      <p:sp>
+        <p:nvSpPr>
+          <p:cNvPr id="2" name="Text 0"/>
+          <p:cNvSpPr/>
+          <p:nvPr/>
+        </p:nvSpPr>
+        <p:spPr>
+          <a:xfrm>
+            <a:off x="548640" y="329184"/>
+            <a:ext cx="11064240" cy="237744"/>
+          </a:xfrm>
+          <a:prstGeom prst="rect">
+            <a:avLst/>
+          </a:prstGeom>
+          <a:noFill/>
+          <a:ln/>
+        </p:spPr>
+        <p:txBody>
+          <a:bodyPr wrap="square" lIns="0" tIns="0" rIns="0" bIns="0" rtlCol="0" anchor="ctr"/>
+          <a:lstStyle/>
+          <a:p>
+            <a:pPr indent="0" marL="0">
+              <a:buNone/>
+            </a:pPr>
+            <a:r>
+              <a:rPr lang="en-US" sz="1150" b="1" spc="220" kern="0" dirty="0">
+                <a:solidFill>
+                  <a:srgbClr val="5FD6BE"/>
+                </a:solidFill>
+                <a:latin typeface="Calibri" pitchFamily="34" charset="0"/>
+                <a:ea typeface="Calibri" pitchFamily="34" charset="-122"/>
+                <a:cs typeface="Calibri" pitchFamily="34" charset="-120"/>
+              </a:rPr>
+              <a:t>RECOMMENDATIONS</a:t>
+            </a:r>
+            <a:endParaRPr lang="en-US" sz="1150" dirty="0"/>
+          </a:p>
+        </p:txBody>
+      </p:sp>
+      <p:sp>
+        <p:nvSpPr>
+          <p:cNvPr id="3" name="Text 1"/>
+          <p:cNvSpPr/>
+          <p:nvPr/>
+        </p:nvSpPr>
+        <p:spPr>
+          <a:xfrm>
+            <a:off x="548640" y="603504"/>
+            <a:ext cx="11064240" cy="658368"/>
+          </a:xfrm>
+          <a:prstGeom prst="rect">
+            <a:avLst/>
+          </a:prstGeom>
+          <a:noFill/>
+          <a:ln/>
+        </p:spPr>
+        <p:txBody>
+          <a:bodyPr wrap="square" lIns="0" tIns="0" rIns="0" bIns="0" rtlCol="0" anchor="t"/>
+          <a:lstStyle/>
+          <a:p>
+            <a:pPr indent="0" marL="0">
+              <a:buNone/>
+            </a:pPr>
+            <a:r>
+              <a:rPr lang="en-US" sz="3200" b="1" dirty="0">
+                <a:solidFill>
+                  <a:srgbClr val="FFFFFF"/>
+                </a:solidFill>
+                <a:latin typeface="Cambria" pitchFamily="34" charset="0"/>
+                <a:ea typeface="Cambria" pitchFamily="34" charset="-122"/>
+                <a:cs typeface="Cambria" pitchFamily="34" charset="-120"/>
+              </a:rPr>
+              <a:t>What to do next</a:t>
+            </a:r>
+            <a:endParaRPr lang="en-US" sz="3200" dirty="0"/>
+          </a:p>
+        </p:txBody>
+      </p:sp>
+      <p:sp>
+        <p:nvSpPr>
+          <p:cNvPr id="4" name="Shape 2"/>
+          <p:cNvSpPr/>
+          <p:nvPr/>
+        </p:nvSpPr>
+        <p:spPr>
+          <a:xfrm>
+            <a:off x="548640" y="1517904"/>
+            <a:ext cx="5468112" cy="1389888"/>
+          </a:xfrm>
+          <a:prstGeom prst="roundRect">
+            <a:avLst>
+              <a:gd name="adj" fmla="val 5921"/>
+            </a:avLst>
+          </a:prstGeom>
+          <a:solidFill>
+            <a:srgbClr val="17294B"/>
+          </a:solidFill>
+          <a:ln/>
+        </p:spPr>
+      </p:sp>
+      <p:sp>
+        <p:nvSpPr>
+          <p:cNvPr id="5" name="Shape 3"/>
+          <p:cNvSpPr/>
+          <p:nvPr/>
+        </p:nvSpPr>
+        <p:spPr>
+          <a:xfrm>
+            <a:off x="841248" y="1755648"/>
+            <a:ext cx="457200" cy="457200"/>
+          </a:xfrm>
+          <a:prstGeom prst="ellipse">
+            <a:avLst/>
+          </a:prstGeom>
+          <a:solidFill>
+            <a:srgbClr val="00A896"/>
+          </a:solidFill>
+          <a:ln/>
+        </p:spPr>
+      </p:sp>
+      <p:sp>
+        <p:nvSpPr>
+          <p:cNvPr id="6" name="Text 4"/>
+          <p:cNvSpPr/>
+          <p:nvPr/>
+        </p:nvSpPr>
+        <p:spPr>
+          <a:xfrm>
+            <a:off x="841248" y="1755648"/>
+            <a:ext cx="457200" cy="457200"/>
+          </a:xfrm>
+          <a:prstGeom prst="rect">
+            <a:avLst/>
+          </a:prstGeom>
+          <a:noFill/>
+          <a:ln/>
+        </p:spPr>
+        <p:txBody>
+          <a:bodyPr wrap="square" lIns="0" tIns="0" rIns="0" bIns="0" rtlCol="0" anchor="ctr"/>
+          <a:lstStyle/>
+          <a:p>
+            <a:pPr algn="ctr" indent="0" marL="0">
+              <a:buNone/>
+            </a:pPr>
+            <a:r>
+              <a:rPr lang="en-US" sz="1500" b="1" dirty="0">
+                <a:solidFill>
+                  <a:srgbClr val="FFFFFF"/>
+                </a:solidFill>
+                <a:latin typeface="Cambria" pitchFamily="34" charset="0"/>
+                <a:ea typeface="Cambria" pitchFamily="34" charset="-122"/>
+                <a:cs typeface="Cambria" pitchFamily="34" charset="-120"/>
+              </a:rPr>
+              <a:t>1</a:t>
+            </a:r>
+            <a:endParaRPr lang="en-US" sz="1500" dirty="0"/>
+          </a:p>
+        </p:txBody>
+      </p:sp>
+      <p:sp>
+        <p:nvSpPr>
+          <p:cNvPr id="7" name="Text 5"/>
+          <p:cNvSpPr/>
+          <p:nvPr/>
+        </p:nvSpPr>
+        <p:spPr>
+          <a:xfrm>
+            <a:off x="1463040" y="1755648"/>
+            <a:ext cx="4261104" cy="457200"/>
+          </a:xfrm>
+          <a:prstGeom prst="rect">
+            <a:avLst/>
+          </a:prstGeom>
+          <a:noFill/>
+          <a:ln/>
+        </p:spPr>
+        <p:txBody>
+          <a:bodyPr wrap="square" lIns="0" tIns="0" rIns="0" bIns="0" rtlCol="0" anchor="ctr"/>
+          <a:lstStyle/>
+          <a:p>
+            <a:pPr indent="0" marL="0">
+              <a:buNone/>
+            </a:pPr>
+            <a:r>
+              <a:rPr lang="en-US" sz="1450" b="1" dirty="0">
+                <a:solidFill>
+                  <a:srgbClr val="FFFFFF"/>
+                </a:solidFill>
+                <a:latin typeface="Cambria" pitchFamily="34" charset="0"/>
+                <a:ea typeface="Cambria" pitchFamily="34" charset="-122"/>
+                <a:cs typeface="Cambria" pitchFamily="34" charset="-120"/>
+              </a:rPr>
+              <a:t>Re-baseline on Strict criteria</a:t>
+            </a:r>
+            <a:endParaRPr lang="en-US" sz="1450" dirty="0"/>
+          </a:p>
+        </p:txBody>
+      </p:sp>
+      <p:sp>
+        <p:nvSpPr>
+          <p:cNvPr id="8" name="Text 6"/>
+          <p:cNvSpPr/>
+          <p:nvPr/>
+        </p:nvSpPr>
+        <p:spPr>
+          <a:xfrm>
+            <a:off x="841248" y="2249424"/>
+            <a:ext cx="4882896" cy="384048"/>
+          </a:xfrm>
+          <a:prstGeom prst="rect">
+            <a:avLst/>
+          </a:prstGeom>
+          <a:noFill/>
+          <a:ln/>
+        </p:spPr>
+        <p:txBody>
+          <a:bodyPr wrap="square" lIns="0" tIns="0" rIns="0" bIns="0" rtlCol="0" anchor="ctr"/>
+          <a:lstStyle/>
+          <a:p>
+            <a:pPr indent="0" marL="0">
+              <a:buNone/>
+            </a:pPr>
+            <a:r>
+              <a:rPr lang="en-US" sz="1050" dirty="0">
+                <a:solidFill>
+                  <a:srgbClr val="C3D0E2"/>
+                </a:solidFill>
+                <a:latin typeface="Calibri" pitchFamily="34" charset="0"/>
+                <a:ea typeface="Calibri" pitchFamily="34" charset="-122"/>
+                <a:cs typeface="Calibri" pitchFamily="34" charset="-120"/>
+              </a:rPr>
+              <a:t>Rerun the funnel under Strict View-and-Click before any budget or targeting decision is taken off these numbers.</a:t>
+            </a:r>
+            <a:endParaRPr lang="en-US" sz="1050" dirty="0"/>
+          </a:p>
+        </p:txBody>
+      </p:sp>
+      <p:sp>
+        <p:nvSpPr>
+          <p:cNvPr id="9" name="Text 7"/>
+          <p:cNvSpPr/>
+          <p:nvPr/>
+        </p:nvSpPr>
+        <p:spPr>
+          <a:xfrm>
+            <a:off x="841248" y="2615184"/>
+            <a:ext cx="4882896" cy="237744"/>
+          </a:xfrm>
+          <a:prstGeom prst="rect">
+            <a:avLst/>
+          </a:prstGeom>
+          <a:noFill/>
+          <a:ln/>
+        </p:spPr>
+        <p:txBody>
+          <a:bodyPr wrap="square" lIns="0" tIns="0" rIns="0" bIns="0" rtlCol="0" anchor="ctr"/>
+          <a:lstStyle/>
+          <a:p>
+            <a:pPr indent="0" marL="0">
+              <a:buNone/>
+            </a:pPr>
+            <a:r>
+              <a:rPr lang="en-US" sz="1000" b="1" spc="80" kern="0" dirty="0">
+                <a:solidFill>
+                  <a:srgbClr val="5FD6BE"/>
+                </a:solidFill>
+                <a:latin typeface="Calibri" pitchFamily="34" charset="0"/>
+                <a:ea typeface="Calibri" pitchFamily="34" charset="-122"/>
+                <a:cs typeface="Calibri" pitchFamily="34" charset="-120"/>
+              </a:rPr>
+              <a:t>Analytics   ·   This week</a:t>
+            </a:r>
+            <a:endParaRPr lang="en-US" sz="1000" dirty="0"/>
+          </a:p>
+        </p:txBody>
+      </p:sp>
+      <p:sp>
+        <p:nvSpPr>
+          <p:cNvPr id="10" name="Shape 8"/>
+          <p:cNvSpPr/>
+          <p:nvPr/>
+        </p:nvSpPr>
+        <p:spPr>
+          <a:xfrm>
+            <a:off x="6208776" y="1517904"/>
+            <a:ext cx="5468112" cy="1389888"/>
+          </a:xfrm>
+          <a:prstGeom prst="roundRect">
+            <a:avLst>
+              <a:gd name="adj" fmla="val 5921"/>
+            </a:avLst>
+          </a:prstGeom>
+          <a:solidFill>
+            <a:srgbClr val="17294B"/>
+          </a:solidFill>
+          <a:ln/>
+        </p:spPr>
+      </p:sp>
+      <p:sp>
+        <p:nvSpPr>
+          <p:cNvPr id="11" name="Shape 9"/>
+          <p:cNvSpPr/>
+          <p:nvPr/>
+        </p:nvSpPr>
+        <p:spPr>
+          <a:xfrm>
+            <a:off x="6501384" y="1755648"/>
+            <a:ext cx="457200" cy="457200"/>
+          </a:xfrm>
+          <a:prstGeom prst="ellipse">
+            <a:avLst/>
+          </a:prstGeom>
+          <a:solidFill>
+            <a:srgbClr val="00A896"/>
+          </a:solidFill>
+          <a:ln/>
+        </p:spPr>
+      </p:sp>
+      <p:sp>
+        <p:nvSpPr>
+          <p:cNvPr id="12" name="Text 10"/>
+          <p:cNvSpPr/>
+          <p:nvPr/>
+        </p:nvSpPr>
+        <p:spPr>
+          <a:xfrm>
+            <a:off x="6501384" y="1755648"/>
+            <a:ext cx="457200" cy="457200"/>
+          </a:xfrm>
+          <a:prstGeom prst="rect">
+            <a:avLst/>
+          </a:prstGeom>
+          <a:noFill/>
+          <a:ln/>
+        </p:spPr>
+        <p:txBody>
+          <a:bodyPr wrap="square" lIns="0" tIns="0" rIns="0" bIns="0" rtlCol="0" anchor="ctr"/>
+          <a:lstStyle/>
+          <a:p>
+            <a:pPr algn="ctr" indent="0" marL="0">
+              <a:buNone/>
+            </a:pPr>
+            <a:r>
+              <a:rPr lang="en-US" sz="1500" b="1" dirty="0">
+                <a:solidFill>
+                  <a:srgbClr val="FFFFFF"/>
+                </a:solidFill>
+                <a:latin typeface="Cambria" pitchFamily="34" charset="0"/>
+                <a:ea typeface="Cambria" pitchFamily="34" charset="-122"/>
+                <a:cs typeface="Cambria" pitchFamily="34" charset="-120"/>
+              </a:rPr>
+              <a:t>2</a:t>
+            </a:r>
+            <a:endParaRPr lang="en-US" sz="1500" dirty="0"/>
+          </a:p>
+        </p:txBody>
+      </p:sp>
+      <p:sp>
+        <p:nvSpPr>
+          <p:cNvPr id="13" name="Text 11"/>
+          <p:cNvSpPr/>
+          <p:nvPr/>
+        </p:nvSpPr>
+        <p:spPr>
+          <a:xfrm>
+            <a:off x="7123176" y="1755648"/>
+            <a:ext cx="4261104" cy="457200"/>
+          </a:xfrm>
+          <a:prstGeom prst="rect">
+            <a:avLst/>
+          </a:prstGeom>
+          <a:noFill/>
+          <a:ln/>
+        </p:spPr>
+        <p:txBody>
+          <a:bodyPr wrap="square" lIns="0" tIns="0" rIns="0" bIns="0" rtlCol="0" anchor="ctr"/>
+          <a:lstStyle/>
+          <a:p>
+            <a:pPr indent="0" marL="0">
+              <a:buNone/>
+            </a:pPr>
+            <a:r>
+              <a:rPr lang="en-US" sz="1450" b="1" dirty="0">
+                <a:solidFill>
+                  <a:srgbClr val="FFFFFF"/>
+                </a:solidFill>
+                <a:latin typeface="Cambria" pitchFamily="34" charset="0"/>
+                <a:ea typeface="Cambria" pitchFamily="34" charset="-122"/>
+                <a:cs typeface="Cambria" pitchFamily="34" charset="-120"/>
+              </a:rPr>
+              <a:t>Fix amount capture at app-in</a:t>
+            </a:r>
+            <a:endParaRPr lang="en-US" sz="1450" dirty="0"/>
+          </a:p>
+        </p:txBody>
+      </p:sp>
+      <p:sp>
+        <p:nvSpPr>
+          <p:cNvPr id="14" name="Text 12"/>
+          <p:cNvSpPr/>
+          <p:nvPr/>
+        </p:nvSpPr>
+        <p:spPr>
+          <a:xfrm>
+            <a:off x="6501384" y="2249424"/>
+            <a:ext cx="4882896" cy="384048"/>
+          </a:xfrm>
+          <a:prstGeom prst="rect">
+            <a:avLst/>
+          </a:prstGeom>
+          <a:noFill/>
+          <a:ln/>
+        </p:spPr>
+        <p:txBody>
+          <a:bodyPr wrap="square" lIns="0" tIns="0" rIns="0" bIns="0" rtlCol="0" anchor="ctr"/>
+          <a:lstStyle/>
+          <a:p>
+            <a:pPr indent="0" marL="0">
+              <a:buNone/>
+            </a:pPr>
+            <a:r>
+              <a:rPr lang="en-US" sz="1050" dirty="0">
+                <a:solidFill>
+                  <a:srgbClr val="C3D0E2"/>
+                </a:solidFill>
+                <a:latin typeface="Calibri" pitchFamily="34" charset="0"/>
+                <a:ea typeface="Calibri" pitchFamily="34" charset="-122"/>
+                <a:cs typeface="Calibri" pitchFamily="34" charset="-120"/>
+              </a:rPr>
+              <a:t>0.0B applied against 0.1B approved is not a rounding issue. Reconcile the App-in and Conversion definitions at the same time.</a:t>
+            </a:r>
+            <a:endParaRPr lang="en-US" sz="1050" dirty="0"/>
+          </a:p>
+        </p:txBody>
+      </p:sp>
+      <p:sp>
+        <p:nvSpPr>
+          <p:cNvPr id="15" name="Text 13"/>
+          <p:cNvSpPr/>
+          <p:nvPr/>
+        </p:nvSpPr>
+        <p:spPr>
+          <a:xfrm>
+            <a:off x="6501384" y="2615184"/>
+            <a:ext cx="4882896" cy="237744"/>
+          </a:xfrm>
+          <a:prstGeom prst="rect">
+            <a:avLst/>
+          </a:prstGeom>
+          <a:noFill/>
+          <a:ln/>
+        </p:spPr>
+        <p:txBody>
+          <a:bodyPr wrap="square" lIns="0" tIns="0" rIns="0" bIns="0" rtlCol="0" anchor="ctr"/>
+          <a:lstStyle/>
+          <a:p>
+            <a:pPr indent="0" marL="0">
+              <a:buNone/>
+            </a:pPr>
+            <a:r>
+              <a:rPr lang="en-US" sz="1000" b="1" spc="80" kern="0" dirty="0">
+                <a:solidFill>
+                  <a:srgbClr val="5FD6BE"/>
+                </a:solidFill>
+                <a:latin typeface="Calibri" pitchFamily="34" charset="0"/>
+                <a:ea typeface="Calibri" pitchFamily="34" charset="-122"/>
+                <a:cs typeface="Calibri" pitchFamily="34" charset="-120"/>
+              </a:rPr>
+              <a:t>Data eng.   ·   This week</a:t>
+            </a:r>
+            <a:endParaRPr lang="en-US" sz="1000" dirty="0"/>
+          </a:p>
+        </p:txBody>
+      </p:sp>
+      <p:sp>
+        <p:nvSpPr>
+          <p:cNvPr id="16" name="Shape 14"/>
+          <p:cNvSpPr/>
+          <p:nvPr/>
+        </p:nvSpPr>
+        <p:spPr>
+          <a:xfrm>
+            <a:off x="548640" y="3090672"/>
+            <a:ext cx="5468112" cy="1389888"/>
+          </a:xfrm>
+          <a:prstGeom prst="roundRect">
+            <a:avLst>
+              <a:gd name="adj" fmla="val 5921"/>
+            </a:avLst>
+          </a:prstGeom>
+          <a:solidFill>
+            <a:srgbClr val="17294B"/>
+          </a:solidFill>
+          <a:ln/>
+        </p:spPr>
+      </p:sp>
+      <p:sp>
+        <p:nvSpPr>
+          <p:cNvPr id="17" name="Shape 15"/>
+          <p:cNvSpPr/>
+          <p:nvPr/>
+        </p:nvSpPr>
+        <p:spPr>
+          <a:xfrm>
+            <a:off x="841248" y="3328416"/>
+            <a:ext cx="457200" cy="457200"/>
+          </a:xfrm>
+          <a:prstGeom prst="ellipse">
+            <a:avLst/>
+          </a:prstGeom>
+          <a:solidFill>
+            <a:srgbClr val="00A896"/>
+          </a:solidFill>
+          <a:ln/>
+        </p:spPr>
+      </p:sp>
+      <p:sp>
+        <p:nvSpPr>
+          <p:cNvPr id="18" name="Text 16"/>
+          <p:cNvSpPr/>
+          <p:nvPr/>
+        </p:nvSpPr>
+        <p:spPr>
+          <a:xfrm>
+            <a:off x="841248" y="3328416"/>
+            <a:ext cx="457200" cy="457200"/>
+          </a:xfrm>
+          <a:prstGeom prst="rect">
+            <a:avLst/>
+          </a:prstGeom>
+          <a:noFill/>
+          <a:ln/>
+        </p:spPr>
+        <p:txBody>
+          <a:bodyPr wrap="square" lIns="0" tIns="0" rIns="0" bIns="0" rtlCol="0" anchor="ctr"/>
+          <a:lstStyle/>
+          <a:p>
+            <a:pPr algn="ctr" indent="0" marL="0">
+              <a:buNone/>
+            </a:pPr>
+            <a:r>
+              <a:rPr lang="en-US" sz="1500" b="1" dirty="0">
+                <a:solidFill>
+                  <a:srgbClr val="FFFFFF"/>
+                </a:solidFill>
+                <a:latin typeface="Cambria" pitchFamily="34" charset="0"/>
+                <a:ea typeface="Cambria" pitchFamily="34" charset="-122"/>
+                <a:cs typeface="Cambria" pitchFamily="34" charset="-120"/>
+              </a:rPr>
+              <a:t>3</a:t>
+            </a:r>
+            <a:endParaRPr lang="en-US" sz="1500" dirty="0"/>
+          </a:p>
+        </p:txBody>
+      </p:sp>
+      <p:sp>
+        <p:nvSpPr>
+          <p:cNvPr id="19" name="Text 17"/>
+          <p:cNvSpPr/>
+          <p:nvPr/>
+        </p:nvSpPr>
+        <p:spPr>
+          <a:xfrm>
+            <a:off x="1463040" y="3328416"/>
+            <a:ext cx="4261104" cy="457200"/>
+          </a:xfrm>
+          <a:prstGeom prst="rect">
+            <a:avLst/>
+          </a:prstGeom>
+          <a:noFill/>
+          <a:ln/>
+        </p:spPr>
+        <p:txBody>
+          <a:bodyPr wrap="square" lIns="0" tIns="0" rIns="0" bIns="0" rtlCol="0" anchor="ctr"/>
+          <a:lstStyle/>
+          <a:p>
+            <a:pPr indent="0" marL="0">
+              <a:buNone/>
+            </a:pPr>
+            <a:r>
+              <a:rPr lang="en-US" sz="1450" b="1" dirty="0">
+                <a:solidFill>
+                  <a:srgbClr val="FFFFFF"/>
+                </a:solidFill>
+                <a:latin typeface="Cambria" pitchFamily="34" charset="0"/>
+                <a:ea typeface="Cambria" pitchFamily="34" charset="-122"/>
+                <a:cs typeface="Cambria" pitchFamily="34" charset="-120"/>
+              </a:rPr>
+              <a:t>Attack the click rate first</a:t>
+            </a:r>
+            <a:endParaRPr lang="en-US" sz="1450" dirty="0"/>
+          </a:p>
+        </p:txBody>
+      </p:sp>
+      <p:sp>
+        <p:nvSpPr>
+          <p:cNvPr id="20" name="Text 18"/>
+          <p:cNvSpPr/>
+          <p:nvPr/>
+        </p:nvSpPr>
+        <p:spPr>
+          <a:xfrm>
+            <a:off x="841248" y="3822192"/>
+            <a:ext cx="4882896" cy="384048"/>
+          </a:xfrm>
+          <a:prstGeom prst="rect">
+            <a:avLst/>
+          </a:prstGeom>
+          <a:noFill/>
+          <a:ln/>
+        </p:spPr>
+        <p:txBody>
+          <a:bodyPr wrap="square" lIns="0" tIns="0" rIns="0" bIns="0" rtlCol="0" anchor="ctr"/>
+          <a:lstStyle/>
+          <a:p>
+            <a:pPr indent="0" marL="0">
+              <a:buNone/>
+            </a:pPr>
+            <a:r>
+              <a:rPr lang="en-US" sz="1050" dirty="0">
+                <a:solidFill>
+                  <a:srgbClr val="C3D0E2"/>
+                </a:solidFill>
+                <a:latin typeface="Calibri" pitchFamily="34" charset="0"/>
+                <a:ea typeface="Calibri" pitchFamily="34" charset="-122"/>
+                <a:cs typeface="Calibri" pitchFamily="34" charset="-120"/>
+              </a:rPr>
+              <a:t>7.9% of viewers click. This is the single highest-leverage number on the dashboard — worth ~2.6K bookings for 2.1 points.</a:t>
+            </a:r>
+            <a:endParaRPr lang="en-US" sz="1050" dirty="0"/>
+          </a:p>
+        </p:txBody>
+      </p:sp>
+      <p:sp>
+        <p:nvSpPr>
+          <p:cNvPr id="21" name="Text 19"/>
+          <p:cNvSpPr/>
+          <p:nvPr/>
+        </p:nvSpPr>
+        <p:spPr>
+          <a:xfrm>
+            <a:off x="841248" y="4187952"/>
+            <a:ext cx="4882896" cy="237744"/>
+          </a:xfrm>
+          <a:prstGeom prst="rect">
+            <a:avLst/>
+          </a:prstGeom>
+          <a:noFill/>
+          <a:ln/>
+        </p:spPr>
+        <p:txBody>
+          <a:bodyPr wrap="square" lIns="0" tIns="0" rIns="0" bIns="0" rtlCol="0" anchor="ctr"/>
+          <a:lstStyle/>
+          <a:p>
+            <a:pPr indent="0" marL="0">
+              <a:buNone/>
+            </a:pPr>
+            <a:r>
+              <a:rPr lang="en-US" sz="1000" b="1" spc="80" kern="0" dirty="0">
+                <a:solidFill>
+                  <a:srgbClr val="5FD6BE"/>
+                </a:solidFill>
+                <a:latin typeface="Calibri" pitchFamily="34" charset="0"/>
+                <a:ea typeface="Calibri" pitchFamily="34" charset="-122"/>
+                <a:cs typeface="Calibri" pitchFamily="34" charset="-120"/>
+              </a:rPr>
+              <a:t>Marketing   ·   Next cycle</a:t>
+            </a:r>
+            <a:endParaRPr lang="en-US" sz="1000" dirty="0"/>
+          </a:p>
+        </p:txBody>
+      </p:sp>
+      <p:sp>
+        <p:nvSpPr>
+          <p:cNvPr id="22" name="Shape 20"/>
+          <p:cNvSpPr/>
+          <p:nvPr/>
+        </p:nvSpPr>
+        <p:spPr>
+          <a:xfrm>
+            <a:off x="6208776" y="3090672"/>
+            <a:ext cx="5468112" cy="1389888"/>
+          </a:xfrm>
+          <a:prstGeom prst="roundRect">
+            <a:avLst>
+              <a:gd name="adj" fmla="val 5921"/>
+            </a:avLst>
+          </a:prstGeom>
+          <a:solidFill>
+            <a:srgbClr val="17294B"/>
+          </a:solidFill>
+          <a:ln/>
+        </p:spPr>
+      </p:sp>
+      <p:sp>
+        <p:nvSpPr>
+          <p:cNvPr id="23" name="Shape 21"/>
+          <p:cNvSpPr/>
+          <p:nvPr/>
+        </p:nvSpPr>
+        <p:spPr>
+          <a:xfrm>
+            <a:off x="6501384" y="3328416"/>
+            <a:ext cx="457200" cy="457200"/>
+          </a:xfrm>
+          <a:prstGeom prst="ellipse">
+            <a:avLst/>
+          </a:prstGeom>
+          <a:solidFill>
+            <a:srgbClr val="00A896"/>
+          </a:solidFill>
+          <a:ln/>
+        </p:spPr>
+      </p:sp>
+      <p:sp>
+        <p:nvSpPr>
+          <p:cNvPr id="24" name="Text 22"/>
+          <p:cNvSpPr/>
+          <p:nvPr/>
+        </p:nvSpPr>
+        <p:spPr>
+          <a:xfrm>
+            <a:off x="6501384" y="3328416"/>
+            <a:ext cx="457200" cy="457200"/>
+          </a:xfrm>
+          <a:prstGeom prst="rect">
+            <a:avLst/>
+          </a:prstGeom>
+          <a:noFill/>
+          <a:ln/>
+        </p:spPr>
+        <p:txBody>
+          <a:bodyPr wrap="square" lIns="0" tIns="0" rIns="0" bIns="0" rtlCol="0" anchor="ctr"/>
+          <a:lstStyle/>
+          <a:p>
+            <a:pPr algn="ctr" indent="0" marL="0">
+              <a:buNone/>
+            </a:pPr>
+            <a:r>
+              <a:rPr lang="en-US" sz="1500" b="1" dirty="0">
+                <a:solidFill>
+                  <a:srgbClr val="FFFFFF"/>
+                </a:solidFill>
+                <a:latin typeface="Cambria" pitchFamily="34" charset="0"/>
+                <a:ea typeface="Cambria" pitchFamily="34" charset="-122"/>
+                <a:cs typeface="Cambria" pitchFamily="34" charset="-120"/>
+              </a:rPr>
+              <a:t>4</a:t>
+            </a:r>
+            <a:endParaRPr lang="en-US" sz="1500" dirty="0"/>
+          </a:p>
+        </p:txBody>
+      </p:sp>
+      <p:sp>
+        <p:nvSpPr>
+          <p:cNvPr id="25" name="Text 23"/>
+          <p:cNvSpPr/>
+          <p:nvPr/>
+        </p:nvSpPr>
+        <p:spPr>
+          <a:xfrm>
+            <a:off x="7123176" y="3328416"/>
+            <a:ext cx="4261104" cy="457200"/>
+          </a:xfrm>
+          <a:prstGeom prst="rect">
+            <a:avLst/>
+          </a:prstGeom>
+          <a:noFill/>
+          <a:ln/>
+        </p:spPr>
+        <p:txBody>
+          <a:bodyPr wrap="square" lIns="0" tIns="0" rIns="0" bIns="0" rtlCol="0" anchor="ctr"/>
+          <a:lstStyle/>
+          <a:p>
+            <a:pPr indent="0" marL="0">
+              <a:buNone/>
+            </a:pPr>
+            <a:r>
+              <a:rPr lang="en-US" sz="1450" b="1" dirty="0">
+                <a:solidFill>
+                  <a:srgbClr val="FFFFFF"/>
+                </a:solidFill>
+                <a:latin typeface="Cambria" pitchFamily="34" charset="0"/>
+                <a:ea typeface="Cambria" pitchFamily="34" charset="-122"/>
+                <a:cs typeface="Cambria" pitchFamily="34" charset="-120"/>
+              </a:rPr>
+              <a:t>Audit the 82.5% who never view</a:t>
+            </a:r>
+            <a:endParaRPr lang="en-US" sz="1450" dirty="0"/>
+          </a:p>
+        </p:txBody>
+      </p:sp>
+      <p:sp>
+        <p:nvSpPr>
+          <p:cNvPr id="26" name="Text 24"/>
+          <p:cNvSpPr/>
+          <p:nvPr/>
+        </p:nvSpPr>
+        <p:spPr>
+          <a:xfrm>
+            <a:off x="6501384" y="3822192"/>
+            <a:ext cx="4882896" cy="384048"/>
+          </a:xfrm>
+          <a:prstGeom prst="rect">
+            <a:avLst/>
+          </a:prstGeom>
+          <a:noFill/>
+          <a:ln/>
+        </p:spPr>
+        <p:txBody>
+          <a:bodyPr wrap="square" lIns="0" tIns="0" rIns="0" bIns="0" rtlCol="0" anchor="ctr"/>
+          <a:lstStyle/>
+          <a:p>
+            <a:pPr indent="0" marL="0">
+              <a:buNone/>
+            </a:pPr>
+            <a:r>
+              <a:rPr lang="en-US" sz="1050" dirty="0">
+                <a:solidFill>
+                  <a:srgbClr val="C3D0E2"/>
+                </a:solidFill>
+                <a:latin typeface="Calibri" pitchFamily="34" charset="0"/>
+                <a:ea typeface="Calibri" pitchFamily="34" charset="-122"/>
+                <a:cs typeface="Calibri" pitchFamily="34" charset="-120"/>
+              </a:rPr>
+              <a:t>7.57M assigned leads register no view at all. Separate 'not delivered' from 'delivered, not opened' before spending on creative.</a:t>
+            </a:r>
+            <a:endParaRPr lang="en-US" sz="1050" dirty="0"/>
+          </a:p>
+        </p:txBody>
+      </p:sp>
+      <p:sp>
+        <p:nvSpPr>
+          <p:cNvPr id="27" name="Text 25"/>
+          <p:cNvSpPr/>
+          <p:nvPr/>
+        </p:nvSpPr>
+        <p:spPr>
+          <a:xfrm>
+            <a:off x="6501384" y="4187952"/>
+            <a:ext cx="4882896" cy="237744"/>
+          </a:xfrm>
+          <a:prstGeom prst="rect">
+            <a:avLst/>
+          </a:prstGeom>
+          <a:noFill/>
+          <a:ln/>
+        </p:spPr>
+        <p:txBody>
+          <a:bodyPr wrap="square" lIns="0" tIns="0" rIns="0" bIns="0" rtlCol="0" anchor="ctr"/>
+          <a:lstStyle/>
+          <a:p>
+            <a:pPr indent="0" marL="0">
+              <a:buNone/>
+            </a:pPr>
+            <a:r>
+              <a:rPr lang="en-US" sz="1000" b="1" spc="80" kern="0" dirty="0">
+                <a:solidFill>
+                  <a:srgbClr val="5FD6BE"/>
+                </a:solidFill>
+                <a:latin typeface="Calibri" pitchFamily="34" charset="0"/>
+                <a:ea typeface="Calibri" pitchFamily="34" charset="-122"/>
+                <a:cs typeface="Calibri" pitchFamily="34" charset="-120"/>
+              </a:rPr>
+              <a:t>Campaign ops   ·   Next cycle</a:t>
+            </a:r>
+            <a:endParaRPr lang="en-US" sz="1000" dirty="0"/>
+          </a:p>
+        </p:txBody>
+      </p:sp>
+      <p:sp>
+        <p:nvSpPr>
+          <p:cNvPr id="28" name="Shape 26"/>
+          <p:cNvSpPr/>
+          <p:nvPr/>
+        </p:nvSpPr>
+        <p:spPr>
+          <a:xfrm>
+            <a:off x="548640" y="4663440"/>
+            <a:ext cx="5468112" cy="1389888"/>
+          </a:xfrm>
+          <a:prstGeom prst="roundRect">
+            <a:avLst>
+              <a:gd name="adj" fmla="val 5921"/>
+            </a:avLst>
+          </a:prstGeom>
+          <a:solidFill>
+            <a:srgbClr val="17294B"/>
+          </a:solidFill>
+          <a:ln/>
+        </p:spPr>
+      </p:sp>
+      <p:sp>
+        <p:nvSpPr>
+          <p:cNvPr id="29" name="Shape 27"/>
+          <p:cNvSpPr/>
+          <p:nvPr/>
+        </p:nvSpPr>
+        <p:spPr>
+          <a:xfrm>
+            <a:off x="841248" y="4901184"/>
+            <a:ext cx="457200" cy="457200"/>
+          </a:xfrm>
+          <a:prstGeom prst="ellipse">
+            <a:avLst/>
+          </a:prstGeom>
+          <a:solidFill>
+            <a:srgbClr val="00A896"/>
+          </a:solidFill>
+          <a:ln/>
+        </p:spPr>
+      </p:sp>
+      <p:sp>
+        <p:nvSpPr>
+          <p:cNvPr id="30" name="Text 28"/>
+          <p:cNvSpPr/>
+          <p:nvPr/>
+        </p:nvSpPr>
+        <p:spPr>
+          <a:xfrm>
+            <a:off x="841248" y="4901184"/>
+            <a:ext cx="457200" cy="457200"/>
+          </a:xfrm>
+          <a:prstGeom prst="rect">
+            <a:avLst/>
+          </a:prstGeom>
+          <a:noFill/>
+          <a:ln/>
+        </p:spPr>
+        <p:txBody>
+          <a:bodyPr wrap="square" lIns="0" tIns="0" rIns="0" bIns="0" rtlCol="0" anchor="ctr"/>
+          <a:lstStyle/>
+          <a:p>
+            <a:pPr algn="ctr" indent="0" marL="0">
+              <a:buNone/>
+            </a:pPr>
+            <a:r>
+              <a:rPr lang="en-US" sz="1500" b="1" dirty="0">
+                <a:solidFill>
+                  <a:srgbClr val="FFFFFF"/>
+                </a:solidFill>
+                <a:latin typeface="Cambria" pitchFamily="34" charset="0"/>
+                <a:ea typeface="Cambria" pitchFamily="34" charset="-122"/>
+                <a:cs typeface="Cambria" pitchFamily="34" charset="-120"/>
+              </a:rPr>
+              <a:t>5</a:t>
+            </a:r>
+            <a:endParaRPr lang="en-US" sz="1500" dirty="0"/>
+          </a:p>
+        </p:txBody>
+      </p:sp>
+      <p:sp>
+        <p:nvSpPr>
+          <p:cNvPr id="31" name="Text 29"/>
+          <p:cNvSpPr/>
+          <p:nvPr/>
+        </p:nvSpPr>
+        <p:spPr>
+          <a:xfrm>
+            <a:off x="1463040" y="4901184"/>
+            <a:ext cx="4261104" cy="457200"/>
+          </a:xfrm>
+          <a:prstGeom prst="rect">
+            <a:avLst/>
+          </a:prstGeom>
+          <a:noFill/>
+          <a:ln/>
+        </p:spPr>
+        <p:txBody>
+          <a:bodyPr wrap="square" lIns="0" tIns="0" rIns="0" bIns="0" rtlCol="0" anchor="ctr"/>
+          <a:lstStyle/>
+          <a:p>
+            <a:pPr indent="0" marL="0">
+              <a:buNone/>
+            </a:pPr>
+            <a:r>
+              <a:rPr lang="en-US" sz="1450" b="1" dirty="0">
+                <a:solidFill>
+                  <a:srgbClr val="FFFFFF"/>
+                </a:solidFill>
+                <a:latin typeface="Cambria" pitchFamily="34" charset="0"/>
+                <a:ea typeface="Cambria" pitchFamily="34" charset="-122"/>
+                <a:cs typeface="Cambria" pitchFamily="34" charset="-120"/>
+              </a:rPr>
+              <a:t>Close the approved-not-booked gap</a:t>
+            </a:r>
+            <a:endParaRPr lang="en-US" sz="1450" dirty="0"/>
+          </a:p>
+        </p:txBody>
+      </p:sp>
+      <p:sp>
+        <p:nvSpPr>
+          <p:cNvPr id="32" name="Text 30"/>
+          <p:cNvSpPr/>
+          <p:nvPr/>
+        </p:nvSpPr>
+        <p:spPr>
+          <a:xfrm>
+            <a:off x="841248" y="5394960"/>
+            <a:ext cx="4882896" cy="384048"/>
+          </a:xfrm>
+          <a:prstGeom prst="rect">
+            <a:avLst/>
+          </a:prstGeom>
+          <a:noFill/>
+          <a:ln/>
+        </p:spPr>
+        <p:txBody>
+          <a:bodyPr wrap="square" lIns="0" tIns="0" rIns="0" bIns="0" rtlCol="0" anchor="ctr"/>
+          <a:lstStyle/>
+          <a:p>
+            <a:pPr indent="0" marL="0">
+              <a:buNone/>
+            </a:pPr>
+            <a:r>
+              <a:rPr lang="en-US" sz="1050" dirty="0">
+                <a:solidFill>
+                  <a:srgbClr val="C3D0E2"/>
+                </a:solidFill>
+                <a:latin typeface="Calibri" pitchFamily="34" charset="0"/>
+                <a:ea typeface="Calibri" pitchFamily="34" charset="-122"/>
+                <a:cs typeface="Calibri" pitchFamily="34" charset="-120"/>
+              </a:rPr>
+              <a:t>25% of approvals never book, and set credit lands 4% under approved. No new traffic needed — ~14M of set credit.</a:t>
+            </a:r>
+            <a:endParaRPr lang="en-US" sz="1050" dirty="0"/>
+          </a:p>
+        </p:txBody>
+      </p:sp>
+      <p:sp>
+        <p:nvSpPr>
+          <p:cNvPr id="33" name="Text 31"/>
+          <p:cNvSpPr/>
+          <p:nvPr/>
+        </p:nvSpPr>
+        <p:spPr>
+          <a:xfrm>
+            <a:off x="841248" y="5760720"/>
+            <a:ext cx="4882896" cy="237744"/>
+          </a:xfrm>
+          <a:prstGeom prst="rect">
+            <a:avLst/>
+          </a:prstGeom>
+          <a:noFill/>
+          <a:ln/>
+        </p:spPr>
+        <p:txBody>
+          <a:bodyPr wrap="square" lIns="0" tIns="0" rIns="0" bIns="0" rtlCol="0" anchor="ctr"/>
+          <a:lstStyle/>
+          <a:p>
+            <a:pPr indent="0" marL="0">
+              <a:buNone/>
+            </a:pPr>
+            <a:r>
+              <a:rPr lang="en-US" sz="1000" b="1" spc="80" kern="0" dirty="0">
+                <a:solidFill>
+                  <a:srgbClr val="5FD6BE"/>
+                </a:solidFill>
+                <a:latin typeface="Calibri" pitchFamily="34" charset="0"/>
+                <a:ea typeface="Calibri" pitchFamily="34" charset="-122"/>
+                <a:cs typeface="Calibri" pitchFamily="34" charset="-120"/>
+              </a:rPr>
+              <a:t>Fulfilment   ·   Next cycle</a:t>
+            </a:r>
+            <a:endParaRPr lang="en-US" sz="1000" dirty="0"/>
+          </a:p>
+        </p:txBody>
+      </p:sp>
+      <p:sp>
+        <p:nvSpPr>
+          <p:cNvPr id="34" name="Shape 32"/>
+          <p:cNvSpPr/>
+          <p:nvPr/>
+        </p:nvSpPr>
+        <p:spPr>
+          <a:xfrm>
+            <a:off x="6208776" y="4663440"/>
+            <a:ext cx="5468112" cy="1389888"/>
+          </a:xfrm>
+          <a:prstGeom prst="roundRect">
+            <a:avLst>
+              <a:gd name="adj" fmla="val 5921"/>
+            </a:avLst>
+          </a:prstGeom>
+          <a:solidFill>
+            <a:srgbClr val="17294B"/>
+          </a:solidFill>
+          <a:ln/>
+        </p:spPr>
+      </p:sp>
+      <p:sp>
+        <p:nvSpPr>
+          <p:cNvPr id="35" name="Shape 33"/>
+          <p:cNvSpPr/>
+          <p:nvPr/>
+        </p:nvSpPr>
+        <p:spPr>
+          <a:xfrm>
+            <a:off x="6501384" y="4901184"/>
+            <a:ext cx="457200" cy="457200"/>
+          </a:xfrm>
+          <a:prstGeom prst="ellipse">
+            <a:avLst/>
+          </a:prstGeom>
+          <a:solidFill>
+            <a:srgbClr val="00A896"/>
+          </a:solidFill>
+          <a:ln/>
+        </p:spPr>
+      </p:sp>
+      <p:sp>
+        <p:nvSpPr>
+          <p:cNvPr id="36" name="Text 34"/>
+          <p:cNvSpPr/>
+          <p:nvPr/>
+        </p:nvSpPr>
+        <p:spPr>
+          <a:xfrm>
+            <a:off x="6501384" y="4901184"/>
+            <a:ext cx="457200" cy="457200"/>
+          </a:xfrm>
+          <a:prstGeom prst="rect">
+            <a:avLst/>
+          </a:prstGeom>
+          <a:noFill/>
+          <a:ln/>
+        </p:spPr>
+        <p:txBody>
+          <a:bodyPr wrap="square" lIns="0" tIns="0" rIns="0" bIns="0" rtlCol="0" anchor="ctr"/>
+          <a:lstStyle/>
+          <a:p>
+            <a:pPr algn="ctr" indent="0" marL="0">
+              <a:buNone/>
+            </a:pPr>
+            <a:r>
+              <a:rPr lang="en-US" sz="1500" b="1" dirty="0">
+                <a:solidFill>
+                  <a:srgbClr val="FFFFFF"/>
+                </a:solidFill>
+                <a:latin typeface="Cambria" pitchFamily="34" charset="0"/>
+                <a:ea typeface="Cambria" pitchFamily="34" charset="-122"/>
+                <a:cs typeface="Cambria" pitchFamily="34" charset="-120"/>
+              </a:rPr>
+              <a:t>6</a:t>
+            </a:r>
+            <a:endParaRPr lang="en-US" sz="1500" dirty="0"/>
+          </a:p>
+        </p:txBody>
+      </p:sp>
+      <p:sp>
+        <p:nvSpPr>
+          <p:cNvPr id="37" name="Text 35"/>
+          <p:cNvSpPr/>
+          <p:nvPr/>
+        </p:nvSpPr>
+        <p:spPr>
+          <a:xfrm>
+            <a:off x="7123176" y="4901184"/>
+            <a:ext cx="4261104" cy="457200"/>
+          </a:xfrm>
+          <a:prstGeom prst="rect">
+            <a:avLst/>
+          </a:prstGeom>
+          <a:noFill/>
+          <a:ln/>
+        </p:spPr>
+        <p:txBody>
+          <a:bodyPr wrap="square" lIns="0" tIns="0" rIns="0" bIns="0" rtlCol="0" anchor="ctr"/>
+          <a:lstStyle/>
+          <a:p>
+            <a:pPr indent="0" marL="0">
+              <a:buNone/>
+            </a:pPr>
+            <a:r>
+              <a:rPr lang="en-US" sz="1450" b="1" dirty="0">
+                <a:solidFill>
+                  <a:srgbClr val="FFFFFF"/>
+                </a:solidFill>
+                <a:latin typeface="Cambria" pitchFamily="34" charset="0"/>
+                <a:ea typeface="Cambria" pitchFamily="34" charset="-122"/>
+                <a:cs typeface="Cambria" pitchFamily="34" charset="-120"/>
+              </a:rPr>
+              <a:t>Instrument or retire Thru-The-Door</a:t>
+            </a:r>
+            <a:endParaRPr lang="en-US" sz="1450" dirty="0"/>
+          </a:p>
+        </p:txBody>
+      </p:sp>
+      <p:sp>
+        <p:nvSpPr>
+          <p:cNvPr id="38" name="Text 36"/>
+          <p:cNvSpPr/>
+          <p:nvPr/>
+        </p:nvSpPr>
+        <p:spPr>
+          <a:xfrm>
+            <a:off x="6501384" y="5394960"/>
+            <a:ext cx="4882896" cy="384048"/>
+          </a:xfrm>
+          <a:prstGeom prst="rect">
+            <a:avLst/>
+          </a:prstGeom>
+          <a:noFill/>
+          <a:ln/>
+        </p:spPr>
+        <p:txBody>
+          <a:bodyPr wrap="square" lIns="0" tIns="0" rIns="0" bIns="0" rtlCol="0" anchor="ctr"/>
+          <a:lstStyle/>
+          <a:p>
+            <a:pPr indent="0" marL="0">
+              <a:buNone/>
+            </a:pPr>
+            <a:r>
+              <a:rPr lang="en-US" sz="1050" dirty="0">
+                <a:solidFill>
+                  <a:srgbClr val="C3D0E2"/>
+                </a:solidFill>
+                <a:latin typeface="Calibri" pitchFamily="34" charset="0"/>
+                <a:ea typeface="Calibri" pitchFamily="34" charset="-122"/>
+                <a:cs typeface="Calibri" pitchFamily="34" charset="-120"/>
+              </a:rPr>
+              <a:t>0.3K and 0.0K across 52 campaigns means the columns currently mislead more than they inform.</a:t>
+            </a:r>
+            <a:endParaRPr lang="en-US" sz="1050" dirty="0"/>
+          </a:p>
+        </p:txBody>
+      </p:sp>
+      <p:sp>
+        <p:nvSpPr>
+          <p:cNvPr id="39" name="Text 37"/>
+          <p:cNvSpPr/>
+          <p:nvPr/>
+        </p:nvSpPr>
+        <p:spPr>
+          <a:xfrm>
+            <a:off x="6501384" y="5760720"/>
+            <a:ext cx="4882896" cy="237744"/>
+          </a:xfrm>
+          <a:prstGeom prst="rect">
+            <a:avLst/>
+          </a:prstGeom>
+          <a:noFill/>
+          <a:ln/>
+        </p:spPr>
+        <p:txBody>
+          <a:bodyPr wrap="square" lIns="0" tIns="0" rIns="0" bIns="0" rtlCol="0" anchor="ctr"/>
+          <a:lstStyle/>
+          <a:p>
+            <a:pPr indent="0" marL="0">
+              <a:buNone/>
+            </a:pPr>
+            <a:r>
+              <a:rPr lang="en-US" sz="1000" b="1" spc="80" kern="0" dirty="0">
+                <a:solidFill>
+                  <a:srgbClr val="5FD6BE"/>
+                </a:solidFill>
+                <a:latin typeface="Calibri" pitchFamily="34" charset="0"/>
+                <a:ea typeface="Calibri" pitchFamily="34" charset="-122"/>
+                <a:cs typeface="Calibri" pitchFamily="34" charset="-120"/>
+              </a:rPr>
+              <a:t>Analytics   ·   Next quarter</a:t>
+            </a:r>
+            <a:endParaRPr lang="en-US" sz="1000" dirty="0"/>
+          </a:p>
+        </p:txBody>
+      </p:sp>
+      <p:sp>
+        <p:nvSpPr>
+          <p:cNvPr id="40" name="Text 38"/>
+          <p:cNvSpPr/>
+          <p:nvPr/>
+        </p:nvSpPr>
+        <p:spPr>
+          <a:xfrm>
+            <a:off x="548640" y="6345936"/>
+            <a:ext cx="11064240" cy="292608"/>
+          </a:xfrm>
+          <a:prstGeom prst="rect">
+            <a:avLst/>
+          </a:prstGeom>
+          <a:noFill/>
+          <a:ln/>
+        </p:spPr>
+        <p:txBody>
+          <a:bodyPr wrap="square" lIns="0" tIns="0" rIns="0" bIns="0" rtlCol="0" anchor="ctr"/>
+          <a:lstStyle/>
+          <a:p>
+            <a:pPr indent="0" marL="0">
+              <a:buNone/>
+            </a:pPr>
+            <a:r>
+              <a:rPr lang="en-US" sz="950" i="1" dirty="0">
+                <a:solidFill>
+                  <a:srgbClr val="A8B4C6"/>
+                </a:solidFill>
+                <a:latin typeface="Calibri" pitchFamily="34" charset="0"/>
+                <a:ea typeface="Calibri" pitchFamily="34" charset="-122"/>
+                <a:cs typeface="Calibri" pitchFamily="34" charset="-120"/>
+              </a:rPr>
+              <a:t>Owners are indicative — to be confirmed with the campaign steering group.</a:t>
+            </a:r>
+            <a:endParaRPr lang="en-US" sz="950" dirty="0"/>
+          </a:p>
+        </p:txBody>
+      </p:sp>
+    </p:spTree>
+  </p:cSld>
+  <p:clrMapOvr>
+    <a:masterClrMapping/>
+  </p:clrMapOvr>
+</p:sld>
+</file>
+
+<file path=ppt/slides/slide11.xml><?xml version="1.0" encoding="utf-8"?>
+<p:sld xmlns:a="http://schemas.openxmlformats.org/drawingml/2006/main" xmlns:r="http://schemas.openxmlformats.org/officeDocument/2006/relationships" xmlns:p="http://schemas.openxmlformats.org/presentationml/2006/main">
+  <p:cSld name="Slide 11">
+    <p:bg>
+      <p:bgPr>
+        <a:solidFill>
           <a:srgbClr val="FFFFFF"/>
         </a:solidFill>
       </p:bgPr>
@@ -3496,7 +4922,7 @@
       </p:sp>
       <p:graphicFrame>
         <p:nvGraphicFramePr>
-          <p:cNvPr id="11" name="Table 0"/>
+          <p:cNvPr id="12" name="Table 0"/>
           <p:cNvGraphicFramePr>
             <a:graphicFrameLocks noGrp="1"/>
           </p:cNvGraphicFramePr>
@@ -11241,6 +12667,3782 @@
     <p:bg>
       <p:bgPr>
         <a:solidFill>
+          <a:srgbClr val="FFFFFF"/>
+        </a:solidFill>
+      </p:bgPr>
+    </p:bg>
+    <p:spTree>
+      <p:nvGrpSpPr>
+        <p:cNvPr id="1" name=""/>
+        <p:cNvGrpSpPr/>
+        <p:nvPr/>
+      </p:nvGrpSpPr>
+      <p:grpSpPr>
+        <a:xfrm>
+          <a:off x="0" y="0"/>
+          <a:ext cx="0" cy="0"/>
+          <a:chOff x="0" y="0"/>
+          <a:chExt cx="0" cy="0"/>
+        </a:xfrm>
+      </p:grpSpPr>
+      <p:sp>
+        <p:nvSpPr>
+          <p:cNvPr id="2" name="Text 0"/>
+          <p:cNvSpPr/>
+          <p:nvPr/>
+        </p:nvSpPr>
+        <p:spPr>
+          <a:xfrm>
+            <a:off x="548640" y="329184"/>
+            <a:ext cx="11064240" cy="237744"/>
+          </a:xfrm>
+          <a:prstGeom prst="rect">
+            <a:avLst/>
+          </a:prstGeom>
+          <a:noFill/>
+          <a:ln/>
+        </p:spPr>
+        <p:txBody>
+          <a:bodyPr wrap="square" lIns="0" tIns="0" rIns="0" bIns="0" rtlCol="0" anchor="ctr"/>
+          <a:lstStyle/>
+          <a:p>
+            <a:pPr indent="0" marL="0">
+              <a:buNone/>
+            </a:pPr>
+            <a:r>
+              <a:rPr lang="en-US" sz="1150" b="1" spc="220" kern="0" dirty="0">
+                <a:solidFill>
+                  <a:srgbClr val="00A896"/>
+                </a:solidFill>
+                <a:latin typeface="Calibri" pitchFamily="34" charset="0"/>
+                <a:ea typeface="Calibri" pitchFamily="34" charset="-122"/>
+                <a:cs typeface="Calibri" pitchFamily="34" charset="-120"/>
+              </a:rPr>
+              <a:t>PRODUCT GROUP BREAKDOWN · STRICT CRITERIA</a:t>
+            </a:r>
+            <a:endParaRPr lang="en-US" sz="1150" dirty="0"/>
+          </a:p>
+        </p:txBody>
+      </p:sp>
+      <p:sp>
+        <p:nvSpPr>
+          <p:cNvPr id="3" name="Text 1"/>
+          <p:cNvSpPr/>
+          <p:nvPr/>
+        </p:nvSpPr>
+        <p:spPr>
+          <a:xfrm>
+            <a:off x="548640" y="603504"/>
+            <a:ext cx="11064240" cy="658368"/>
+          </a:xfrm>
+          <a:prstGeom prst="rect">
+            <a:avLst/>
+          </a:prstGeom>
+          <a:noFill/>
+          <a:ln/>
+        </p:spPr>
+        <p:txBody>
+          <a:bodyPr wrap="square" lIns="0" tIns="0" rIns="0" bIns="0" rtlCol="0" anchor="t"/>
+          <a:lstStyle/>
+          <a:p>
+            <a:pPr indent="0" marL="0">
+              <a:buNone/>
+            </a:pPr>
+            <a:r>
+              <a:rPr lang="en-US" sz="3200" b="1" dirty="0">
+                <a:solidFill>
+                  <a:srgbClr val="16233D"/>
+                </a:solidFill>
+                <a:latin typeface="Cambria" pitchFamily="34" charset="0"/>
+                <a:ea typeface="Cambria" pitchFamily="34" charset="-122"/>
+                <a:cs typeface="Cambria" pitchFamily="34" charset="-120"/>
+              </a:rPr>
+              <a:t>Loan is the entire credit business</a:t>
+            </a:r>
+            <a:endParaRPr lang="en-US" sz="3200" dirty="0"/>
+          </a:p>
+        </p:txBody>
+      </p:sp>
+      <p:sp>
+        <p:nvSpPr>
+          <p:cNvPr id="4" name="Shape 2"/>
+          <p:cNvSpPr/>
+          <p:nvPr/>
+        </p:nvSpPr>
+        <p:spPr>
+          <a:xfrm>
+            <a:off x="548640" y="1371600"/>
+            <a:ext cx="3529584" cy="1481328"/>
+          </a:xfrm>
+          <a:prstGeom prst="roundRect">
+            <a:avLst>
+              <a:gd name="adj" fmla="val 5556"/>
+            </a:avLst>
+          </a:prstGeom>
+          <a:solidFill>
+            <a:srgbClr val="E8F6F3"/>
+          </a:solidFill>
+          <a:ln/>
+        </p:spPr>
+      </p:sp>
+      <p:sp>
+        <p:nvSpPr>
+          <p:cNvPr id="5" name="Text 3"/>
+          <p:cNvSpPr/>
+          <p:nvPr/>
+        </p:nvSpPr>
+        <p:spPr>
+          <a:xfrm>
+            <a:off x="804672" y="1481328"/>
+            <a:ext cx="3017520" cy="420624"/>
+          </a:xfrm>
+          <a:prstGeom prst="rect">
+            <a:avLst/>
+          </a:prstGeom>
+          <a:noFill/>
+          <a:ln/>
+        </p:spPr>
+        <p:txBody>
+          <a:bodyPr wrap="square" lIns="0" tIns="0" rIns="0" bIns="0" rtlCol="0" anchor="ctr"/>
+          <a:lstStyle/>
+          <a:p>
+            <a:pPr indent="0" marL="0">
+              <a:buNone/>
+            </a:pPr>
+            <a:r>
+              <a:rPr lang="en-US" sz="2600" b="1" dirty="0">
+                <a:solidFill>
+                  <a:srgbClr val="00A896"/>
+                </a:solidFill>
+                <a:latin typeface="Cambria" pitchFamily="34" charset="0"/>
+                <a:ea typeface="Cambria" pitchFamily="34" charset="-122"/>
+                <a:cs typeface="Cambria" pitchFamily="34" charset="-120"/>
+              </a:rPr>
+              <a:t>100%</a:t>
+            </a:r>
+            <a:endParaRPr lang="en-US" sz="2600" dirty="0"/>
+          </a:p>
+        </p:txBody>
+      </p:sp>
+      <p:sp>
+        <p:nvSpPr>
+          <p:cNvPr id="6" name="Text 4"/>
+          <p:cNvSpPr/>
+          <p:nvPr/>
+        </p:nvSpPr>
+        <p:spPr>
+          <a:xfrm>
+            <a:off x="804672" y="1901952"/>
+            <a:ext cx="3017520" cy="274320"/>
+          </a:xfrm>
+          <a:prstGeom prst="rect">
+            <a:avLst/>
+          </a:prstGeom>
+          <a:noFill/>
+          <a:ln/>
+        </p:spPr>
+        <p:txBody>
+          <a:bodyPr wrap="square" lIns="0" tIns="0" rIns="0" bIns="0" rtlCol="0" anchor="t"/>
+          <a:lstStyle/>
+          <a:p>
+            <a:pPr indent="0" marL="0">
+              <a:buNone/>
+            </a:pPr>
+            <a:r>
+              <a:rPr lang="en-US" sz="1200" b="1" dirty="0">
+                <a:solidFill>
+                  <a:srgbClr val="16233D"/>
+                </a:solidFill>
+                <a:latin typeface="Calibri" pitchFamily="34" charset="0"/>
+                <a:ea typeface="Calibri" pitchFamily="34" charset="-122"/>
+                <a:cs typeface="Calibri" pitchFamily="34" charset="-120"/>
+              </a:rPr>
+              <a:t>of approvals and bookings</a:t>
+            </a:r>
+            <a:endParaRPr lang="en-US" sz="1200" dirty="0"/>
+          </a:p>
+        </p:txBody>
+      </p:sp>
+      <p:sp>
+        <p:nvSpPr>
+          <p:cNvPr id="7" name="Text 5"/>
+          <p:cNvSpPr/>
+          <p:nvPr/>
+        </p:nvSpPr>
+        <p:spPr>
+          <a:xfrm>
+            <a:off x="804672" y="2194560"/>
+            <a:ext cx="3017520" cy="566928"/>
+          </a:xfrm>
+          <a:prstGeom prst="rect">
+            <a:avLst/>
+          </a:prstGeom>
+          <a:noFill/>
+          <a:ln/>
+        </p:spPr>
+        <p:txBody>
+          <a:bodyPr wrap="square" lIns="0" tIns="0" rIns="0" bIns="0" rtlCol="0" anchor="t"/>
+          <a:lstStyle/>
+          <a:p>
+            <a:pPr indent="0" marL="0">
+              <a:buNone/>
+            </a:pPr>
+            <a:r>
+              <a:rPr lang="en-US" sz="1000" dirty="0">
+                <a:solidFill>
+                  <a:srgbClr val="44536B"/>
+                </a:solidFill>
+                <a:latin typeface="Calibri" pitchFamily="34" charset="0"/>
+                <a:ea typeface="Calibri" pitchFamily="34" charset="-122"/>
+                <a:cs typeface="Calibri" pitchFamily="34" charset="-120"/>
+              </a:rPr>
+              <a:t>All 13.0K approvals and all 9.7K bookings reconcile to Loan alone — no other group contributes any.</a:t>
+            </a:r>
+            <a:endParaRPr lang="en-US" sz="1000" dirty="0"/>
+          </a:p>
+        </p:txBody>
+      </p:sp>
+      <p:sp>
+        <p:nvSpPr>
+          <p:cNvPr id="8" name="Shape 6"/>
+          <p:cNvSpPr/>
+          <p:nvPr/>
+        </p:nvSpPr>
+        <p:spPr>
+          <a:xfrm>
+            <a:off x="4270248" y="1371600"/>
+            <a:ext cx="3529584" cy="1481328"/>
+          </a:xfrm>
+          <a:prstGeom prst="roundRect">
+            <a:avLst>
+              <a:gd name="adj" fmla="val 5556"/>
+            </a:avLst>
+          </a:prstGeom>
+          <a:solidFill>
+            <a:srgbClr val="E8F6F3"/>
+          </a:solidFill>
+          <a:ln/>
+        </p:spPr>
+      </p:sp>
+      <p:sp>
+        <p:nvSpPr>
+          <p:cNvPr id="9" name="Text 7"/>
+          <p:cNvSpPr/>
+          <p:nvPr/>
+        </p:nvSpPr>
+        <p:spPr>
+          <a:xfrm>
+            <a:off x="4526280" y="1481328"/>
+            <a:ext cx="3017520" cy="420624"/>
+          </a:xfrm>
+          <a:prstGeom prst="rect">
+            <a:avLst/>
+          </a:prstGeom>
+          <a:noFill/>
+          <a:ln/>
+        </p:spPr>
+        <p:txBody>
+          <a:bodyPr wrap="square" lIns="0" tIns="0" rIns="0" bIns="0" rtlCol="0" anchor="ctr"/>
+          <a:lstStyle/>
+          <a:p>
+            <a:pPr indent="0" marL="0">
+              <a:buNone/>
+            </a:pPr>
+            <a:r>
+              <a:rPr lang="en-US" sz="2600" b="1" dirty="0">
+                <a:solidFill>
+                  <a:srgbClr val="00A896"/>
+                </a:solidFill>
+                <a:latin typeface="Cambria" pitchFamily="34" charset="0"/>
+                <a:ea typeface="Cambria" pitchFamily="34" charset="-122"/>
+                <a:cs typeface="Cambria" pitchFamily="34" charset="-120"/>
+              </a:rPr>
+              <a:t>8.3%</a:t>
+            </a:r>
+            <a:endParaRPr lang="en-US" sz="2600" dirty="0"/>
+          </a:p>
+        </p:txBody>
+      </p:sp>
+      <p:sp>
+        <p:nvSpPr>
+          <p:cNvPr id="10" name="Text 8"/>
+          <p:cNvSpPr/>
+          <p:nvPr/>
+        </p:nvSpPr>
+        <p:spPr>
+          <a:xfrm>
+            <a:off x="4526280" y="1901952"/>
+            <a:ext cx="3017520" cy="274320"/>
+          </a:xfrm>
+          <a:prstGeom prst="rect">
+            <a:avLst/>
+          </a:prstGeom>
+          <a:noFill/>
+          <a:ln/>
+        </p:spPr>
+        <p:txBody>
+          <a:bodyPr wrap="square" lIns="0" tIns="0" rIns="0" bIns="0" rtlCol="0" anchor="t"/>
+          <a:lstStyle/>
+          <a:p>
+            <a:pPr indent="0" marL="0">
+              <a:buNone/>
+            </a:pPr>
+            <a:r>
+              <a:rPr lang="en-US" sz="1200" b="1" dirty="0">
+                <a:solidFill>
+                  <a:srgbClr val="16233D"/>
+                </a:solidFill>
+                <a:latin typeface="Calibri" pitchFamily="34" charset="0"/>
+                <a:ea typeface="Calibri" pitchFamily="34" charset="-122"/>
+                <a:cs typeface="Calibri" pitchFamily="34" charset="-120"/>
+              </a:rPr>
+              <a:t>of leads is all Loan gets</a:t>
+            </a:r>
+            <a:endParaRPr lang="en-US" sz="1200" dirty="0"/>
+          </a:p>
+        </p:txBody>
+      </p:sp>
+      <p:sp>
+        <p:nvSpPr>
+          <p:cNvPr id="11" name="Text 9"/>
+          <p:cNvSpPr/>
+          <p:nvPr/>
+        </p:nvSpPr>
+        <p:spPr>
+          <a:xfrm>
+            <a:off x="4526280" y="2194560"/>
+            <a:ext cx="3017520" cy="566928"/>
+          </a:xfrm>
+          <a:prstGeom prst="rect">
+            <a:avLst/>
+          </a:prstGeom>
+          <a:noFill/>
+          <a:ln/>
+        </p:spPr>
+        <p:txBody>
+          <a:bodyPr wrap="square" lIns="0" tIns="0" rIns="0" bIns="0" rtlCol="0" anchor="t"/>
+          <a:lstStyle/>
+          <a:p>
+            <a:pPr indent="0" marL="0">
+              <a:buNone/>
+            </a:pPr>
+            <a:r>
+              <a:rPr lang="en-US" sz="1000" dirty="0">
+                <a:solidFill>
+                  <a:srgbClr val="44536B"/>
+                </a:solidFill>
+                <a:latin typeface="Calibri" pitchFamily="34" charset="0"/>
+                <a:ea typeface="Calibri" pitchFamily="34" charset="-122"/>
+                <a:cs typeface="Calibri" pitchFamily="34" charset="-120"/>
+              </a:rPr>
+              <a:t>714.6K of the 8,564.5K leads across the four groups, spread over just 11 campaigns.</a:t>
+            </a:r>
+            <a:endParaRPr lang="en-US" sz="1000" dirty="0"/>
+          </a:p>
+        </p:txBody>
+      </p:sp>
+      <p:sp>
+        <p:nvSpPr>
+          <p:cNvPr id="12" name="Shape 10"/>
+          <p:cNvSpPr/>
+          <p:nvPr/>
+        </p:nvSpPr>
+        <p:spPr>
+          <a:xfrm>
+            <a:off x="7991856" y="1371600"/>
+            <a:ext cx="3529584" cy="1481328"/>
+          </a:xfrm>
+          <a:prstGeom prst="roundRect">
+            <a:avLst>
+              <a:gd name="adj" fmla="val 5556"/>
+            </a:avLst>
+          </a:prstGeom>
+          <a:solidFill>
+            <a:srgbClr val="FBF0E6"/>
+          </a:solidFill>
+          <a:ln/>
+        </p:spPr>
+      </p:sp>
+      <p:sp>
+        <p:nvSpPr>
+          <p:cNvPr id="13" name="Text 11"/>
+          <p:cNvSpPr/>
+          <p:nvPr/>
+        </p:nvSpPr>
+        <p:spPr>
+          <a:xfrm>
+            <a:off x="8247888" y="1481328"/>
+            <a:ext cx="3017520" cy="420624"/>
+          </a:xfrm>
+          <a:prstGeom prst="rect">
+            <a:avLst/>
+          </a:prstGeom>
+          <a:noFill/>
+          <a:ln/>
+        </p:spPr>
+        <p:txBody>
+          <a:bodyPr wrap="square" lIns="0" tIns="0" rIns="0" bIns="0" rtlCol="0" anchor="ctr"/>
+          <a:lstStyle/>
+          <a:p>
+            <a:pPr indent="0" marL="0">
+              <a:buNone/>
+            </a:pPr>
+            <a:r>
+              <a:rPr lang="en-US" sz="2600" b="1" dirty="0">
+                <a:solidFill>
+                  <a:srgbClr val="D9503F"/>
+                </a:solidFill>
+                <a:latin typeface="Cambria" pitchFamily="34" charset="0"/>
+                <a:ea typeface="Cambria" pitchFamily="34" charset="-122"/>
+                <a:cs typeface="Cambria" pitchFamily="34" charset="-120"/>
+              </a:rPr>
+              <a:t>50.9%</a:t>
+            </a:r>
+            <a:endParaRPr lang="en-US" sz="2600" dirty="0"/>
+          </a:p>
+        </p:txBody>
+      </p:sp>
+      <p:sp>
+        <p:nvSpPr>
+          <p:cNvPr id="14" name="Text 12"/>
+          <p:cNvSpPr/>
+          <p:nvPr/>
+        </p:nvSpPr>
+        <p:spPr>
+          <a:xfrm>
+            <a:off x="8247888" y="1901952"/>
+            <a:ext cx="3017520" cy="274320"/>
+          </a:xfrm>
+          <a:prstGeom prst="rect">
+            <a:avLst/>
+          </a:prstGeom>
+          <a:noFill/>
+          <a:ln/>
+        </p:spPr>
+        <p:txBody>
+          <a:bodyPr wrap="square" lIns="0" tIns="0" rIns="0" bIns="0" rtlCol="0" anchor="t"/>
+          <a:lstStyle/>
+          <a:p>
+            <a:pPr indent="0" marL="0">
+              <a:buNone/>
+            </a:pPr>
+            <a:r>
+              <a:rPr lang="en-US" sz="1200" b="1" dirty="0">
+                <a:solidFill>
+                  <a:srgbClr val="16233D"/>
+                </a:solidFill>
+                <a:latin typeface="Calibri" pitchFamily="34" charset="0"/>
+                <a:ea typeface="Calibri" pitchFamily="34" charset="-122"/>
+                <a:cs typeface="Calibri" pitchFamily="34" charset="-120"/>
+              </a:rPr>
+              <a:t>of leads sit in Marketing</a:t>
+            </a:r>
+            <a:endParaRPr lang="en-US" sz="1200" dirty="0"/>
+          </a:p>
+        </p:txBody>
+      </p:sp>
+      <p:sp>
+        <p:nvSpPr>
+          <p:cNvPr id="15" name="Text 13"/>
+          <p:cNvSpPr/>
+          <p:nvPr/>
+        </p:nvSpPr>
+        <p:spPr>
+          <a:xfrm>
+            <a:off x="8247888" y="2194560"/>
+            <a:ext cx="3017520" cy="566928"/>
+          </a:xfrm>
+          <a:prstGeom prst="rect">
+            <a:avLst/>
+          </a:prstGeom>
+          <a:noFill/>
+          <a:ln/>
+        </p:spPr>
+        <p:txBody>
+          <a:bodyPr wrap="square" lIns="0" tIns="0" rIns="0" bIns="0" rtlCol="0" anchor="t"/>
+          <a:lstStyle/>
+          <a:p>
+            <a:pPr indent="0" marL="0">
+              <a:buNone/>
+            </a:pPr>
+            <a:r>
+              <a:rPr lang="en-US" sz="1000" dirty="0">
+                <a:solidFill>
+                  <a:srgbClr val="44536B"/>
+                </a:solidFill>
+                <a:latin typeface="Calibri" pitchFamily="34" charset="0"/>
+                <a:ea typeface="Calibri" pitchFamily="34" charset="-122"/>
+                <a:cs typeface="Calibri" pitchFamily="34" charset="-120"/>
+              </a:rPr>
+              <a:t>4,357.3K leads, the lowest click rate of any group at 4.6%, and zero conversions out the other end.</a:t>
+            </a:r>
+            <a:endParaRPr lang="en-US" sz="1000" dirty="0"/>
+          </a:p>
+        </p:txBody>
+      </p:sp>
+      <p:graphicFrame>
+        <p:nvGraphicFramePr>
+          <p:cNvPr id="7" name="Table 0"/>
+          <p:cNvGraphicFramePr>
+            <a:graphicFrameLocks noGrp="1"/>
+          </p:cNvGraphicFramePr>
+          <p:nvPr>
+            <p:extLst>
+              <p:ext uri="{D42A27DB-BD31-4B8C-83A1-F6EECF244321}">
+                <p14:modId xmlns:p14="http://schemas.microsoft.com/office/powerpoint/2010/main" val="1579011935"/>
+              </p:ext>
+            </p:extLst>
+          </p:nvPr>
+        </p:nvGraphicFramePr>
+        <p:xfrm>
+          <a:off x="548640" y="3035808"/>
+          <a:ext cx="11064240" cy="914400"/>
+        </p:xfrm>
+        <a:graphic>
+          <a:graphicData uri="http://schemas.openxmlformats.org/drawingml/2006/table">
+            <a:tbl>
+              <a:tblPr/>
+              <a:tblGrid>
+                <a:gridCol w="1554480"/>
+                <a:gridCol w="1051560"/>
+                <a:gridCol w="1234440"/>
+                <a:gridCol w="868680"/>
+                <a:gridCol w="868680"/>
+                <a:gridCol w="868680"/>
+                <a:gridCol w="868680"/>
+                <a:gridCol w="777240"/>
+                <a:gridCol w="2971800"/>
+              </a:tblGrid>
+              <a:tr h="402336">
+                <a:tc>
+                  <a:txBody>
+                    <a:bodyPr/>
+                    <a:lstStyle/>
+                    <a:p>
+                      <a:pPr algn="l" indent="0" marL="0">
+                        <a:buNone/>
+                      </a:pPr>
+                      <a:r>
+                        <a:rPr lang="en-US" sz="1050" b="1" dirty="0">
+                          <a:solidFill>
+                            <a:srgbClr val="FFFFFF"/>
+                          </a:solidFill>
+                          <a:latin typeface="Calibri" pitchFamily="34" charset="0"/>
+                          <a:ea typeface="Calibri" pitchFamily="34" charset="-122"/>
+                          <a:cs typeface="Calibri" pitchFamily="34" charset="-120"/>
+                        </a:rPr>
+                        <a:t>Product group</a:t>
+                      </a:r>
+                      <a:endParaRPr lang="en-US" sz="1050" dirty="0">
+                        <a:latin typeface="Calibri" charset="0"/>
+                        <a:ea typeface="Calibri" charset="0"/>
+                        <a:cs typeface="Calibri" charset="0"/>
+                      </a:endParaRPr>
+                    </a:p>
+                  </a:txBody>
+                  <a:tcPr marL="82296" marR="82296" marT="36576" marB="36576" anchor="ctr">
+                    <a:lnL w="6350" cap="flat" cmpd="sng" algn="ctr">
+                      <a:solidFill>
+                        <a:srgbClr val="D8DFE9"/>
+                      </a:solidFill>
+                      <a:prstDash val="solid"/>
+                      <a:round/>
+                      <a:headEnd type="none" w="med" len="med"/>
+                      <a:tailEnd type="none" w="med" len="med"/>
+                    </a:lnL>
+                    <a:lnR w="6350" cap="flat" cmpd="sng" algn="ctr">
+                      <a:solidFill>
+                        <a:srgbClr val="D8DFE9"/>
+                      </a:solidFill>
+                      <a:prstDash val="solid"/>
+                      <a:round/>
+                      <a:headEnd type="none" w="med" len="med"/>
+                      <a:tailEnd type="none" w="med" len="med"/>
+                    </a:lnR>
+                    <a:lnT w="6350" cap="flat" cmpd="sng" algn="ctr">
+                      <a:solidFill>
+                        <a:srgbClr val="D8DFE9"/>
+                      </a:solidFill>
+                      <a:prstDash val="solid"/>
+                      <a:round/>
+                      <a:headEnd type="none" w="med" len="med"/>
+                      <a:tailEnd type="none" w="med" len="med"/>
+                    </a:lnT>
+                    <a:lnB w="6350" cap="flat" cmpd="sng" algn="ctr">
+                      <a:solidFill>
+                        <a:srgbClr val="D8DFE9"/>
+                      </a:solidFill>
+                      <a:prstDash val="solid"/>
+                      <a:round/>
+                      <a:headEnd type="none" w="med" len="med"/>
+                      <a:tailEnd type="none" w="med" len="med"/>
+                    </a:lnB>
+                    <a:solidFill>
+                      <a:srgbClr val="0E1E3C"/>
+                    </a:solidFill>
+                  </a:tcPr>
+                </a:tc>
+                <a:tc>
+                  <a:txBody>
+                    <a:bodyPr/>
+                    <a:lstStyle/>
+                    <a:p>
+                      <a:pPr algn="l" indent="0" marL="0">
+                        <a:buNone/>
+                      </a:pPr>
+                      <a:r>
+                        <a:rPr lang="en-US" sz="1050" b="1" dirty="0">
+                          <a:solidFill>
+                            <a:srgbClr val="FFFFFF"/>
+                          </a:solidFill>
+                          <a:latin typeface="Calibri" pitchFamily="34" charset="0"/>
+                          <a:ea typeface="Calibri" pitchFamily="34" charset="-122"/>
+                          <a:cs typeface="Calibri" pitchFamily="34" charset="-120"/>
+                        </a:rPr>
+                        <a:t>Campaigns</a:t>
+                      </a:r>
+                      <a:endParaRPr lang="en-US" sz="1050" dirty="0">
+                        <a:latin typeface="Calibri" charset="0"/>
+                        <a:ea typeface="Calibri" charset="0"/>
+                        <a:cs typeface="Calibri" charset="0"/>
+                      </a:endParaRPr>
+                    </a:p>
+                  </a:txBody>
+                  <a:tcPr marL="82296" marR="82296" marT="36576" marB="36576" anchor="ctr">
+                    <a:lnL w="6350" cap="flat" cmpd="sng" algn="ctr">
+                      <a:solidFill>
+                        <a:srgbClr val="D8DFE9"/>
+                      </a:solidFill>
+                      <a:prstDash val="solid"/>
+                      <a:round/>
+                      <a:headEnd type="none" w="med" len="med"/>
+                      <a:tailEnd type="none" w="med" len="med"/>
+                    </a:lnL>
+                    <a:lnR w="6350" cap="flat" cmpd="sng" algn="ctr">
+                      <a:solidFill>
+                        <a:srgbClr val="D8DFE9"/>
+                      </a:solidFill>
+                      <a:prstDash val="solid"/>
+                      <a:round/>
+                      <a:headEnd type="none" w="med" len="med"/>
+                      <a:tailEnd type="none" w="med" len="med"/>
+                    </a:lnR>
+                    <a:lnT w="6350" cap="flat" cmpd="sng" algn="ctr">
+                      <a:solidFill>
+                        <a:srgbClr val="D8DFE9"/>
+                      </a:solidFill>
+                      <a:prstDash val="solid"/>
+                      <a:round/>
+                      <a:headEnd type="none" w="med" len="med"/>
+                      <a:tailEnd type="none" w="med" len="med"/>
+                    </a:lnT>
+                    <a:lnB w="6350" cap="flat" cmpd="sng" algn="ctr">
+                      <a:solidFill>
+                        <a:srgbClr val="D8DFE9"/>
+                      </a:solidFill>
+                      <a:prstDash val="solid"/>
+                      <a:round/>
+                      <a:headEnd type="none" w="med" len="med"/>
+                      <a:tailEnd type="none" w="med" len="med"/>
+                    </a:lnB>
+                    <a:solidFill>
+                      <a:srgbClr val="0E1E3C"/>
+                    </a:solidFill>
+                  </a:tcPr>
+                </a:tc>
+                <a:tc>
+                  <a:txBody>
+                    <a:bodyPr/>
+                    <a:lstStyle/>
+                    <a:p>
+                      <a:pPr algn="l" indent="0" marL="0">
+                        <a:buNone/>
+                      </a:pPr>
+                      <a:r>
+                        <a:rPr lang="en-US" sz="1050" b="1" dirty="0">
+                          <a:solidFill>
+                            <a:srgbClr val="FFFFFF"/>
+                          </a:solidFill>
+                          <a:latin typeface="Calibri" pitchFamily="34" charset="0"/>
+                          <a:ea typeface="Calibri" pitchFamily="34" charset="-122"/>
+                          <a:cs typeface="Calibri" pitchFamily="34" charset="-120"/>
+                        </a:rPr>
+                        <a:t>Leads</a:t>
+                      </a:r>
+                      <a:endParaRPr lang="en-US" sz="1050" dirty="0">
+                        <a:latin typeface="Calibri" charset="0"/>
+                        <a:ea typeface="Calibri" charset="0"/>
+                        <a:cs typeface="Calibri" charset="0"/>
+                      </a:endParaRPr>
+                    </a:p>
+                  </a:txBody>
+                  <a:tcPr marL="82296" marR="82296" marT="36576" marB="36576" anchor="ctr">
+                    <a:lnL w="6350" cap="flat" cmpd="sng" algn="ctr">
+                      <a:solidFill>
+                        <a:srgbClr val="D8DFE9"/>
+                      </a:solidFill>
+                      <a:prstDash val="solid"/>
+                      <a:round/>
+                      <a:headEnd type="none" w="med" len="med"/>
+                      <a:tailEnd type="none" w="med" len="med"/>
+                    </a:lnL>
+                    <a:lnR w="6350" cap="flat" cmpd="sng" algn="ctr">
+                      <a:solidFill>
+                        <a:srgbClr val="D8DFE9"/>
+                      </a:solidFill>
+                      <a:prstDash val="solid"/>
+                      <a:round/>
+                      <a:headEnd type="none" w="med" len="med"/>
+                      <a:tailEnd type="none" w="med" len="med"/>
+                    </a:lnR>
+                    <a:lnT w="6350" cap="flat" cmpd="sng" algn="ctr">
+                      <a:solidFill>
+                        <a:srgbClr val="D8DFE9"/>
+                      </a:solidFill>
+                      <a:prstDash val="solid"/>
+                      <a:round/>
+                      <a:headEnd type="none" w="med" len="med"/>
+                      <a:tailEnd type="none" w="med" len="med"/>
+                    </a:lnT>
+                    <a:lnB w="6350" cap="flat" cmpd="sng" algn="ctr">
+                      <a:solidFill>
+                        <a:srgbClr val="D8DFE9"/>
+                      </a:solidFill>
+                      <a:prstDash val="solid"/>
+                      <a:round/>
+                      <a:headEnd type="none" w="med" len="med"/>
+                      <a:tailEnd type="none" w="med" len="med"/>
+                    </a:lnB>
+                    <a:solidFill>
+                      <a:srgbClr val="0E1E3C"/>
+                    </a:solidFill>
+                  </a:tcPr>
+                </a:tc>
+                <a:tc>
+                  <a:txBody>
+                    <a:bodyPr/>
+                    <a:lstStyle/>
+                    <a:p>
+                      <a:pPr algn="l" indent="0" marL="0">
+                        <a:buNone/>
+                      </a:pPr>
+                      <a:r>
+                        <a:rPr lang="en-US" sz="1050" b="1" dirty="0">
+                          <a:solidFill>
+                            <a:srgbClr val="FFFFFF"/>
+                          </a:solidFill>
+                          <a:latin typeface="Calibri" pitchFamily="34" charset="0"/>
+                          <a:ea typeface="Calibri" pitchFamily="34" charset="-122"/>
+                          <a:cs typeface="Calibri" pitchFamily="34" charset="-120"/>
+                        </a:rPr>
+                        <a:t>View rate</a:t>
+                      </a:r>
+                      <a:endParaRPr lang="en-US" sz="1050" dirty="0">
+                        <a:latin typeface="Calibri" charset="0"/>
+                        <a:ea typeface="Calibri" charset="0"/>
+                        <a:cs typeface="Calibri" charset="0"/>
+                      </a:endParaRPr>
+                    </a:p>
+                  </a:txBody>
+                  <a:tcPr marL="82296" marR="82296" marT="36576" marB="36576" anchor="ctr">
+                    <a:lnL w="6350" cap="flat" cmpd="sng" algn="ctr">
+                      <a:solidFill>
+                        <a:srgbClr val="D8DFE9"/>
+                      </a:solidFill>
+                      <a:prstDash val="solid"/>
+                      <a:round/>
+                      <a:headEnd type="none" w="med" len="med"/>
+                      <a:tailEnd type="none" w="med" len="med"/>
+                    </a:lnL>
+                    <a:lnR w="6350" cap="flat" cmpd="sng" algn="ctr">
+                      <a:solidFill>
+                        <a:srgbClr val="D8DFE9"/>
+                      </a:solidFill>
+                      <a:prstDash val="solid"/>
+                      <a:round/>
+                      <a:headEnd type="none" w="med" len="med"/>
+                      <a:tailEnd type="none" w="med" len="med"/>
+                    </a:lnR>
+                    <a:lnT w="6350" cap="flat" cmpd="sng" algn="ctr">
+                      <a:solidFill>
+                        <a:srgbClr val="D8DFE9"/>
+                      </a:solidFill>
+                      <a:prstDash val="solid"/>
+                      <a:round/>
+                      <a:headEnd type="none" w="med" len="med"/>
+                      <a:tailEnd type="none" w="med" len="med"/>
+                    </a:lnT>
+                    <a:lnB w="6350" cap="flat" cmpd="sng" algn="ctr">
+                      <a:solidFill>
+                        <a:srgbClr val="D8DFE9"/>
+                      </a:solidFill>
+                      <a:prstDash val="solid"/>
+                      <a:round/>
+                      <a:headEnd type="none" w="med" len="med"/>
+                      <a:tailEnd type="none" w="med" len="med"/>
+                    </a:lnB>
+                    <a:solidFill>
+                      <a:srgbClr val="0E1E3C"/>
+                    </a:solidFill>
+                  </a:tcPr>
+                </a:tc>
+                <a:tc>
+                  <a:txBody>
+                    <a:bodyPr/>
+                    <a:lstStyle/>
+                    <a:p>
+                      <a:pPr algn="l" indent="0" marL="0">
+                        <a:buNone/>
+                      </a:pPr>
+                      <a:r>
+                        <a:rPr lang="en-US" sz="1050" b="1" dirty="0">
+                          <a:solidFill>
+                            <a:srgbClr val="FFFFFF"/>
+                          </a:solidFill>
+                          <a:latin typeface="Calibri" pitchFamily="34" charset="0"/>
+                          <a:ea typeface="Calibri" pitchFamily="34" charset="-122"/>
+                          <a:cs typeface="Calibri" pitchFamily="34" charset="-120"/>
+                        </a:rPr>
+                        <a:t>Click rate</a:t>
+                      </a:r>
+                      <a:endParaRPr lang="en-US" sz="1050" dirty="0">
+                        <a:latin typeface="Calibri" charset="0"/>
+                        <a:ea typeface="Calibri" charset="0"/>
+                        <a:cs typeface="Calibri" charset="0"/>
+                      </a:endParaRPr>
+                    </a:p>
+                  </a:txBody>
+                  <a:tcPr marL="82296" marR="82296" marT="36576" marB="36576" anchor="ctr">
+                    <a:lnL w="6350" cap="flat" cmpd="sng" algn="ctr">
+                      <a:solidFill>
+                        <a:srgbClr val="D8DFE9"/>
+                      </a:solidFill>
+                      <a:prstDash val="solid"/>
+                      <a:round/>
+                      <a:headEnd type="none" w="med" len="med"/>
+                      <a:tailEnd type="none" w="med" len="med"/>
+                    </a:lnL>
+                    <a:lnR w="6350" cap="flat" cmpd="sng" algn="ctr">
+                      <a:solidFill>
+                        <a:srgbClr val="D8DFE9"/>
+                      </a:solidFill>
+                      <a:prstDash val="solid"/>
+                      <a:round/>
+                      <a:headEnd type="none" w="med" len="med"/>
+                      <a:tailEnd type="none" w="med" len="med"/>
+                    </a:lnR>
+                    <a:lnT w="6350" cap="flat" cmpd="sng" algn="ctr">
+                      <a:solidFill>
+                        <a:srgbClr val="D8DFE9"/>
+                      </a:solidFill>
+                      <a:prstDash val="solid"/>
+                      <a:round/>
+                      <a:headEnd type="none" w="med" len="med"/>
+                      <a:tailEnd type="none" w="med" len="med"/>
+                    </a:lnT>
+                    <a:lnB w="6350" cap="flat" cmpd="sng" algn="ctr">
+                      <a:solidFill>
+                        <a:srgbClr val="D8DFE9"/>
+                      </a:solidFill>
+                      <a:prstDash val="solid"/>
+                      <a:round/>
+                      <a:headEnd type="none" w="med" len="med"/>
+                      <a:tailEnd type="none" w="med" len="med"/>
+                    </a:lnB>
+                    <a:solidFill>
+                      <a:srgbClr val="0E1E3C"/>
+                    </a:solidFill>
+                  </a:tcPr>
+                </a:tc>
+                <a:tc>
+                  <a:txBody>
+                    <a:bodyPr/>
+                    <a:lstStyle/>
+                    <a:p>
+                      <a:pPr algn="l" indent="0" marL="0">
+                        <a:buNone/>
+                      </a:pPr>
+                      <a:r>
+                        <a:rPr lang="en-US" sz="1050" b="1" dirty="0">
+                          <a:solidFill>
+                            <a:srgbClr val="FFFFFF"/>
+                          </a:solidFill>
+                          <a:latin typeface="Calibri" pitchFamily="34" charset="0"/>
+                          <a:ea typeface="Calibri" pitchFamily="34" charset="-122"/>
+                          <a:cs typeface="Calibri" pitchFamily="34" charset="-120"/>
+                        </a:rPr>
+                        <a:t>Conv. rate</a:t>
+                      </a:r>
+                      <a:endParaRPr lang="en-US" sz="1050" dirty="0">
+                        <a:latin typeface="Calibri" charset="0"/>
+                        <a:ea typeface="Calibri" charset="0"/>
+                        <a:cs typeface="Calibri" charset="0"/>
+                      </a:endParaRPr>
+                    </a:p>
+                  </a:txBody>
+                  <a:tcPr marL="82296" marR="82296" marT="36576" marB="36576" anchor="ctr">
+                    <a:lnL w="6350" cap="flat" cmpd="sng" algn="ctr">
+                      <a:solidFill>
+                        <a:srgbClr val="D8DFE9"/>
+                      </a:solidFill>
+                      <a:prstDash val="solid"/>
+                      <a:round/>
+                      <a:headEnd type="none" w="med" len="med"/>
+                      <a:tailEnd type="none" w="med" len="med"/>
+                    </a:lnL>
+                    <a:lnR w="6350" cap="flat" cmpd="sng" algn="ctr">
+                      <a:solidFill>
+                        <a:srgbClr val="D8DFE9"/>
+                      </a:solidFill>
+                      <a:prstDash val="solid"/>
+                      <a:round/>
+                      <a:headEnd type="none" w="med" len="med"/>
+                      <a:tailEnd type="none" w="med" len="med"/>
+                    </a:lnR>
+                    <a:lnT w="6350" cap="flat" cmpd="sng" algn="ctr">
+                      <a:solidFill>
+                        <a:srgbClr val="D8DFE9"/>
+                      </a:solidFill>
+                      <a:prstDash val="solid"/>
+                      <a:round/>
+                      <a:headEnd type="none" w="med" len="med"/>
+                      <a:tailEnd type="none" w="med" len="med"/>
+                    </a:lnT>
+                    <a:lnB w="6350" cap="flat" cmpd="sng" algn="ctr">
+                      <a:solidFill>
+                        <a:srgbClr val="D8DFE9"/>
+                      </a:solidFill>
+                      <a:prstDash val="solid"/>
+                      <a:round/>
+                      <a:headEnd type="none" w="med" len="med"/>
+                      <a:tailEnd type="none" w="med" len="med"/>
+                    </a:lnB>
+                    <a:solidFill>
+                      <a:srgbClr val="0E1E3C"/>
+                    </a:solidFill>
+                  </a:tcPr>
+                </a:tc>
+                <a:tc>
+                  <a:txBody>
+                    <a:bodyPr/>
+                    <a:lstStyle/>
+                    <a:p>
+                      <a:pPr algn="l" indent="0" marL="0">
+                        <a:buNone/>
+                      </a:pPr>
+                      <a:r>
+                        <a:rPr lang="en-US" sz="1050" b="1" dirty="0">
+                          <a:solidFill>
+                            <a:srgbClr val="FFFFFF"/>
+                          </a:solidFill>
+                          <a:latin typeface="Calibri" pitchFamily="34" charset="0"/>
+                          <a:ea typeface="Calibri" pitchFamily="34" charset="-122"/>
+                          <a:cs typeface="Calibri" pitchFamily="34" charset="-120"/>
+                        </a:rPr>
+                        <a:t>Approve</a:t>
+                      </a:r>
+                      <a:endParaRPr lang="en-US" sz="1050" dirty="0">
+                        <a:latin typeface="Calibri" charset="0"/>
+                        <a:ea typeface="Calibri" charset="0"/>
+                        <a:cs typeface="Calibri" charset="0"/>
+                      </a:endParaRPr>
+                    </a:p>
+                  </a:txBody>
+                  <a:tcPr marL="82296" marR="82296" marT="36576" marB="36576" anchor="ctr">
+                    <a:lnL w="6350" cap="flat" cmpd="sng" algn="ctr">
+                      <a:solidFill>
+                        <a:srgbClr val="D8DFE9"/>
+                      </a:solidFill>
+                      <a:prstDash val="solid"/>
+                      <a:round/>
+                      <a:headEnd type="none" w="med" len="med"/>
+                      <a:tailEnd type="none" w="med" len="med"/>
+                    </a:lnL>
+                    <a:lnR w="6350" cap="flat" cmpd="sng" algn="ctr">
+                      <a:solidFill>
+                        <a:srgbClr val="D8DFE9"/>
+                      </a:solidFill>
+                      <a:prstDash val="solid"/>
+                      <a:round/>
+                      <a:headEnd type="none" w="med" len="med"/>
+                      <a:tailEnd type="none" w="med" len="med"/>
+                    </a:lnR>
+                    <a:lnT w="6350" cap="flat" cmpd="sng" algn="ctr">
+                      <a:solidFill>
+                        <a:srgbClr val="D8DFE9"/>
+                      </a:solidFill>
+                      <a:prstDash val="solid"/>
+                      <a:round/>
+                      <a:headEnd type="none" w="med" len="med"/>
+                      <a:tailEnd type="none" w="med" len="med"/>
+                    </a:lnT>
+                    <a:lnB w="6350" cap="flat" cmpd="sng" algn="ctr">
+                      <a:solidFill>
+                        <a:srgbClr val="D8DFE9"/>
+                      </a:solidFill>
+                      <a:prstDash val="solid"/>
+                      <a:round/>
+                      <a:headEnd type="none" w="med" len="med"/>
+                      <a:tailEnd type="none" w="med" len="med"/>
+                    </a:lnB>
+                    <a:solidFill>
+                      <a:srgbClr val="0E1E3C"/>
+                    </a:solidFill>
+                  </a:tcPr>
+                </a:tc>
+                <a:tc>
+                  <a:txBody>
+                    <a:bodyPr/>
+                    <a:lstStyle/>
+                    <a:p>
+                      <a:pPr algn="l" indent="0" marL="0">
+                        <a:buNone/>
+                      </a:pPr>
+                      <a:r>
+                        <a:rPr lang="en-US" sz="1050" b="1" dirty="0">
+                          <a:solidFill>
+                            <a:srgbClr val="FFFFFF"/>
+                          </a:solidFill>
+                          <a:latin typeface="Calibri" pitchFamily="34" charset="0"/>
+                          <a:ea typeface="Calibri" pitchFamily="34" charset="-122"/>
+                          <a:cs typeface="Calibri" pitchFamily="34" charset="-120"/>
+                        </a:rPr>
+                        <a:t>Book</a:t>
+                      </a:r>
+                      <a:endParaRPr lang="en-US" sz="1050" dirty="0">
+                        <a:latin typeface="Calibri" charset="0"/>
+                        <a:ea typeface="Calibri" charset="0"/>
+                        <a:cs typeface="Calibri" charset="0"/>
+                      </a:endParaRPr>
+                    </a:p>
+                  </a:txBody>
+                  <a:tcPr marL="82296" marR="82296" marT="36576" marB="36576" anchor="ctr">
+                    <a:lnL w="6350" cap="flat" cmpd="sng" algn="ctr">
+                      <a:solidFill>
+                        <a:srgbClr val="D8DFE9"/>
+                      </a:solidFill>
+                      <a:prstDash val="solid"/>
+                      <a:round/>
+                      <a:headEnd type="none" w="med" len="med"/>
+                      <a:tailEnd type="none" w="med" len="med"/>
+                    </a:lnL>
+                    <a:lnR w="6350" cap="flat" cmpd="sng" algn="ctr">
+                      <a:solidFill>
+                        <a:srgbClr val="D8DFE9"/>
+                      </a:solidFill>
+                      <a:prstDash val="solid"/>
+                      <a:round/>
+                      <a:headEnd type="none" w="med" len="med"/>
+                      <a:tailEnd type="none" w="med" len="med"/>
+                    </a:lnR>
+                    <a:lnT w="6350" cap="flat" cmpd="sng" algn="ctr">
+                      <a:solidFill>
+                        <a:srgbClr val="D8DFE9"/>
+                      </a:solidFill>
+                      <a:prstDash val="solid"/>
+                      <a:round/>
+                      <a:headEnd type="none" w="med" len="med"/>
+                      <a:tailEnd type="none" w="med" len="med"/>
+                    </a:lnT>
+                    <a:lnB w="6350" cap="flat" cmpd="sng" algn="ctr">
+                      <a:solidFill>
+                        <a:srgbClr val="D8DFE9"/>
+                      </a:solidFill>
+                      <a:prstDash val="solid"/>
+                      <a:round/>
+                      <a:headEnd type="none" w="med" len="med"/>
+                      <a:tailEnd type="none" w="med" len="med"/>
+                    </a:lnB>
+                    <a:solidFill>
+                      <a:srgbClr val="0E1E3C"/>
+                    </a:solidFill>
+                  </a:tcPr>
+                </a:tc>
+                <a:tc>
+                  <a:txBody>
+                    <a:bodyPr/>
+                    <a:lstStyle/>
+                    <a:p>
+                      <a:pPr algn="l" indent="0" marL="0">
+                        <a:buNone/>
+                      </a:pPr>
+                      <a:r>
+                        <a:rPr lang="en-US" sz="1050" b="1" dirty="0">
+                          <a:solidFill>
+                            <a:srgbClr val="FFFFFF"/>
+                          </a:solidFill>
+                          <a:latin typeface="Calibri" pitchFamily="34" charset="0"/>
+                          <a:ea typeface="Calibri" pitchFamily="34" charset="-122"/>
+                          <a:cs typeface="Calibri" pitchFamily="34" charset="-120"/>
+                        </a:rPr>
+                        <a:t>What it means</a:t>
+                      </a:r>
+                      <a:endParaRPr lang="en-US" sz="1050" dirty="0">
+                        <a:latin typeface="Calibri" charset="0"/>
+                        <a:ea typeface="Calibri" charset="0"/>
+                        <a:cs typeface="Calibri" charset="0"/>
+                      </a:endParaRPr>
+                    </a:p>
+                  </a:txBody>
+                  <a:tcPr marL="82296" marR="82296" marT="36576" marB="36576" anchor="ctr">
+                    <a:lnL w="6350" cap="flat" cmpd="sng" algn="ctr">
+                      <a:solidFill>
+                        <a:srgbClr val="D8DFE9"/>
+                      </a:solidFill>
+                      <a:prstDash val="solid"/>
+                      <a:round/>
+                      <a:headEnd type="none" w="med" len="med"/>
+                      <a:tailEnd type="none" w="med" len="med"/>
+                    </a:lnL>
+                    <a:lnR w="6350" cap="flat" cmpd="sng" algn="ctr">
+                      <a:solidFill>
+                        <a:srgbClr val="D8DFE9"/>
+                      </a:solidFill>
+                      <a:prstDash val="solid"/>
+                      <a:round/>
+                      <a:headEnd type="none" w="med" len="med"/>
+                      <a:tailEnd type="none" w="med" len="med"/>
+                    </a:lnR>
+                    <a:lnT w="6350" cap="flat" cmpd="sng" algn="ctr">
+                      <a:solidFill>
+                        <a:srgbClr val="D8DFE9"/>
+                      </a:solidFill>
+                      <a:prstDash val="solid"/>
+                      <a:round/>
+                      <a:headEnd type="none" w="med" len="med"/>
+                      <a:tailEnd type="none" w="med" len="med"/>
+                    </a:lnT>
+                    <a:lnB w="6350" cap="flat" cmpd="sng" algn="ctr">
+                      <a:solidFill>
+                        <a:srgbClr val="D8DFE9"/>
+                      </a:solidFill>
+                      <a:prstDash val="solid"/>
+                      <a:round/>
+                      <a:headEnd type="none" w="med" len="med"/>
+                      <a:tailEnd type="none" w="med" len="med"/>
+                    </a:lnB>
+                    <a:solidFill>
+                      <a:srgbClr val="0E1E3C"/>
+                    </a:solidFill>
+                  </a:tcPr>
+                </a:tc>
+              </a:tr>
+              <a:tr h="402336">
+                <a:tc>
+                  <a:txBody>
+                    <a:bodyPr/>
+                    <a:lstStyle/>
+                    <a:p>
+                      <a:pPr algn="l" indent="0" marL="0">
+                        <a:buNone/>
+                      </a:pPr>
+                      <a:r>
+                        <a:rPr lang="en-US" sz="1100" b="1" dirty="0">
+                          <a:solidFill>
+                            <a:srgbClr val="16233D"/>
+                          </a:solidFill>
+                          <a:latin typeface="Calibri" pitchFamily="34" charset="0"/>
+                          <a:ea typeface="Calibri" pitchFamily="34" charset="-122"/>
+                          <a:cs typeface="Calibri" pitchFamily="34" charset="-120"/>
+                        </a:rPr>
+                        <a:t>Loan</a:t>
+                      </a:r>
+                      <a:endParaRPr lang="en-US" sz="1100" dirty="0">
+                        <a:latin typeface="Calibri" charset="0"/>
+                        <a:ea typeface="Calibri" charset="0"/>
+                        <a:cs typeface="Calibri" charset="0"/>
+                      </a:endParaRPr>
+                    </a:p>
+                  </a:txBody>
+                  <a:tcPr marL="82296" marR="82296" marT="36576" marB="36576" anchor="ctr">
+                    <a:lnL w="6350" cap="flat" cmpd="sng" algn="ctr">
+                      <a:solidFill>
+                        <a:srgbClr val="D8DFE9"/>
+                      </a:solidFill>
+                      <a:prstDash val="solid"/>
+                      <a:round/>
+                      <a:headEnd type="none" w="med" len="med"/>
+                      <a:tailEnd type="none" w="med" len="med"/>
+                    </a:lnL>
+                    <a:lnR w="6350" cap="flat" cmpd="sng" algn="ctr">
+                      <a:solidFill>
+                        <a:srgbClr val="D8DFE9"/>
+                      </a:solidFill>
+                      <a:prstDash val="solid"/>
+                      <a:round/>
+                      <a:headEnd type="none" w="med" len="med"/>
+                      <a:tailEnd type="none" w="med" len="med"/>
+                    </a:lnR>
+                    <a:lnT w="6350" cap="flat" cmpd="sng" algn="ctr">
+                      <a:solidFill>
+                        <a:srgbClr val="D8DFE9"/>
+                      </a:solidFill>
+                      <a:prstDash val="solid"/>
+                      <a:round/>
+                      <a:headEnd type="none" w="med" len="med"/>
+                      <a:tailEnd type="none" w="med" len="med"/>
+                    </a:lnT>
+                    <a:lnB w="6350" cap="flat" cmpd="sng" algn="ctr">
+                      <a:solidFill>
+                        <a:srgbClr val="D8DFE9"/>
+                      </a:solidFill>
+                      <a:prstDash val="solid"/>
+                      <a:round/>
+                      <a:headEnd type="none" w="med" len="med"/>
+                      <a:tailEnd type="none" w="med" len="med"/>
+                    </a:lnB>
+                    <a:solidFill>
+                      <a:srgbClr val="E8F6F3"/>
+                    </a:solidFill>
+                  </a:tcPr>
+                </a:tc>
+                <a:tc>
+                  <a:txBody>
+                    <a:bodyPr/>
+                    <a:lstStyle/>
+                    <a:p>
+                      <a:pPr algn="l" indent="0" marL="0">
+                        <a:buNone/>
+                      </a:pPr>
+                      <a:r>
+                        <a:rPr lang="en-US" sz="1100" dirty="0">
+                          <a:solidFill>
+                            <a:srgbClr val="16233D"/>
+                          </a:solidFill>
+                          <a:latin typeface="Calibri" pitchFamily="34" charset="0"/>
+                          <a:ea typeface="Calibri" pitchFamily="34" charset="-122"/>
+                          <a:cs typeface="Calibri" pitchFamily="34" charset="-120"/>
+                        </a:rPr>
+                        <a:t>11 · 19d</a:t>
+                      </a:r>
+                      <a:endParaRPr lang="en-US" sz="1100" dirty="0">
+                        <a:latin typeface="Calibri" charset="0"/>
+                        <a:ea typeface="Calibri" charset="0"/>
+                        <a:cs typeface="Calibri" charset="0"/>
+                      </a:endParaRPr>
+                    </a:p>
+                  </a:txBody>
+                  <a:tcPr marL="82296" marR="82296" marT="36576" marB="36576" anchor="ctr">
+                    <a:lnL w="6350" cap="flat" cmpd="sng" algn="ctr">
+                      <a:solidFill>
+                        <a:srgbClr val="D8DFE9"/>
+                      </a:solidFill>
+                      <a:prstDash val="solid"/>
+                      <a:round/>
+                      <a:headEnd type="none" w="med" len="med"/>
+                      <a:tailEnd type="none" w="med" len="med"/>
+                    </a:lnL>
+                    <a:lnR w="6350" cap="flat" cmpd="sng" algn="ctr">
+                      <a:solidFill>
+                        <a:srgbClr val="D8DFE9"/>
+                      </a:solidFill>
+                      <a:prstDash val="solid"/>
+                      <a:round/>
+                      <a:headEnd type="none" w="med" len="med"/>
+                      <a:tailEnd type="none" w="med" len="med"/>
+                    </a:lnR>
+                    <a:lnT w="6350" cap="flat" cmpd="sng" algn="ctr">
+                      <a:solidFill>
+                        <a:srgbClr val="D8DFE9"/>
+                      </a:solidFill>
+                      <a:prstDash val="solid"/>
+                      <a:round/>
+                      <a:headEnd type="none" w="med" len="med"/>
+                      <a:tailEnd type="none" w="med" len="med"/>
+                    </a:lnT>
+                    <a:lnB w="6350" cap="flat" cmpd="sng" algn="ctr">
+                      <a:solidFill>
+                        <a:srgbClr val="D8DFE9"/>
+                      </a:solidFill>
+                      <a:prstDash val="solid"/>
+                      <a:round/>
+                      <a:headEnd type="none" w="med" len="med"/>
+                      <a:tailEnd type="none" w="med" len="med"/>
+                    </a:lnB>
+                    <a:solidFill>
+                      <a:srgbClr val="E8F6F3"/>
+                    </a:solidFill>
+                  </a:tcPr>
+                </a:tc>
+                <a:tc>
+                  <a:txBody>
+                    <a:bodyPr/>
+                    <a:lstStyle/>
+                    <a:p>
+                      <a:pPr algn="l" indent="0" marL="0">
+                        <a:buNone/>
+                      </a:pPr>
+                      <a:r>
+                        <a:rPr lang="en-US" sz="1100" dirty="0">
+                          <a:solidFill>
+                            <a:srgbClr val="16233D"/>
+                          </a:solidFill>
+                          <a:latin typeface="Cambria" pitchFamily="34" charset="0"/>
+                          <a:ea typeface="Cambria" pitchFamily="34" charset="-122"/>
+                          <a:cs typeface="Cambria" pitchFamily="34" charset="-120"/>
+                        </a:rPr>
+                        <a:t>714.6K</a:t>
+                      </a:r>
+                      <a:endParaRPr lang="en-US" sz="1100" dirty="0">
+                        <a:latin typeface="Cambria" charset="0"/>
+                        <a:ea typeface="Cambria" charset="0"/>
+                        <a:cs typeface="Cambria" charset="0"/>
+                      </a:endParaRPr>
+                    </a:p>
+                  </a:txBody>
+                  <a:tcPr marL="82296" marR="82296" marT="36576" marB="36576" anchor="ctr">
+                    <a:lnL w="6350" cap="flat" cmpd="sng" algn="ctr">
+                      <a:solidFill>
+                        <a:srgbClr val="D8DFE9"/>
+                      </a:solidFill>
+                      <a:prstDash val="solid"/>
+                      <a:round/>
+                      <a:headEnd type="none" w="med" len="med"/>
+                      <a:tailEnd type="none" w="med" len="med"/>
+                    </a:lnL>
+                    <a:lnR w="6350" cap="flat" cmpd="sng" algn="ctr">
+                      <a:solidFill>
+                        <a:srgbClr val="D8DFE9"/>
+                      </a:solidFill>
+                      <a:prstDash val="solid"/>
+                      <a:round/>
+                      <a:headEnd type="none" w="med" len="med"/>
+                      <a:tailEnd type="none" w="med" len="med"/>
+                    </a:lnR>
+                    <a:lnT w="6350" cap="flat" cmpd="sng" algn="ctr">
+                      <a:solidFill>
+                        <a:srgbClr val="D8DFE9"/>
+                      </a:solidFill>
+                      <a:prstDash val="solid"/>
+                      <a:round/>
+                      <a:headEnd type="none" w="med" len="med"/>
+                      <a:tailEnd type="none" w="med" len="med"/>
+                    </a:lnT>
+                    <a:lnB w="6350" cap="flat" cmpd="sng" algn="ctr">
+                      <a:solidFill>
+                        <a:srgbClr val="D8DFE9"/>
+                      </a:solidFill>
+                      <a:prstDash val="solid"/>
+                      <a:round/>
+                      <a:headEnd type="none" w="med" len="med"/>
+                      <a:tailEnd type="none" w="med" len="med"/>
+                    </a:lnB>
+                    <a:solidFill>
+                      <a:srgbClr val="E8F6F3"/>
+                    </a:solidFill>
+                  </a:tcPr>
+                </a:tc>
+                <a:tc>
+                  <a:txBody>
+                    <a:bodyPr/>
+                    <a:lstStyle/>
+                    <a:p>
+                      <a:pPr algn="l" indent="0" marL="0">
+                        <a:buNone/>
+                      </a:pPr>
+                      <a:r>
+                        <a:rPr lang="en-US" sz="1100" dirty="0">
+                          <a:solidFill>
+                            <a:srgbClr val="16233D"/>
+                          </a:solidFill>
+                          <a:latin typeface="Cambria" pitchFamily="34" charset="0"/>
+                          <a:ea typeface="Cambria" pitchFamily="34" charset="-122"/>
+                          <a:cs typeface="Cambria" pitchFamily="34" charset="-120"/>
+                        </a:rPr>
+                        <a:t>12.9%</a:t>
+                      </a:r>
+                      <a:endParaRPr lang="en-US" sz="1100" dirty="0">
+                        <a:latin typeface="Cambria" charset="0"/>
+                        <a:ea typeface="Cambria" charset="0"/>
+                        <a:cs typeface="Cambria" charset="0"/>
+                      </a:endParaRPr>
+                    </a:p>
+                  </a:txBody>
+                  <a:tcPr marL="82296" marR="82296" marT="36576" marB="36576" anchor="ctr">
+                    <a:lnL w="6350" cap="flat" cmpd="sng" algn="ctr">
+                      <a:solidFill>
+                        <a:srgbClr val="D8DFE9"/>
+                      </a:solidFill>
+                      <a:prstDash val="solid"/>
+                      <a:round/>
+                      <a:headEnd type="none" w="med" len="med"/>
+                      <a:tailEnd type="none" w="med" len="med"/>
+                    </a:lnL>
+                    <a:lnR w="6350" cap="flat" cmpd="sng" algn="ctr">
+                      <a:solidFill>
+                        <a:srgbClr val="D8DFE9"/>
+                      </a:solidFill>
+                      <a:prstDash val="solid"/>
+                      <a:round/>
+                      <a:headEnd type="none" w="med" len="med"/>
+                      <a:tailEnd type="none" w="med" len="med"/>
+                    </a:lnR>
+                    <a:lnT w="6350" cap="flat" cmpd="sng" algn="ctr">
+                      <a:solidFill>
+                        <a:srgbClr val="D8DFE9"/>
+                      </a:solidFill>
+                      <a:prstDash val="solid"/>
+                      <a:round/>
+                      <a:headEnd type="none" w="med" len="med"/>
+                      <a:tailEnd type="none" w="med" len="med"/>
+                    </a:lnT>
+                    <a:lnB w="6350" cap="flat" cmpd="sng" algn="ctr">
+                      <a:solidFill>
+                        <a:srgbClr val="D8DFE9"/>
+                      </a:solidFill>
+                      <a:prstDash val="solid"/>
+                      <a:round/>
+                      <a:headEnd type="none" w="med" len="med"/>
+                      <a:tailEnd type="none" w="med" len="med"/>
+                    </a:lnB>
+                    <a:solidFill>
+                      <a:srgbClr val="E8F6F3"/>
+                    </a:solidFill>
+                  </a:tcPr>
+                </a:tc>
+                <a:tc>
+                  <a:txBody>
+                    <a:bodyPr/>
+                    <a:lstStyle/>
+                    <a:p>
+                      <a:pPr algn="l" indent="0" marL="0">
+                        <a:buNone/>
+                      </a:pPr>
+                      <a:r>
+                        <a:rPr lang="en-US" sz="1100" dirty="0">
+                          <a:solidFill>
+                            <a:srgbClr val="16233D"/>
+                          </a:solidFill>
+                          <a:latin typeface="Cambria" pitchFamily="34" charset="0"/>
+                          <a:ea typeface="Cambria" pitchFamily="34" charset="-122"/>
+                          <a:cs typeface="Cambria" pitchFamily="34" charset="-120"/>
+                        </a:rPr>
+                        <a:t>44.7%</a:t>
+                      </a:r>
+                      <a:endParaRPr lang="en-US" sz="1100" dirty="0">
+                        <a:latin typeface="Cambria" charset="0"/>
+                        <a:ea typeface="Cambria" charset="0"/>
+                        <a:cs typeface="Cambria" charset="0"/>
+                      </a:endParaRPr>
+                    </a:p>
+                  </a:txBody>
+                  <a:tcPr marL="82296" marR="82296" marT="36576" marB="36576" anchor="ctr">
+                    <a:lnL w="6350" cap="flat" cmpd="sng" algn="ctr">
+                      <a:solidFill>
+                        <a:srgbClr val="D8DFE9"/>
+                      </a:solidFill>
+                      <a:prstDash val="solid"/>
+                      <a:round/>
+                      <a:headEnd type="none" w="med" len="med"/>
+                      <a:tailEnd type="none" w="med" len="med"/>
+                    </a:lnL>
+                    <a:lnR w="6350" cap="flat" cmpd="sng" algn="ctr">
+                      <a:solidFill>
+                        <a:srgbClr val="D8DFE9"/>
+                      </a:solidFill>
+                      <a:prstDash val="solid"/>
+                      <a:round/>
+                      <a:headEnd type="none" w="med" len="med"/>
+                      <a:tailEnd type="none" w="med" len="med"/>
+                    </a:lnR>
+                    <a:lnT w="6350" cap="flat" cmpd="sng" algn="ctr">
+                      <a:solidFill>
+                        <a:srgbClr val="D8DFE9"/>
+                      </a:solidFill>
+                      <a:prstDash val="solid"/>
+                      <a:round/>
+                      <a:headEnd type="none" w="med" len="med"/>
+                      <a:tailEnd type="none" w="med" len="med"/>
+                    </a:lnT>
+                    <a:lnB w="6350" cap="flat" cmpd="sng" algn="ctr">
+                      <a:solidFill>
+                        <a:srgbClr val="D8DFE9"/>
+                      </a:solidFill>
+                      <a:prstDash val="solid"/>
+                      <a:round/>
+                      <a:headEnd type="none" w="med" len="med"/>
+                      <a:tailEnd type="none" w="med" len="med"/>
+                    </a:lnB>
+                    <a:solidFill>
+                      <a:srgbClr val="E8F6F3"/>
+                    </a:solidFill>
+                  </a:tcPr>
+                </a:tc>
+                <a:tc>
+                  <a:txBody>
+                    <a:bodyPr/>
+                    <a:lstStyle/>
+                    <a:p>
+                      <a:pPr algn="l" indent="0" marL="0">
+                        <a:buNone/>
+                      </a:pPr>
+                      <a:r>
+                        <a:rPr lang="en-US" sz="1100" dirty="0">
+                          <a:solidFill>
+                            <a:srgbClr val="16233D"/>
+                          </a:solidFill>
+                          <a:latin typeface="Cambria" pitchFamily="34" charset="0"/>
+                          <a:ea typeface="Cambria" pitchFamily="34" charset="-122"/>
+                          <a:cs typeface="Cambria" pitchFamily="34" charset="-120"/>
+                        </a:rPr>
+                        <a:t>72.4%</a:t>
+                      </a:r>
+                      <a:endParaRPr lang="en-US" sz="1100" dirty="0">
+                        <a:latin typeface="Cambria" charset="0"/>
+                        <a:ea typeface="Cambria" charset="0"/>
+                        <a:cs typeface="Cambria" charset="0"/>
+                      </a:endParaRPr>
+                    </a:p>
+                  </a:txBody>
+                  <a:tcPr marL="82296" marR="82296" marT="36576" marB="36576" anchor="ctr">
+                    <a:lnL w="6350" cap="flat" cmpd="sng" algn="ctr">
+                      <a:solidFill>
+                        <a:srgbClr val="D8DFE9"/>
+                      </a:solidFill>
+                      <a:prstDash val="solid"/>
+                      <a:round/>
+                      <a:headEnd type="none" w="med" len="med"/>
+                      <a:tailEnd type="none" w="med" len="med"/>
+                    </a:lnL>
+                    <a:lnR w="6350" cap="flat" cmpd="sng" algn="ctr">
+                      <a:solidFill>
+                        <a:srgbClr val="D8DFE9"/>
+                      </a:solidFill>
+                      <a:prstDash val="solid"/>
+                      <a:round/>
+                      <a:headEnd type="none" w="med" len="med"/>
+                      <a:tailEnd type="none" w="med" len="med"/>
+                    </a:lnR>
+                    <a:lnT w="6350" cap="flat" cmpd="sng" algn="ctr">
+                      <a:solidFill>
+                        <a:srgbClr val="D8DFE9"/>
+                      </a:solidFill>
+                      <a:prstDash val="solid"/>
+                      <a:round/>
+                      <a:headEnd type="none" w="med" len="med"/>
+                      <a:tailEnd type="none" w="med" len="med"/>
+                    </a:lnT>
+                    <a:lnB w="6350" cap="flat" cmpd="sng" algn="ctr">
+                      <a:solidFill>
+                        <a:srgbClr val="D8DFE9"/>
+                      </a:solidFill>
+                      <a:prstDash val="solid"/>
+                      <a:round/>
+                      <a:headEnd type="none" w="med" len="med"/>
+                      <a:tailEnd type="none" w="med" len="med"/>
+                    </a:lnB>
+                    <a:solidFill>
+                      <a:srgbClr val="E8F6F3"/>
+                    </a:solidFill>
+                  </a:tcPr>
+                </a:tc>
+                <a:tc>
+                  <a:txBody>
+                    <a:bodyPr/>
+                    <a:lstStyle/>
+                    <a:p>
+                      <a:pPr algn="l" indent="0" marL="0">
+                        <a:buNone/>
+                      </a:pPr>
+                      <a:r>
+                        <a:rPr lang="en-US" sz="1100" b="1" dirty="0">
+                          <a:solidFill>
+                            <a:srgbClr val="16233D"/>
+                          </a:solidFill>
+                          <a:latin typeface="Cambria" pitchFamily="34" charset="0"/>
+                          <a:ea typeface="Cambria" pitchFamily="34" charset="-122"/>
+                          <a:cs typeface="Cambria" pitchFamily="34" charset="-120"/>
+                        </a:rPr>
+                        <a:t>13.0K</a:t>
+                      </a:r>
+                      <a:endParaRPr lang="en-US" sz="1100" dirty="0">
+                        <a:latin typeface="Cambria" charset="0"/>
+                        <a:ea typeface="Cambria" charset="0"/>
+                        <a:cs typeface="Cambria" charset="0"/>
+                      </a:endParaRPr>
+                    </a:p>
+                  </a:txBody>
+                  <a:tcPr marL="82296" marR="82296" marT="36576" marB="36576" anchor="ctr">
+                    <a:lnL w="6350" cap="flat" cmpd="sng" algn="ctr">
+                      <a:solidFill>
+                        <a:srgbClr val="D8DFE9"/>
+                      </a:solidFill>
+                      <a:prstDash val="solid"/>
+                      <a:round/>
+                      <a:headEnd type="none" w="med" len="med"/>
+                      <a:tailEnd type="none" w="med" len="med"/>
+                    </a:lnL>
+                    <a:lnR w="6350" cap="flat" cmpd="sng" algn="ctr">
+                      <a:solidFill>
+                        <a:srgbClr val="D8DFE9"/>
+                      </a:solidFill>
+                      <a:prstDash val="solid"/>
+                      <a:round/>
+                      <a:headEnd type="none" w="med" len="med"/>
+                      <a:tailEnd type="none" w="med" len="med"/>
+                    </a:lnR>
+                    <a:lnT w="6350" cap="flat" cmpd="sng" algn="ctr">
+                      <a:solidFill>
+                        <a:srgbClr val="D8DFE9"/>
+                      </a:solidFill>
+                      <a:prstDash val="solid"/>
+                      <a:round/>
+                      <a:headEnd type="none" w="med" len="med"/>
+                      <a:tailEnd type="none" w="med" len="med"/>
+                    </a:lnT>
+                    <a:lnB w="6350" cap="flat" cmpd="sng" algn="ctr">
+                      <a:solidFill>
+                        <a:srgbClr val="D8DFE9"/>
+                      </a:solidFill>
+                      <a:prstDash val="solid"/>
+                      <a:round/>
+                      <a:headEnd type="none" w="med" len="med"/>
+                      <a:tailEnd type="none" w="med" len="med"/>
+                    </a:lnB>
+                    <a:solidFill>
+                      <a:srgbClr val="E8F6F3"/>
+                    </a:solidFill>
+                  </a:tcPr>
+                </a:tc>
+                <a:tc>
+                  <a:txBody>
+                    <a:bodyPr/>
+                    <a:lstStyle/>
+                    <a:p>
+                      <a:pPr algn="l" indent="0" marL="0">
+                        <a:buNone/>
+                      </a:pPr>
+                      <a:r>
+                        <a:rPr lang="en-US" sz="1100" b="1" dirty="0">
+                          <a:solidFill>
+                            <a:srgbClr val="16233D"/>
+                          </a:solidFill>
+                          <a:latin typeface="Cambria" pitchFamily="34" charset="0"/>
+                          <a:ea typeface="Cambria" pitchFamily="34" charset="-122"/>
+                          <a:cs typeface="Cambria" pitchFamily="34" charset="-120"/>
+                        </a:rPr>
+                        <a:t>9.7K</a:t>
+                      </a:r>
+                      <a:endParaRPr lang="en-US" sz="1100" dirty="0">
+                        <a:latin typeface="Cambria" charset="0"/>
+                        <a:ea typeface="Cambria" charset="0"/>
+                        <a:cs typeface="Cambria" charset="0"/>
+                      </a:endParaRPr>
+                    </a:p>
+                  </a:txBody>
+                  <a:tcPr marL="82296" marR="82296" marT="36576" marB="36576" anchor="ctr">
+                    <a:lnL w="6350" cap="flat" cmpd="sng" algn="ctr">
+                      <a:solidFill>
+                        <a:srgbClr val="D8DFE9"/>
+                      </a:solidFill>
+                      <a:prstDash val="solid"/>
+                      <a:round/>
+                      <a:headEnd type="none" w="med" len="med"/>
+                      <a:tailEnd type="none" w="med" len="med"/>
+                    </a:lnL>
+                    <a:lnR w="6350" cap="flat" cmpd="sng" algn="ctr">
+                      <a:solidFill>
+                        <a:srgbClr val="D8DFE9"/>
+                      </a:solidFill>
+                      <a:prstDash val="solid"/>
+                      <a:round/>
+                      <a:headEnd type="none" w="med" len="med"/>
+                      <a:tailEnd type="none" w="med" len="med"/>
+                    </a:lnR>
+                    <a:lnT w="6350" cap="flat" cmpd="sng" algn="ctr">
+                      <a:solidFill>
+                        <a:srgbClr val="D8DFE9"/>
+                      </a:solidFill>
+                      <a:prstDash val="solid"/>
+                      <a:round/>
+                      <a:headEnd type="none" w="med" len="med"/>
+                      <a:tailEnd type="none" w="med" len="med"/>
+                    </a:lnT>
+                    <a:lnB w="6350" cap="flat" cmpd="sng" algn="ctr">
+                      <a:solidFill>
+                        <a:srgbClr val="D8DFE9"/>
+                      </a:solidFill>
+                      <a:prstDash val="solid"/>
+                      <a:round/>
+                      <a:headEnd type="none" w="med" len="med"/>
+                      <a:tailEnd type="none" w="med" len="med"/>
+                    </a:lnB>
+                    <a:solidFill>
+                      <a:srgbClr val="E8F6F3"/>
+                    </a:solidFill>
+                  </a:tcPr>
+                </a:tc>
+                <a:tc>
+                  <a:txBody>
+                    <a:bodyPr/>
+                    <a:lstStyle/>
+                    <a:p>
+                      <a:pPr algn="l" indent="0" marL="0">
+                        <a:buNone/>
+                      </a:pPr>
+                      <a:r>
+                        <a:rPr lang="en-US" sz="1000" dirty="0">
+                          <a:solidFill>
+                            <a:srgbClr val="5A6B82"/>
+                          </a:solidFill>
+                          <a:latin typeface="Calibri" pitchFamily="34" charset="0"/>
+                          <a:ea typeface="Calibri" pitchFamily="34" charset="-122"/>
+                          <a:cs typeface="Calibri" pitchFamily="34" charset="-120"/>
+                        </a:rPr>
+                        <a:t>The only group that reaches credit approval</a:t>
+                      </a:r>
+                      <a:endParaRPr lang="en-US" sz="1000" dirty="0">
+                        <a:latin typeface="Calibri" charset="0"/>
+                        <a:ea typeface="Calibri" charset="0"/>
+                        <a:cs typeface="Calibri" charset="0"/>
+                      </a:endParaRPr>
+                    </a:p>
+                  </a:txBody>
+                  <a:tcPr marL="82296" marR="82296" marT="36576" marB="36576" anchor="ctr">
+                    <a:lnL w="6350" cap="flat" cmpd="sng" algn="ctr">
+                      <a:solidFill>
+                        <a:srgbClr val="D8DFE9"/>
+                      </a:solidFill>
+                      <a:prstDash val="solid"/>
+                      <a:round/>
+                      <a:headEnd type="none" w="med" len="med"/>
+                      <a:tailEnd type="none" w="med" len="med"/>
+                    </a:lnL>
+                    <a:lnR w="6350" cap="flat" cmpd="sng" algn="ctr">
+                      <a:solidFill>
+                        <a:srgbClr val="D8DFE9"/>
+                      </a:solidFill>
+                      <a:prstDash val="solid"/>
+                      <a:round/>
+                      <a:headEnd type="none" w="med" len="med"/>
+                      <a:tailEnd type="none" w="med" len="med"/>
+                    </a:lnR>
+                    <a:lnT w="6350" cap="flat" cmpd="sng" algn="ctr">
+                      <a:solidFill>
+                        <a:srgbClr val="D8DFE9"/>
+                      </a:solidFill>
+                      <a:prstDash val="solid"/>
+                      <a:round/>
+                      <a:headEnd type="none" w="med" len="med"/>
+                      <a:tailEnd type="none" w="med" len="med"/>
+                    </a:lnT>
+                    <a:lnB w="6350" cap="flat" cmpd="sng" algn="ctr">
+                      <a:solidFill>
+                        <a:srgbClr val="D8DFE9"/>
+                      </a:solidFill>
+                      <a:prstDash val="solid"/>
+                      <a:round/>
+                      <a:headEnd type="none" w="med" len="med"/>
+                      <a:tailEnd type="none" w="med" len="med"/>
+                    </a:lnB>
+                    <a:solidFill>
+                      <a:srgbClr val="E8F6F3"/>
+                    </a:solidFill>
+                  </a:tcPr>
+                </a:tc>
+              </a:tr>
+              <a:tr h="402336">
+                <a:tc>
+                  <a:txBody>
+                    <a:bodyPr/>
+                    <a:lstStyle/>
+                    <a:p>
+                      <a:pPr algn="l" indent="0" marL="0">
+                        <a:buNone/>
+                      </a:pPr>
+                      <a:r>
+                        <a:rPr lang="en-US" sz="1100" b="1" dirty="0">
+                          <a:solidFill>
+                            <a:srgbClr val="16233D"/>
+                          </a:solidFill>
+                          <a:latin typeface="Calibri" pitchFamily="34" charset="0"/>
+                          <a:ea typeface="Calibri" pitchFamily="34" charset="-122"/>
+                          <a:cs typeface="Calibri" pitchFamily="34" charset="-120"/>
+                        </a:rPr>
+                        <a:t>Deposit</a:t>
+                      </a:r>
+                      <a:endParaRPr lang="en-US" sz="1100" dirty="0">
+                        <a:latin typeface="Calibri" charset="0"/>
+                        <a:ea typeface="Calibri" charset="0"/>
+                        <a:cs typeface="Calibri" charset="0"/>
+                      </a:endParaRPr>
+                    </a:p>
+                  </a:txBody>
+                  <a:tcPr marL="82296" marR="82296" marT="36576" marB="36576" anchor="ctr">
+                    <a:lnL w="6350" cap="flat" cmpd="sng" algn="ctr">
+                      <a:solidFill>
+                        <a:srgbClr val="D8DFE9"/>
+                      </a:solidFill>
+                      <a:prstDash val="solid"/>
+                      <a:round/>
+                      <a:headEnd type="none" w="med" len="med"/>
+                      <a:tailEnd type="none" w="med" len="med"/>
+                    </a:lnL>
+                    <a:lnR w="6350" cap="flat" cmpd="sng" algn="ctr">
+                      <a:solidFill>
+                        <a:srgbClr val="D8DFE9"/>
+                      </a:solidFill>
+                      <a:prstDash val="solid"/>
+                      <a:round/>
+                      <a:headEnd type="none" w="med" len="med"/>
+                      <a:tailEnd type="none" w="med" len="med"/>
+                    </a:lnR>
+                    <a:lnT w="6350" cap="flat" cmpd="sng" algn="ctr">
+                      <a:solidFill>
+                        <a:srgbClr val="D8DFE9"/>
+                      </a:solidFill>
+                      <a:prstDash val="solid"/>
+                      <a:round/>
+                      <a:headEnd type="none" w="med" len="med"/>
+                      <a:tailEnd type="none" w="med" len="med"/>
+                    </a:lnT>
+                    <a:lnB w="6350" cap="flat" cmpd="sng" algn="ctr">
+                      <a:solidFill>
+                        <a:srgbClr val="D8DFE9"/>
+                      </a:solidFill>
+                      <a:prstDash val="solid"/>
+                      <a:round/>
+                      <a:headEnd type="none" w="med" len="med"/>
+                      <a:tailEnd type="none" w="med" len="med"/>
+                    </a:lnB>
+                    <a:solidFill>
+                      <a:srgbClr val="FFFFFF"/>
+                    </a:solidFill>
+                  </a:tcPr>
+                </a:tc>
+                <a:tc>
+                  <a:txBody>
+                    <a:bodyPr/>
+                    <a:lstStyle/>
+                    <a:p>
+                      <a:pPr algn="l" indent="0" marL="0">
+                        <a:buNone/>
+                      </a:pPr>
+                      <a:r>
+                        <a:rPr lang="en-US" sz="1100" dirty="0">
+                          <a:solidFill>
+                            <a:srgbClr val="16233D"/>
+                          </a:solidFill>
+                          <a:latin typeface="Calibri" pitchFamily="34" charset="0"/>
+                          <a:ea typeface="Calibri" pitchFamily="34" charset="-122"/>
+                          <a:cs typeface="Calibri" pitchFamily="34" charset="-120"/>
+                        </a:rPr>
+                        <a:t>18 · 46d</a:t>
+                      </a:r>
+                      <a:endParaRPr lang="en-US" sz="1100" dirty="0">
+                        <a:latin typeface="Calibri" charset="0"/>
+                        <a:ea typeface="Calibri" charset="0"/>
+                        <a:cs typeface="Calibri" charset="0"/>
+                      </a:endParaRPr>
+                    </a:p>
+                  </a:txBody>
+                  <a:tcPr marL="82296" marR="82296" marT="36576" marB="36576" anchor="ctr">
+                    <a:lnL w="6350" cap="flat" cmpd="sng" algn="ctr">
+                      <a:solidFill>
+                        <a:srgbClr val="D8DFE9"/>
+                      </a:solidFill>
+                      <a:prstDash val="solid"/>
+                      <a:round/>
+                      <a:headEnd type="none" w="med" len="med"/>
+                      <a:tailEnd type="none" w="med" len="med"/>
+                    </a:lnL>
+                    <a:lnR w="6350" cap="flat" cmpd="sng" algn="ctr">
+                      <a:solidFill>
+                        <a:srgbClr val="D8DFE9"/>
+                      </a:solidFill>
+                      <a:prstDash val="solid"/>
+                      <a:round/>
+                      <a:headEnd type="none" w="med" len="med"/>
+                      <a:tailEnd type="none" w="med" len="med"/>
+                    </a:lnR>
+                    <a:lnT w="6350" cap="flat" cmpd="sng" algn="ctr">
+                      <a:solidFill>
+                        <a:srgbClr val="D8DFE9"/>
+                      </a:solidFill>
+                      <a:prstDash val="solid"/>
+                      <a:round/>
+                      <a:headEnd type="none" w="med" len="med"/>
+                      <a:tailEnd type="none" w="med" len="med"/>
+                    </a:lnT>
+                    <a:lnB w="6350" cap="flat" cmpd="sng" algn="ctr">
+                      <a:solidFill>
+                        <a:srgbClr val="D8DFE9"/>
+                      </a:solidFill>
+                      <a:prstDash val="solid"/>
+                      <a:round/>
+                      <a:headEnd type="none" w="med" len="med"/>
+                      <a:tailEnd type="none" w="med" len="med"/>
+                    </a:lnB>
+                    <a:solidFill>
+                      <a:srgbClr val="FFFFFF"/>
+                    </a:solidFill>
+                  </a:tcPr>
+                </a:tc>
+                <a:tc>
+                  <a:txBody>
+                    <a:bodyPr/>
+                    <a:lstStyle/>
+                    <a:p>
+                      <a:pPr algn="l" indent="0" marL="0">
+                        <a:buNone/>
+                      </a:pPr>
+                      <a:r>
+                        <a:rPr lang="en-US" sz="1100" dirty="0">
+                          <a:solidFill>
+                            <a:srgbClr val="16233D"/>
+                          </a:solidFill>
+                          <a:latin typeface="Cambria" pitchFamily="34" charset="0"/>
+                          <a:ea typeface="Cambria" pitchFamily="34" charset="-122"/>
+                          <a:cs typeface="Cambria" pitchFamily="34" charset="-120"/>
+                        </a:rPr>
+                        <a:t>1,926.9K</a:t>
+                      </a:r>
+                      <a:endParaRPr lang="en-US" sz="1100" dirty="0">
+                        <a:latin typeface="Cambria" charset="0"/>
+                        <a:ea typeface="Cambria" charset="0"/>
+                        <a:cs typeface="Cambria" charset="0"/>
+                      </a:endParaRPr>
+                    </a:p>
+                  </a:txBody>
+                  <a:tcPr marL="82296" marR="82296" marT="36576" marB="36576" anchor="ctr">
+                    <a:lnL w="6350" cap="flat" cmpd="sng" algn="ctr">
+                      <a:solidFill>
+                        <a:srgbClr val="D8DFE9"/>
+                      </a:solidFill>
+                      <a:prstDash val="solid"/>
+                      <a:round/>
+                      <a:headEnd type="none" w="med" len="med"/>
+                      <a:tailEnd type="none" w="med" len="med"/>
+                    </a:lnL>
+                    <a:lnR w="6350" cap="flat" cmpd="sng" algn="ctr">
+                      <a:solidFill>
+                        <a:srgbClr val="D8DFE9"/>
+                      </a:solidFill>
+                      <a:prstDash val="solid"/>
+                      <a:round/>
+                      <a:headEnd type="none" w="med" len="med"/>
+                      <a:tailEnd type="none" w="med" len="med"/>
+                    </a:lnR>
+                    <a:lnT w="6350" cap="flat" cmpd="sng" algn="ctr">
+                      <a:solidFill>
+                        <a:srgbClr val="D8DFE9"/>
+                      </a:solidFill>
+                      <a:prstDash val="solid"/>
+                      <a:round/>
+                      <a:headEnd type="none" w="med" len="med"/>
+                      <a:tailEnd type="none" w="med" len="med"/>
+                    </a:lnT>
+                    <a:lnB w="6350" cap="flat" cmpd="sng" algn="ctr">
+                      <a:solidFill>
+                        <a:srgbClr val="D8DFE9"/>
+                      </a:solidFill>
+                      <a:prstDash val="solid"/>
+                      <a:round/>
+                      <a:headEnd type="none" w="med" len="med"/>
+                      <a:tailEnd type="none" w="med" len="med"/>
+                    </a:lnB>
+                    <a:solidFill>
+                      <a:srgbClr val="FFFFFF"/>
+                    </a:solidFill>
+                  </a:tcPr>
+                </a:tc>
+                <a:tc>
+                  <a:txBody>
+                    <a:bodyPr/>
+                    <a:lstStyle/>
+                    <a:p>
+                      <a:pPr algn="l" indent="0" marL="0">
+                        <a:buNone/>
+                      </a:pPr>
+                      <a:r>
+                        <a:rPr lang="en-US" sz="1100" dirty="0">
+                          <a:solidFill>
+                            <a:srgbClr val="16233D"/>
+                          </a:solidFill>
+                          <a:latin typeface="Cambria" pitchFamily="34" charset="0"/>
+                          <a:ea typeface="Cambria" pitchFamily="34" charset="-122"/>
+                          <a:cs typeface="Cambria" pitchFamily="34" charset="-120"/>
+                        </a:rPr>
+                        <a:t>16.5%</a:t>
+                      </a:r>
+                      <a:endParaRPr lang="en-US" sz="1100" dirty="0">
+                        <a:latin typeface="Cambria" charset="0"/>
+                        <a:ea typeface="Cambria" charset="0"/>
+                        <a:cs typeface="Cambria" charset="0"/>
+                      </a:endParaRPr>
+                    </a:p>
+                  </a:txBody>
+                  <a:tcPr marL="82296" marR="82296" marT="36576" marB="36576" anchor="ctr">
+                    <a:lnL w="6350" cap="flat" cmpd="sng" algn="ctr">
+                      <a:solidFill>
+                        <a:srgbClr val="D8DFE9"/>
+                      </a:solidFill>
+                      <a:prstDash val="solid"/>
+                      <a:round/>
+                      <a:headEnd type="none" w="med" len="med"/>
+                      <a:tailEnd type="none" w="med" len="med"/>
+                    </a:lnL>
+                    <a:lnR w="6350" cap="flat" cmpd="sng" algn="ctr">
+                      <a:solidFill>
+                        <a:srgbClr val="D8DFE9"/>
+                      </a:solidFill>
+                      <a:prstDash val="solid"/>
+                      <a:round/>
+                      <a:headEnd type="none" w="med" len="med"/>
+                      <a:tailEnd type="none" w="med" len="med"/>
+                    </a:lnR>
+                    <a:lnT w="6350" cap="flat" cmpd="sng" algn="ctr">
+                      <a:solidFill>
+                        <a:srgbClr val="D8DFE9"/>
+                      </a:solidFill>
+                      <a:prstDash val="solid"/>
+                      <a:round/>
+                      <a:headEnd type="none" w="med" len="med"/>
+                      <a:tailEnd type="none" w="med" len="med"/>
+                    </a:lnT>
+                    <a:lnB w="6350" cap="flat" cmpd="sng" algn="ctr">
+                      <a:solidFill>
+                        <a:srgbClr val="D8DFE9"/>
+                      </a:solidFill>
+                      <a:prstDash val="solid"/>
+                      <a:round/>
+                      <a:headEnd type="none" w="med" len="med"/>
+                      <a:tailEnd type="none" w="med" len="med"/>
+                    </a:lnB>
+                    <a:solidFill>
+                      <a:srgbClr val="FFFFFF"/>
+                    </a:solidFill>
+                  </a:tcPr>
+                </a:tc>
+                <a:tc>
+                  <a:txBody>
+                    <a:bodyPr/>
+                    <a:lstStyle/>
+                    <a:p>
+                      <a:pPr algn="l" indent="0" marL="0">
+                        <a:buNone/>
+                      </a:pPr>
+                      <a:r>
+                        <a:rPr lang="en-US" sz="1100" dirty="0">
+                          <a:solidFill>
+                            <a:srgbClr val="16233D"/>
+                          </a:solidFill>
+                          <a:latin typeface="Cambria" pitchFamily="34" charset="0"/>
+                          <a:ea typeface="Cambria" pitchFamily="34" charset="-122"/>
+                          <a:cs typeface="Cambria" pitchFamily="34" charset="-120"/>
+                        </a:rPr>
+                        <a:t>5.5%</a:t>
+                      </a:r>
+                      <a:endParaRPr lang="en-US" sz="1100" dirty="0">
+                        <a:latin typeface="Cambria" charset="0"/>
+                        <a:ea typeface="Cambria" charset="0"/>
+                        <a:cs typeface="Cambria" charset="0"/>
+                      </a:endParaRPr>
+                    </a:p>
+                  </a:txBody>
+                  <a:tcPr marL="82296" marR="82296" marT="36576" marB="36576" anchor="ctr">
+                    <a:lnL w="6350" cap="flat" cmpd="sng" algn="ctr">
+                      <a:solidFill>
+                        <a:srgbClr val="D8DFE9"/>
+                      </a:solidFill>
+                      <a:prstDash val="solid"/>
+                      <a:round/>
+                      <a:headEnd type="none" w="med" len="med"/>
+                      <a:tailEnd type="none" w="med" len="med"/>
+                    </a:lnL>
+                    <a:lnR w="6350" cap="flat" cmpd="sng" algn="ctr">
+                      <a:solidFill>
+                        <a:srgbClr val="D8DFE9"/>
+                      </a:solidFill>
+                      <a:prstDash val="solid"/>
+                      <a:round/>
+                      <a:headEnd type="none" w="med" len="med"/>
+                      <a:tailEnd type="none" w="med" len="med"/>
+                    </a:lnR>
+                    <a:lnT w="6350" cap="flat" cmpd="sng" algn="ctr">
+                      <a:solidFill>
+                        <a:srgbClr val="D8DFE9"/>
+                      </a:solidFill>
+                      <a:prstDash val="solid"/>
+                      <a:round/>
+                      <a:headEnd type="none" w="med" len="med"/>
+                      <a:tailEnd type="none" w="med" len="med"/>
+                    </a:lnT>
+                    <a:lnB w="6350" cap="flat" cmpd="sng" algn="ctr">
+                      <a:solidFill>
+                        <a:srgbClr val="D8DFE9"/>
+                      </a:solidFill>
+                      <a:prstDash val="solid"/>
+                      <a:round/>
+                      <a:headEnd type="none" w="med" len="med"/>
+                      <a:tailEnd type="none" w="med" len="med"/>
+                    </a:lnB>
+                    <a:solidFill>
+                      <a:srgbClr val="FFFFFF"/>
+                    </a:solidFill>
+                  </a:tcPr>
+                </a:tc>
+                <a:tc>
+                  <a:txBody>
+                    <a:bodyPr/>
+                    <a:lstStyle/>
+                    <a:p>
+                      <a:pPr algn="l" indent="0" marL="0">
+                        <a:buNone/>
+                      </a:pPr>
+                      <a:r>
+                        <a:rPr lang="en-US" sz="1100" dirty="0">
+                          <a:solidFill>
+                            <a:srgbClr val="16233D"/>
+                          </a:solidFill>
+                          <a:latin typeface="Cambria" pitchFamily="34" charset="0"/>
+                          <a:ea typeface="Cambria" pitchFamily="34" charset="-122"/>
+                          <a:cs typeface="Cambria" pitchFamily="34" charset="-120"/>
+                        </a:rPr>
+                        <a:t>46.3%</a:t>
+                      </a:r>
+                      <a:endParaRPr lang="en-US" sz="1100" dirty="0">
+                        <a:latin typeface="Cambria" charset="0"/>
+                        <a:ea typeface="Cambria" charset="0"/>
+                        <a:cs typeface="Cambria" charset="0"/>
+                      </a:endParaRPr>
+                    </a:p>
+                  </a:txBody>
+                  <a:tcPr marL="82296" marR="82296" marT="36576" marB="36576" anchor="ctr">
+                    <a:lnL w="6350" cap="flat" cmpd="sng" algn="ctr">
+                      <a:solidFill>
+                        <a:srgbClr val="D8DFE9"/>
+                      </a:solidFill>
+                      <a:prstDash val="solid"/>
+                      <a:round/>
+                      <a:headEnd type="none" w="med" len="med"/>
+                      <a:tailEnd type="none" w="med" len="med"/>
+                    </a:lnL>
+                    <a:lnR w="6350" cap="flat" cmpd="sng" algn="ctr">
+                      <a:solidFill>
+                        <a:srgbClr val="D8DFE9"/>
+                      </a:solidFill>
+                      <a:prstDash val="solid"/>
+                      <a:round/>
+                      <a:headEnd type="none" w="med" len="med"/>
+                      <a:tailEnd type="none" w="med" len="med"/>
+                    </a:lnR>
+                    <a:lnT w="6350" cap="flat" cmpd="sng" algn="ctr">
+                      <a:solidFill>
+                        <a:srgbClr val="D8DFE9"/>
+                      </a:solidFill>
+                      <a:prstDash val="solid"/>
+                      <a:round/>
+                      <a:headEnd type="none" w="med" len="med"/>
+                      <a:tailEnd type="none" w="med" len="med"/>
+                    </a:lnT>
+                    <a:lnB w="6350" cap="flat" cmpd="sng" algn="ctr">
+                      <a:solidFill>
+                        <a:srgbClr val="D8DFE9"/>
+                      </a:solidFill>
+                      <a:prstDash val="solid"/>
+                      <a:round/>
+                      <a:headEnd type="none" w="med" len="med"/>
+                      <a:tailEnd type="none" w="med" len="med"/>
+                    </a:lnB>
+                    <a:solidFill>
+                      <a:srgbClr val="FFFFFF"/>
+                    </a:solidFill>
+                  </a:tcPr>
+                </a:tc>
+                <a:tc>
+                  <a:txBody>
+                    <a:bodyPr/>
+                    <a:lstStyle/>
+                    <a:p>
+                      <a:pPr algn="l" indent="0" marL="0">
+                        <a:buNone/>
+                      </a:pPr>
+                      <a:r>
+                        <a:rPr lang="en-US" sz="1100" dirty="0">
+                          <a:solidFill>
+                            <a:srgbClr val="16233D"/>
+                          </a:solidFill>
+                          <a:latin typeface="Cambria" pitchFamily="34" charset="0"/>
+                          <a:ea typeface="Cambria" pitchFamily="34" charset="-122"/>
+                          <a:cs typeface="Cambria" pitchFamily="34" charset="-120"/>
+                        </a:rPr>
+                        <a:t>—</a:t>
+                      </a:r>
+                      <a:endParaRPr lang="en-US" sz="1100" dirty="0">
+                        <a:latin typeface="Cambria" charset="0"/>
+                        <a:ea typeface="Cambria" charset="0"/>
+                        <a:cs typeface="Cambria" charset="0"/>
+                      </a:endParaRPr>
+                    </a:p>
+                  </a:txBody>
+                  <a:tcPr marL="82296" marR="82296" marT="36576" marB="36576" anchor="ctr">
+                    <a:lnL w="6350" cap="flat" cmpd="sng" algn="ctr">
+                      <a:solidFill>
+                        <a:srgbClr val="D8DFE9"/>
+                      </a:solidFill>
+                      <a:prstDash val="solid"/>
+                      <a:round/>
+                      <a:headEnd type="none" w="med" len="med"/>
+                      <a:tailEnd type="none" w="med" len="med"/>
+                    </a:lnL>
+                    <a:lnR w="6350" cap="flat" cmpd="sng" algn="ctr">
+                      <a:solidFill>
+                        <a:srgbClr val="D8DFE9"/>
+                      </a:solidFill>
+                      <a:prstDash val="solid"/>
+                      <a:round/>
+                      <a:headEnd type="none" w="med" len="med"/>
+                      <a:tailEnd type="none" w="med" len="med"/>
+                    </a:lnR>
+                    <a:lnT w="6350" cap="flat" cmpd="sng" algn="ctr">
+                      <a:solidFill>
+                        <a:srgbClr val="D8DFE9"/>
+                      </a:solidFill>
+                      <a:prstDash val="solid"/>
+                      <a:round/>
+                      <a:headEnd type="none" w="med" len="med"/>
+                      <a:tailEnd type="none" w="med" len="med"/>
+                    </a:lnT>
+                    <a:lnB w="6350" cap="flat" cmpd="sng" algn="ctr">
+                      <a:solidFill>
+                        <a:srgbClr val="D8DFE9"/>
+                      </a:solidFill>
+                      <a:prstDash val="solid"/>
+                      <a:round/>
+                      <a:headEnd type="none" w="med" len="med"/>
+                      <a:tailEnd type="none" w="med" len="med"/>
+                    </a:lnB>
+                    <a:solidFill>
+                      <a:srgbClr val="FFFFFF"/>
+                    </a:solidFill>
+                  </a:tcPr>
+                </a:tc>
+                <a:tc>
+                  <a:txBody>
+                    <a:bodyPr/>
+                    <a:lstStyle/>
+                    <a:p>
+                      <a:pPr algn="l" indent="0" marL="0">
+                        <a:buNone/>
+                      </a:pPr>
+                      <a:r>
+                        <a:rPr lang="en-US" sz="1100" dirty="0">
+                          <a:solidFill>
+                            <a:srgbClr val="16233D"/>
+                          </a:solidFill>
+                          <a:latin typeface="Cambria" pitchFamily="34" charset="0"/>
+                          <a:ea typeface="Cambria" pitchFamily="34" charset="-122"/>
+                          <a:cs typeface="Cambria" pitchFamily="34" charset="-120"/>
+                        </a:rPr>
+                        <a:t>—</a:t>
+                      </a:r>
+                      <a:endParaRPr lang="en-US" sz="1100" dirty="0">
+                        <a:latin typeface="Cambria" charset="0"/>
+                        <a:ea typeface="Cambria" charset="0"/>
+                        <a:cs typeface="Cambria" charset="0"/>
+                      </a:endParaRPr>
+                    </a:p>
+                  </a:txBody>
+                  <a:tcPr marL="82296" marR="82296" marT="36576" marB="36576" anchor="ctr">
+                    <a:lnL w="6350" cap="flat" cmpd="sng" algn="ctr">
+                      <a:solidFill>
+                        <a:srgbClr val="D8DFE9"/>
+                      </a:solidFill>
+                      <a:prstDash val="solid"/>
+                      <a:round/>
+                      <a:headEnd type="none" w="med" len="med"/>
+                      <a:tailEnd type="none" w="med" len="med"/>
+                    </a:lnL>
+                    <a:lnR w="6350" cap="flat" cmpd="sng" algn="ctr">
+                      <a:solidFill>
+                        <a:srgbClr val="D8DFE9"/>
+                      </a:solidFill>
+                      <a:prstDash val="solid"/>
+                      <a:round/>
+                      <a:headEnd type="none" w="med" len="med"/>
+                      <a:tailEnd type="none" w="med" len="med"/>
+                    </a:lnR>
+                    <a:lnT w="6350" cap="flat" cmpd="sng" algn="ctr">
+                      <a:solidFill>
+                        <a:srgbClr val="D8DFE9"/>
+                      </a:solidFill>
+                      <a:prstDash val="solid"/>
+                      <a:round/>
+                      <a:headEnd type="none" w="med" len="med"/>
+                      <a:tailEnd type="none" w="med" len="med"/>
+                    </a:lnT>
+                    <a:lnB w="6350" cap="flat" cmpd="sng" algn="ctr">
+                      <a:solidFill>
+                        <a:srgbClr val="D8DFE9"/>
+                      </a:solidFill>
+                      <a:prstDash val="solid"/>
+                      <a:round/>
+                      <a:headEnd type="none" w="med" len="med"/>
+                      <a:tailEnd type="none" w="med" len="med"/>
+                    </a:lnB>
+                    <a:solidFill>
+                      <a:srgbClr val="FFFFFF"/>
+                    </a:solidFill>
+                  </a:tcPr>
+                </a:tc>
+                <a:tc>
+                  <a:txBody>
+                    <a:bodyPr/>
+                    <a:lstStyle/>
+                    <a:p>
+                      <a:pPr algn="l" indent="0" marL="0">
+                        <a:buNone/>
+                      </a:pPr>
+                      <a:r>
+                        <a:rPr lang="en-US" sz="1000" dirty="0">
+                          <a:solidFill>
+                            <a:srgbClr val="5A6B82"/>
+                          </a:solidFill>
+                          <a:latin typeface="Calibri" pitchFamily="34" charset="0"/>
+                          <a:ea typeface="Calibri" pitchFamily="34" charset="-122"/>
+                          <a:cs typeface="Calibri" pitchFamily="34" charset="-120"/>
+                        </a:rPr>
+                        <a:t>Converts well; no credit approval step</a:t>
+                      </a:r>
+                      <a:endParaRPr lang="en-US" sz="1000" dirty="0">
+                        <a:latin typeface="Calibri" charset="0"/>
+                        <a:ea typeface="Calibri" charset="0"/>
+                        <a:cs typeface="Calibri" charset="0"/>
+                      </a:endParaRPr>
+                    </a:p>
+                  </a:txBody>
+                  <a:tcPr marL="82296" marR="82296" marT="36576" marB="36576" anchor="ctr">
+                    <a:lnL w="6350" cap="flat" cmpd="sng" algn="ctr">
+                      <a:solidFill>
+                        <a:srgbClr val="D8DFE9"/>
+                      </a:solidFill>
+                      <a:prstDash val="solid"/>
+                      <a:round/>
+                      <a:headEnd type="none" w="med" len="med"/>
+                      <a:tailEnd type="none" w="med" len="med"/>
+                    </a:lnL>
+                    <a:lnR w="6350" cap="flat" cmpd="sng" algn="ctr">
+                      <a:solidFill>
+                        <a:srgbClr val="D8DFE9"/>
+                      </a:solidFill>
+                      <a:prstDash val="solid"/>
+                      <a:round/>
+                      <a:headEnd type="none" w="med" len="med"/>
+                      <a:tailEnd type="none" w="med" len="med"/>
+                    </a:lnR>
+                    <a:lnT w="6350" cap="flat" cmpd="sng" algn="ctr">
+                      <a:solidFill>
+                        <a:srgbClr val="D8DFE9"/>
+                      </a:solidFill>
+                      <a:prstDash val="solid"/>
+                      <a:round/>
+                      <a:headEnd type="none" w="med" len="med"/>
+                      <a:tailEnd type="none" w="med" len="med"/>
+                    </a:lnT>
+                    <a:lnB w="6350" cap="flat" cmpd="sng" algn="ctr">
+                      <a:solidFill>
+                        <a:srgbClr val="D8DFE9"/>
+                      </a:solidFill>
+                      <a:prstDash val="solid"/>
+                      <a:round/>
+                      <a:headEnd type="none" w="med" len="med"/>
+                      <a:tailEnd type="none" w="med" len="med"/>
+                    </a:lnB>
+                    <a:solidFill>
+                      <a:srgbClr val="FFFFFF"/>
+                    </a:solidFill>
+                  </a:tcPr>
+                </a:tc>
+              </a:tr>
+              <a:tr h="402336">
+                <a:tc>
+                  <a:txBody>
+                    <a:bodyPr/>
+                    <a:lstStyle/>
+                    <a:p>
+                      <a:pPr algn="l" indent="0" marL="0">
+                        <a:buNone/>
+                      </a:pPr>
+                      <a:r>
+                        <a:rPr lang="en-US" sz="1100" b="1" dirty="0">
+                          <a:solidFill>
+                            <a:srgbClr val="16233D"/>
+                          </a:solidFill>
+                          <a:latin typeface="Calibri" pitchFamily="34" charset="0"/>
+                          <a:ea typeface="Calibri" pitchFamily="34" charset="-122"/>
+                          <a:cs typeface="Calibri" pitchFamily="34" charset="-120"/>
+                        </a:rPr>
+                        <a:t>Service</a:t>
+                      </a:r>
+                      <a:endParaRPr lang="en-US" sz="1100" dirty="0">
+                        <a:latin typeface="Calibri" charset="0"/>
+                        <a:ea typeface="Calibri" charset="0"/>
+                        <a:cs typeface="Calibri" charset="0"/>
+                      </a:endParaRPr>
+                    </a:p>
+                  </a:txBody>
+                  <a:tcPr marL="82296" marR="82296" marT="36576" marB="36576" anchor="ctr">
+                    <a:lnL w="6350" cap="flat" cmpd="sng" algn="ctr">
+                      <a:solidFill>
+                        <a:srgbClr val="D8DFE9"/>
+                      </a:solidFill>
+                      <a:prstDash val="solid"/>
+                      <a:round/>
+                      <a:headEnd type="none" w="med" len="med"/>
+                      <a:tailEnd type="none" w="med" len="med"/>
+                    </a:lnL>
+                    <a:lnR w="6350" cap="flat" cmpd="sng" algn="ctr">
+                      <a:solidFill>
+                        <a:srgbClr val="D8DFE9"/>
+                      </a:solidFill>
+                      <a:prstDash val="solid"/>
+                      <a:round/>
+                      <a:headEnd type="none" w="med" len="med"/>
+                      <a:tailEnd type="none" w="med" len="med"/>
+                    </a:lnR>
+                    <a:lnT w="6350" cap="flat" cmpd="sng" algn="ctr">
+                      <a:solidFill>
+                        <a:srgbClr val="D8DFE9"/>
+                      </a:solidFill>
+                      <a:prstDash val="solid"/>
+                      <a:round/>
+                      <a:headEnd type="none" w="med" len="med"/>
+                      <a:tailEnd type="none" w="med" len="med"/>
+                    </a:lnT>
+                    <a:lnB w="6350" cap="flat" cmpd="sng" algn="ctr">
+                      <a:solidFill>
+                        <a:srgbClr val="D8DFE9"/>
+                      </a:solidFill>
+                      <a:prstDash val="solid"/>
+                      <a:round/>
+                      <a:headEnd type="none" w="med" len="med"/>
+                      <a:tailEnd type="none" w="med" len="med"/>
+                    </a:lnB>
+                    <a:solidFill>
+                      <a:srgbClr val="FFFFFF"/>
+                    </a:solidFill>
+                  </a:tcPr>
+                </a:tc>
+                <a:tc>
+                  <a:txBody>
+                    <a:bodyPr/>
+                    <a:lstStyle/>
+                    <a:p>
+                      <a:pPr algn="l" indent="0" marL="0">
+                        <a:buNone/>
+                      </a:pPr>
+                      <a:r>
+                        <a:rPr lang="en-US" sz="1100" dirty="0">
+                          <a:solidFill>
+                            <a:srgbClr val="16233D"/>
+                          </a:solidFill>
+                          <a:latin typeface="Calibri" pitchFamily="34" charset="0"/>
+                          <a:ea typeface="Calibri" pitchFamily="34" charset="-122"/>
+                          <a:cs typeface="Calibri" pitchFamily="34" charset="-120"/>
+                        </a:rPr>
+                        <a:t>6 · 2d</a:t>
+                      </a:r>
+                      <a:endParaRPr lang="en-US" sz="1100" dirty="0">
+                        <a:latin typeface="Calibri" charset="0"/>
+                        <a:ea typeface="Calibri" charset="0"/>
+                        <a:cs typeface="Calibri" charset="0"/>
+                      </a:endParaRPr>
+                    </a:p>
+                  </a:txBody>
+                  <a:tcPr marL="82296" marR="82296" marT="36576" marB="36576" anchor="ctr">
+                    <a:lnL w="6350" cap="flat" cmpd="sng" algn="ctr">
+                      <a:solidFill>
+                        <a:srgbClr val="D8DFE9"/>
+                      </a:solidFill>
+                      <a:prstDash val="solid"/>
+                      <a:round/>
+                      <a:headEnd type="none" w="med" len="med"/>
+                      <a:tailEnd type="none" w="med" len="med"/>
+                    </a:lnL>
+                    <a:lnR w="6350" cap="flat" cmpd="sng" algn="ctr">
+                      <a:solidFill>
+                        <a:srgbClr val="D8DFE9"/>
+                      </a:solidFill>
+                      <a:prstDash val="solid"/>
+                      <a:round/>
+                      <a:headEnd type="none" w="med" len="med"/>
+                      <a:tailEnd type="none" w="med" len="med"/>
+                    </a:lnR>
+                    <a:lnT w="6350" cap="flat" cmpd="sng" algn="ctr">
+                      <a:solidFill>
+                        <a:srgbClr val="D8DFE9"/>
+                      </a:solidFill>
+                      <a:prstDash val="solid"/>
+                      <a:round/>
+                      <a:headEnd type="none" w="med" len="med"/>
+                      <a:tailEnd type="none" w="med" len="med"/>
+                    </a:lnT>
+                    <a:lnB w="6350" cap="flat" cmpd="sng" algn="ctr">
+                      <a:solidFill>
+                        <a:srgbClr val="D8DFE9"/>
+                      </a:solidFill>
+                      <a:prstDash val="solid"/>
+                      <a:round/>
+                      <a:headEnd type="none" w="med" len="med"/>
+                      <a:tailEnd type="none" w="med" len="med"/>
+                    </a:lnB>
+                    <a:solidFill>
+                      <a:srgbClr val="FFFFFF"/>
+                    </a:solidFill>
+                  </a:tcPr>
+                </a:tc>
+                <a:tc>
+                  <a:txBody>
+                    <a:bodyPr/>
+                    <a:lstStyle/>
+                    <a:p>
+                      <a:pPr algn="l" indent="0" marL="0">
+                        <a:buNone/>
+                      </a:pPr>
+                      <a:r>
+                        <a:rPr lang="en-US" sz="1100" dirty="0">
+                          <a:solidFill>
+                            <a:srgbClr val="16233D"/>
+                          </a:solidFill>
+                          <a:latin typeface="Cambria" pitchFamily="34" charset="0"/>
+                          <a:ea typeface="Cambria" pitchFamily="34" charset="-122"/>
+                          <a:cs typeface="Cambria" pitchFamily="34" charset="-120"/>
+                        </a:rPr>
+                        <a:t>1,565.7K</a:t>
+                      </a:r>
+                      <a:endParaRPr lang="en-US" sz="1100" dirty="0">
+                        <a:latin typeface="Cambria" charset="0"/>
+                        <a:ea typeface="Cambria" charset="0"/>
+                        <a:cs typeface="Cambria" charset="0"/>
+                      </a:endParaRPr>
+                    </a:p>
+                  </a:txBody>
+                  <a:tcPr marL="82296" marR="82296" marT="36576" marB="36576" anchor="ctr">
+                    <a:lnL w="6350" cap="flat" cmpd="sng" algn="ctr">
+                      <a:solidFill>
+                        <a:srgbClr val="D8DFE9"/>
+                      </a:solidFill>
+                      <a:prstDash val="solid"/>
+                      <a:round/>
+                      <a:headEnd type="none" w="med" len="med"/>
+                      <a:tailEnd type="none" w="med" len="med"/>
+                    </a:lnL>
+                    <a:lnR w="6350" cap="flat" cmpd="sng" algn="ctr">
+                      <a:solidFill>
+                        <a:srgbClr val="D8DFE9"/>
+                      </a:solidFill>
+                      <a:prstDash val="solid"/>
+                      <a:round/>
+                      <a:headEnd type="none" w="med" len="med"/>
+                      <a:tailEnd type="none" w="med" len="med"/>
+                    </a:lnR>
+                    <a:lnT w="6350" cap="flat" cmpd="sng" algn="ctr">
+                      <a:solidFill>
+                        <a:srgbClr val="D8DFE9"/>
+                      </a:solidFill>
+                      <a:prstDash val="solid"/>
+                      <a:round/>
+                      <a:headEnd type="none" w="med" len="med"/>
+                      <a:tailEnd type="none" w="med" len="med"/>
+                    </a:lnT>
+                    <a:lnB w="6350" cap="flat" cmpd="sng" algn="ctr">
+                      <a:solidFill>
+                        <a:srgbClr val="D8DFE9"/>
+                      </a:solidFill>
+                      <a:prstDash val="solid"/>
+                      <a:round/>
+                      <a:headEnd type="none" w="med" len="med"/>
+                      <a:tailEnd type="none" w="med" len="med"/>
+                    </a:lnB>
+                    <a:solidFill>
+                      <a:srgbClr val="FFFFFF"/>
+                    </a:solidFill>
+                  </a:tcPr>
+                </a:tc>
+                <a:tc>
+                  <a:txBody>
+                    <a:bodyPr/>
+                    <a:lstStyle/>
+                    <a:p>
+                      <a:pPr algn="l" indent="0" marL="0">
+                        <a:buNone/>
+                      </a:pPr>
+                      <a:r>
+                        <a:rPr lang="en-US" sz="1100" dirty="0">
+                          <a:solidFill>
+                            <a:srgbClr val="16233D"/>
+                          </a:solidFill>
+                          <a:latin typeface="Cambria" pitchFamily="34" charset="0"/>
+                          <a:ea typeface="Cambria" pitchFamily="34" charset="-122"/>
+                          <a:cs typeface="Cambria" pitchFamily="34" charset="-120"/>
+                        </a:rPr>
+                        <a:t>23.9%</a:t>
+                      </a:r>
+                      <a:endParaRPr lang="en-US" sz="1100" dirty="0">
+                        <a:latin typeface="Cambria" charset="0"/>
+                        <a:ea typeface="Cambria" charset="0"/>
+                        <a:cs typeface="Cambria" charset="0"/>
+                      </a:endParaRPr>
+                    </a:p>
+                  </a:txBody>
+                  <a:tcPr marL="82296" marR="82296" marT="36576" marB="36576" anchor="ctr">
+                    <a:lnL w="6350" cap="flat" cmpd="sng" algn="ctr">
+                      <a:solidFill>
+                        <a:srgbClr val="D8DFE9"/>
+                      </a:solidFill>
+                      <a:prstDash val="solid"/>
+                      <a:round/>
+                      <a:headEnd type="none" w="med" len="med"/>
+                      <a:tailEnd type="none" w="med" len="med"/>
+                    </a:lnL>
+                    <a:lnR w="6350" cap="flat" cmpd="sng" algn="ctr">
+                      <a:solidFill>
+                        <a:srgbClr val="D8DFE9"/>
+                      </a:solidFill>
+                      <a:prstDash val="solid"/>
+                      <a:round/>
+                      <a:headEnd type="none" w="med" len="med"/>
+                      <a:tailEnd type="none" w="med" len="med"/>
+                    </a:lnR>
+                    <a:lnT w="6350" cap="flat" cmpd="sng" algn="ctr">
+                      <a:solidFill>
+                        <a:srgbClr val="D8DFE9"/>
+                      </a:solidFill>
+                      <a:prstDash val="solid"/>
+                      <a:round/>
+                      <a:headEnd type="none" w="med" len="med"/>
+                      <a:tailEnd type="none" w="med" len="med"/>
+                    </a:lnT>
+                    <a:lnB w="6350" cap="flat" cmpd="sng" algn="ctr">
+                      <a:solidFill>
+                        <a:srgbClr val="D8DFE9"/>
+                      </a:solidFill>
+                      <a:prstDash val="solid"/>
+                      <a:round/>
+                      <a:headEnd type="none" w="med" len="med"/>
+                      <a:tailEnd type="none" w="med" len="med"/>
+                    </a:lnB>
+                    <a:solidFill>
+                      <a:srgbClr val="FFFFFF"/>
+                    </a:solidFill>
+                  </a:tcPr>
+                </a:tc>
+                <a:tc>
+                  <a:txBody>
+                    <a:bodyPr/>
+                    <a:lstStyle/>
+                    <a:p>
+                      <a:pPr algn="l" indent="0" marL="0">
+                        <a:buNone/>
+                      </a:pPr>
+                      <a:r>
+                        <a:rPr lang="en-US" sz="1100" dirty="0">
+                          <a:solidFill>
+                            <a:srgbClr val="16233D"/>
+                          </a:solidFill>
+                          <a:latin typeface="Cambria" pitchFamily="34" charset="0"/>
+                          <a:ea typeface="Cambria" pitchFamily="34" charset="-122"/>
+                          <a:cs typeface="Cambria" pitchFamily="34" charset="-120"/>
+                        </a:rPr>
+                        <a:t>10.6%</a:t>
+                      </a:r>
+                      <a:endParaRPr lang="en-US" sz="1100" dirty="0">
+                        <a:latin typeface="Cambria" charset="0"/>
+                        <a:ea typeface="Cambria" charset="0"/>
+                        <a:cs typeface="Cambria" charset="0"/>
+                      </a:endParaRPr>
+                    </a:p>
+                  </a:txBody>
+                  <a:tcPr marL="82296" marR="82296" marT="36576" marB="36576" anchor="ctr">
+                    <a:lnL w="6350" cap="flat" cmpd="sng" algn="ctr">
+                      <a:solidFill>
+                        <a:srgbClr val="D8DFE9"/>
+                      </a:solidFill>
+                      <a:prstDash val="solid"/>
+                      <a:round/>
+                      <a:headEnd type="none" w="med" len="med"/>
+                      <a:tailEnd type="none" w="med" len="med"/>
+                    </a:lnL>
+                    <a:lnR w="6350" cap="flat" cmpd="sng" algn="ctr">
+                      <a:solidFill>
+                        <a:srgbClr val="D8DFE9"/>
+                      </a:solidFill>
+                      <a:prstDash val="solid"/>
+                      <a:round/>
+                      <a:headEnd type="none" w="med" len="med"/>
+                      <a:tailEnd type="none" w="med" len="med"/>
+                    </a:lnR>
+                    <a:lnT w="6350" cap="flat" cmpd="sng" algn="ctr">
+                      <a:solidFill>
+                        <a:srgbClr val="D8DFE9"/>
+                      </a:solidFill>
+                      <a:prstDash val="solid"/>
+                      <a:round/>
+                      <a:headEnd type="none" w="med" len="med"/>
+                      <a:tailEnd type="none" w="med" len="med"/>
+                    </a:lnT>
+                    <a:lnB w="6350" cap="flat" cmpd="sng" algn="ctr">
+                      <a:solidFill>
+                        <a:srgbClr val="D8DFE9"/>
+                      </a:solidFill>
+                      <a:prstDash val="solid"/>
+                      <a:round/>
+                      <a:headEnd type="none" w="med" len="med"/>
+                      <a:tailEnd type="none" w="med" len="med"/>
+                    </a:lnB>
+                    <a:solidFill>
+                      <a:srgbClr val="FFFFFF"/>
+                    </a:solidFill>
+                  </a:tcPr>
+                </a:tc>
+                <a:tc>
+                  <a:txBody>
+                    <a:bodyPr/>
+                    <a:lstStyle/>
+                    <a:p>
+                      <a:pPr algn="l" indent="0" marL="0">
+                        <a:buNone/>
+                      </a:pPr>
+                      <a:r>
+                        <a:rPr lang="en-US" sz="1100" dirty="0">
+                          <a:solidFill>
+                            <a:srgbClr val="16233D"/>
+                          </a:solidFill>
+                          <a:latin typeface="Cambria" pitchFamily="34" charset="0"/>
+                          <a:ea typeface="Cambria" pitchFamily="34" charset="-122"/>
+                          <a:cs typeface="Cambria" pitchFamily="34" charset="-120"/>
+                        </a:rPr>
+                        <a:t>0.1%</a:t>
+                      </a:r>
+                      <a:endParaRPr lang="en-US" sz="1100" dirty="0">
+                        <a:latin typeface="Cambria" charset="0"/>
+                        <a:ea typeface="Cambria" charset="0"/>
+                        <a:cs typeface="Cambria" charset="0"/>
+                      </a:endParaRPr>
+                    </a:p>
+                  </a:txBody>
+                  <a:tcPr marL="82296" marR="82296" marT="36576" marB="36576" anchor="ctr">
+                    <a:lnL w="6350" cap="flat" cmpd="sng" algn="ctr">
+                      <a:solidFill>
+                        <a:srgbClr val="D8DFE9"/>
+                      </a:solidFill>
+                      <a:prstDash val="solid"/>
+                      <a:round/>
+                      <a:headEnd type="none" w="med" len="med"/>
+                      <a:tailEnd type="none" w="med" len="med"/>
+                    </a:lnL>
+                    <a:lnR w="6350" cap="flat" cmpd="sng" algn="ctr">
+                      <a:solidFill>
+                        <a:srgbClr val="D8DFE9"/>
+                      </a:solidFill>
+                      <a:prstDash val="solid"/>
+                      <a:round/>
+                      <a:headEnd type="none" w="med" len="med"/>
+                      <a:tailEnd type="none" w="med" len="med"/>
+                    </a:lnR>
+                    <a:lnT w="6350" cap="flat" cmpd="sng" algn="ctr">
+                      <a:solidFill>
+                        <a:srgbClr val="D8DFE9"/>
+                      </a:solidFill>
+                      <a:prstDash val="solid"/>
+                      <a:round/>
+                      <a:headEnd type="none" w="med" len="med"/>
+                      <a:tailEnd type="none" w="med" len="med"/>
+                    </a:lnT>
+                    <a:lnB w="6350" cap="flat" cmpd="sng" algn="ctr">
+                      <a:solidFill>
+                        <a:srgbClr val="D8DFE9"/>
+                      </a:solidFill>
+                      <a:prstDash val="solid"/>
+                      <a:round/>
+                      <a:headEnd type="none" w="med" len="med"/>
+                      <a:tailEnd type="none" w="med" len="med"/>
+                    </a:lnB>
+                    <a:solidFill>
+                      <a:srgbClr val="FFFFFF"/>
+                    </a:solidFill>
+                  </a:tcPr>
+                </a:tc>
+                <a:tc>
+                  <a:txBody>
+                    <a:bodyPr/>
+                    <a:lstStyle/>
+                    <a:p>
+                      <a:pPr algn="l" indent="0" marL="0">
+                        <a:buNone/>
+                      </a:pPr>
+                      <a:r>
+                        <a:rPr lang="en-US" sz="1100" dirty="0">
+                          <a:solidFill>
+                            <a:srgbClr val="16233D"/>
+                          </a:solidFill>
+                          <a:latin typeface="Cambria" pitchFamily="34" charset="0"/>
+                          <a:ea typeface="Cambria" pitchFamily="34" charset="-122"/>
+                          <a:cs typeface="Cambria" pitchFamily="34" charset="-120"/>
+                        </a:rPr>
+                        <a:t>—</a:t>
+                      </a:r>
+                      <a:endParaRPr lang="en-US" sz="1100" dirty="0">
+                        <a:latin typeface="Cambria" charset="0"/>
+                        <a:ea typeface="Cambria" charset="0"/>
+                        <a:cs typeface="Cambria" charset="0"/>
+                      </a:endParaRPr>
+                    </a:p>
+                  </a:txBody>
+                  <a:tcPr marL="82296" marR="82296" marT="36576" marB="36576" anchor="ctr">
+                    <a:lnL w="6350" cap="flat" cmpd="sng" algn="ctr">
+                      <a:solidFill>
+                        <a:srgbClr val="D8DFE9"/>
+                      </a:solidFill>
+                      <a:prstDash val="solid"/>
+                      <a:round/>
+                      <a:headEnd type="none" w="med" len="med"/>
+                      <a:tailEnd type="none" w="med" len="med"/>
+                    </a:lnL>
+                    <a:lnR w="6350" cap="flat" cmpd="sng" algn="ctr">
+                      <a:solidFill>
+                        <a:srgbClr val="D8DFE9"/>
+                      </a:solidFill>
+                      <a:prstDash val="solid"/>
+                      <a:round/>
+                      <a:headEnd type="none" w="med" len="med"/>
+                      <a:tailEnd type="none" w="med" len="med"/>
+                    </a:lnR>
+                    <a:lnT w="6350" cap="flat" cmpd="sng" algn="ctr">
+                      <a:solidFill>
+                        <a:srgbClr val="D8DFE9"/>
+                      </a:solidFill>
+                      <a:prstDash val="solid"/>
+                      <a:round/>
+                      <a:headEnd type="none" w="med" len="med"/>
+                      <a:tailEnd type="none" w="med" len="med"/>
+                    </a:lnT>
+                    <a:lnB w="6350" cap="flat" cmpd="sng" algn="ctr">
+                      <a:solidFill>
+                        <a:srgbClr val="D8DFE9"/>
+                      </a:solidFill>
+                      <a:prstDash val="solid"/>
+                      <a:round/>
+                      <a:headEnd type="none" w="med" len="med"/>
+                      <a:tailEnd type="none" w="med" len="med"/>
+                    </a:lnB>
+                    <a:solidFill>
+                      <a:srgbClr val="FFFFFF"/>
+                    </a:solidFill>
+                  </a:tcPr>
+                </a:tc>
+                <a:tc>
+                  <a:txBody>
+                    <a:bodyPr/>
+                    <a:lstStyle/>
+                    <a:p>
+                      <a:pPr algn="l" indent="0" marL="0">
+                        <a:buNone/>
+                      </a:pPr>
+                      <a:r>
+                        <a:rPr lang="en-US" sz="1100" dirty="0">
+                          <a:solidFill>
+                            <a:srgbClr val="16233D"/>
+                          </a:solidFill>
+                          <a:latin typeface="Cambria" pitchFamily="34" charset="0"/>
+                          <a:ea typeface="Cambria" pitchFamily="34" charset="-122"/>
+                          <a:cs typeface="Cambria" pitchFamily="34" charset="-120"/>
+                        </a:rPr>
+                        <a:t>—</a:t>
+                      </a:r>
+                      <a:endParaRPr lang="en-US" sz="1100" dirty="0">
+                        <a:latin typeface="Cambria" charset="0"/>
+                        <a:ea typeface="Cambria" charset="0"/>
+                        <a:cs typeface="Cambria" charset="0"/>
+                      </a:endParaRPr>
+                    </a:p>
+                  </a:txBody>
+                  <a:tcPr marL="82296" marR="82296" marT="36576" marB="36576" anchor="ctr">
+                    <a:lnL w="6350" cap="flat" cmpd="sng" algn="ctr">
+                      <a:solidFill>
+                        <a:srgbClr val="D8DFE9"/>
+                      </a:solidFill>
+                      <a:prstDash val="solid"/>
+                      <a:round/>
+                      <a:headEnd type="none" w="med" len="med"/>
+                      <a:tailEnd type="none" w="med" len="med"/>
+                    </a:lnL>
+                    <a:lnR w="6350" cap="flat" cmpd="sng" algn="ctr">
+                      <a:solidFill>
+                        <a:srgbClr val="D8DFE9"/>
+                      </a:solidFill>
+                      <a:prstDash val="solid"/>
+                      <a:round/>
+                      <a:headEnd type="none" w="med" len="med"/>
+                      <a:tailEnd type="none" w="med" len="med"/>
+                    </a:lnR>
+                    <a:lnT w="6350" cap="flat" cmpd="sng" algn="ctr">
+                      <a:solidFill>
+                        <a:srgbClr val="D8DFE9"/>
+                      </a:solidFill>
+                      <a:prstDash val="solid"/>
+                      <a:round/>
+                      <a:headEnd type="none" w="med" len="med"/>
+                      <a:tailEnd type="none" w="med" len="med"/>
+                    </a:lnT>
+                    <a:lnB w="6350" cap="flat" cmpd="sng" algn="ctr">
+                      <a:solidFill>
+                        <a:srgbClr val="D8DFE9"/>
+                      </a:solidFill>
+                      <a:prstDash val="solid"/>
+                      <a:round/>
+                      <a:headEnd type="none" w="med" len="med"/>
+                      <a:tailEnd type="none" w="med" len="med"/>
+                    </a:lnB>
+                    <a:solidFill>
+                      <a:srgbClr val="FFFFFF"/>
+                    </a:solidFill>
+                  </a:tcPr>
+                </a:tc>
+                <a:tc>
+                  <a:txBody>
+                    <a:bodyPr/>
+                    <a:lstStyle/>
+                    <a:p>
+                      <a:pPr algn="l" indent="0" marL="0">
+                        <a:buNone/>
+                      </a:pPr>
+                      <a:r>
+                        <a:rPr lang="en-US" sz="1000" dirty="0">
+                          <a:solidFill>
+                            <a:srgbClr val="5A6B82"/>
+                          </a:solidFill>
+                          <a:latin typeface="Calibri" pitchFamily="34" charset="0"/>
+                          <a:ea typeface="Calibri" pitchFamily="34" charset="-122"/>
+                          <a:cs typeface="Calibri" pitchFamily="34" charset="-120"/>
+                        </a:rPr>
+                        <a:t>Deepest engagement; ends offline</a:t>
+                      </a:r>
+                      <a:endParaRPr lang="en-US" sz="1000" dirty="0">
+                        <a:latin typeface="Calibri" charset="0"/>
+                        <a:ea typeface="Calibri" charset="0"/>
+                        <a:cs typeface="Calibri" charset="0"/>
+                      </a:endParaRPr>
+                    </a:p>
+                  </a:txBody>
+                  <a:tcPr marL="82296" marR="82296" marT="36576" marB="36576" anchor="ctr">
+                    <a:lnL w="6350" cap="flat" cmpd="sng" algn="ctr">
+                      <a:solidFill>
+                        <a:srgbClr val="D8DFE9"/>
+                      </a:solidFill>
+                      <a:prstDash val="solid"/>
+                      <a:round/>
+                      <a:headEnd type="none" w="med" len="med"/>
+                      <a:tailEnd type="none" w="med" len="med"/>
+                    </a:lnL>
+                    <a:lnR w="6350" cap="flat" cmpd="sng" algn="ctr">
+                      <a:solidFill>
+                        <a:srgbClr val="D8DFE9"/>
+                      </a:solidFill>
+                      <a:prstDash val="solid"/>
+                      <a:round/>
+                      <a:headEnd type="none" w="med" len="med"/>
+                      <a:tailEnd type="none" w="med" len="med"/>
+                    </a:lnR>
+                    <a:lnT w="6350" cap="flat" cmpd="sng" algn="ctr">
+                      <a:solidFill>
+                        <a:srgbClr val="D8DFE9"/>
+                      </a:solidFill>
+                      <a:prstDash val="solid"/>
+                      <a:round/>
+                      <a:headEnd type="none" w="med" len="med"/>
+                      <a:tailEnd type="none" w="med" len="med"/>
+                    </a:lnT>
+                    <a:lnB w="6350" cap="flat" cmpd="sng" algn="ctr">
+                      <a:solidFill>
+                        <a:srgbClr val="D8DFE9"/>
+                      </a:solidFill>
+                      <a:prstDash val="solid"/>
+                      <a:round/>
+                      <a:headEnd type="none" w="med" len="med"/>
+                      <a:tailEnd type="none" w="med" len="med"/>
+                    </a:lnB>
+                    <a:solidFill>
+                      <a:srgbClr val="FFFFFF"/>
+                    </a:solidFill>
+                  </a:tcPr>
+                </a:tc>
+              </a:tr>
+              <a:tr h="402336">
+                <a:tc>
+                  <a:txBody>
+                    <a:bodyPr/>
+                    <a:lstStyle/>
+                    <a:p>
+                      <a:pPr algn="l" indent="0" marL="0">
+                        <a:buNone/>
+                      </a:pPr>
+                      <a:r>
+                        <a:rPr lang="en-US" sz="1100" b="1" dirty="0">
+                          <a:solidFill>
+                            <a:srgbClr val="16233D"/>
+                          </a:solidFill>
+                          <a:latin typeface="Calibri" pitchFamily="34" charset="0"/>
+                          <a:ea typeface="Calibri" pitchFamily="34" charset="-122"/>
+                          <a:cs typeface="Calibri" pitchFamily="34" charset="-120"/>
+                        </a:rPr>
+                        <a:t>Marketing</a:t>
+                      </a:r>
+                      <a:endParaRPr lang="en-US" sz="1100" dirty="0">
+                        <a:latin typeface="Calibri" charset="0"/>
+                        <a:ea typeface="Calibri" charset="0"/>
+                        <a:cs typeface="Calibri" charset="0"/>
+                      </a:endParaRPr>
+                    </a:p>
+                  </a:txBody>
+                  <a:tcPr marL="82296" marR="82296" marT="36576" marB="36576" anchor="ctr">
+                    <a:lnL w="6350" cap="flat" cmpd="sng" algn="ctr">
+                      <a:solidFill>
+                        <a:srgbClr val="D8DFE9"/>
+                      </a:solidFill>
+                      <a:prstDash val="solid"/>
+                      <a:round/>
+                      <a:headEnd type="none" w="med" len="med"/>
+                      <a:tailEnd type="none" w="med" len="med"/>
+                    </a:lnL>
+                    <a:lnR w="6350" cap="flat" cmpd="sng" algn="ctr">
+                      <a:solidFill>
+                        <a:srgbClr val="D8DFE9"/>
+                      </a:solidFill>
+                      <a:prstDash val="solid"/>
+                      <a:round/>
+                      <a:headEnd type="none" w="med" len="med"/>
+                      <a:tailEnd type="none" w="med" len="med"/>
+                    </a:lnR>
+                    <a:lnT w="6350" cap="flat" cmpd="sng" algn="ctr">
+                      <a:solidFill>
+                        <a:srgbClr val="D8DFE9"/>
+                      </a:solidFill>
+                      <a:prstDash val="solid"/>
+                      <a:round/>
+                      <a:headEnd type="none" w="med" len="med"/>
+                      <a:tailEnd type="none" w="med" len="med"/>
+                    </a:lnT>
+                    <a:lnB w="6350" cap="flat" cmpd="sng" algn="ctr">
+                      <a:solidFill>
+                        <a:srgbClr val="D8DFE9"/>
+                      </a:solidFill>
+                      <a:prstDash val="solid"/>
+                      <a:round/>
+                      <a:headEnd type="none" w="med" len="med"/>
+                      <a:tailEnd type="none" w="med" len="med"/>
+                    </a:lnB>
+                    <a:solidFill>
+                      <a:srgbClr val="FFFFFF"/>
+                    </a:solidFill>
+                  </a:tcPr>
+                </a:tc>
+                <a:tc>
+                  <a:txBody>
+                    <a:bodyPr/>
+                    <a:lstStyle/>
+                    <a:p>
+                      <a:pPr algn="l" indent="0" marL="0">
+                        <a:buNone/>
+                      </a:pPr>
+                      <a:r>
+                        <a:rPr lang="en-US" sz="1100" dirty="0">
+                          <a:solidFill>
+                            <a:srgbClr val="16233D"/>
+                          </a:solidFill>
+                          <a:latin typeface="Calibri" pitchFamily="34" charset="0"/>
+                          <a:ea typeface="Calibri" pitchFamily="34" charset="-122"/>
+                          <a:cs typeface="Calibri" pitchFamily="34" charset="-120"/>
+                        </a:rPr>
+                        <a:t>14 · 45d</a:t>
+                      </a:r>
+                      <a:endParaRPr lang="en-US" sz="1100" dirty="0">
+                        <a:latin typeface="Calibri" charset="0"/>
+                        <a:ea typeface="Calibri" charset="0"/>
+                        <a:cs typeface="Calibri" charset="0"/>
+                      </a:endParaRPr>
+                    </a:p>
+                  </a:txBody>
+                  <a:tcPr marL="82296" marR="82296" marT="36576" marB="36576" anchor="ctr">
+                    <a:lnL w="6350" cap="flat" cmpd="sng" algn="ctr">
+                      <a:solidFill>
+                        <a:srgbClr val="D8DFE9"/>
+                      </a:solidFill>
+                      <a:prstDash val="solid"/>
+                      <a:round/>
+                      <a:headEnd type="none" w="med" len="med"/>
+                      <a:tailEnd type="none" w="med" len="med"/>
+                    </a:lnL>
+                    <a:lnR w="6350" cap="flat" cmpd="sng" algn="ctr">
+                      <a:solidFill>
+                        <a:srgbClr val="D8DFE9"/>
+                      </a:solidFill>
+                      <a:prstDash val="solid"/>
+                      <a:round/>
+                      <a:headEnd type="none" w="med" len="med"/>
+                      <a:tailEnd type="none" w="med" len="med"/>
+                    </a:lnR>
+                    <a:lnT w="6350" cap="flat" cmpd="sng" algn="ctr">
+                      <a:solidFill>
+                        <a:srgbClr val="D8DFE9"/>
+                      </a:solidFill>
+                      <a:prstDash val="solid"/>
+                      <a:round/>
+                      <a:headEnd type="none" w="med" len="med"/>
+                      <a:tailEnd type="none" w="med" len="med"/>
+                    </a:lnT>
+                    <a:lnB w="6350" cap="flat" cmpd="sng" algn="ctr">
+                      <a:solidFill>
+                        <a:srgbClr val="D8DFE9"/>
+                      </a:solidFill>
+                      <a:prstDash val="solid"/>
+                      <a:round/>
+                      <a:headEnd type="none" w="med" len="med"/>
+                      <a:tailEnd type="none" w="med" len="med"/>
+                    </a:lnB>
+                    <a:solidFill>
+                      <a:srgbClr val="FFFFFF"/>
+                    </a:solidFill>
+                  </a:tcPr>
+                </a:tc>
+                <a:tc>
+                  <a:txBody>
+                    <a:bodyPr/>
+                    <a:lstStyle/>
+                    <a:p>
+                      <a:pPr algn="l" indent="0" marL="0">
+                        <a:buNone/>
+                      </a:pPr>
+                      <a:r>
+                        <a:rPr lang="en-US" sz="1100" dirty="0">
+                          <a:solidFill>
+                            <a:srgbClr val="16233D"/>
+                          </a:solidFill>
+                          <a:latin typeface="Cambria" pitchFamily="34" charset="0"/>
+                          <a:ea typeface="Cambria" pitchFamily="34" charset="-122"/>
+                          <a:cs typeface="Cambria" pitchFamily="34" charset="-120"/>
+                        </a:rPr>
+                        <a:t>4,357.3K</a:t>
+                      </a:r>
+                      <a:endParaRPr lang="en-US" sz="1100" dirty="0">
+                        <a:latin typeface="Cambria" charset="0"/>
+                        <a:ea typeface="Cambria" charset="0"/>
+                        <a:cs typeface="Cambria" charset="0"/>
+                      </a:endParaRPr>
+                    </a:p>
+                  </a:txBody>
+                  <a:tcPr marL="82296" marR="82296" marT="36576" marB="36576" anchor="ctr">
+                    <a:lnL w="6350" cap="flat" cmpd="sng" algn="ctr">
+                      <a:solidFill>
+                        <a:srgbClr val="D8DFE9"/>
+                      </a:solidFill>
+                      <a:prstDash val="solid"/>
+                      <a:round/>
+                      <a:headEnd type="none" w="med" len="med"/>
+                      <a:tailEnd type="none" w="med" len="med"/>
+                    </a:lnL>
+                    <a:lnR w="6350" cap="flat" cmpd="sng" algn="ctr">
+                      <a:solidFill>
+                        <a:srgbClr val="D8DFE9"/>
+                      </a:solidFill>
+                      <a:prstDash val="solid"/>
+                      <a:round/>
+                      <a:headEnd type="none" w="med" len="med"/>
+                      <a:tailEnd type="none" w="med" len="med"/>
+                    </a:lnR>
+                    <a:lnT w="6350" cap="flat" cmpd="sng" algn="ctr">
+                      <a:solidFill>
+                        <a:srgbClr val="D8DFE9"/>
+                      </a:solidFill>
+                      <a:prstDash val="solid"/>
+                      <a:round/>
+                      <a:headEnd type="none" w="med" len="med"/>
+                      <a:tailEnd type="none" w="med" len="med"/>
+                    </a:lnT>
+                    <a:lnB w="6350" cap="flat" cmpd="sng" algn="ctr">
+                      <a:solidFill>
+                        <a:srgbClr val="D8DFE9"/>
+                      </a:solidFill>
+                      <a:prstDash val="solid"/>
+                      <a:round/>
+                      <a:headEnd type="none" w="med" len="med"/>
+                      <a:tailEnd type="none" w="med" len="med"/>
+                    </a:lnB>
+                    <a:solidFill>
+                      <a:srgbClr val="FFFFFF"/>
+                    </a:solidFill>
+                  </a:tcPr>
+                </a:tc>
+                <a:tc>
+                  <a:txBody>
+                    <a:bodyPr/>
+                    <a:lstStyle/>
+                    <a:p>
+                      <a:pPr algn="l" indent="0" marL="0">
+                        <a:buNone/>
+                      </a:pPr>
+                      <a:r>
+                        <a:rPr lang="en-US" sz="1100" dirty="0">
+                          <a:solidFill>
+                            <a:srgbClr val="16233D"/>
+                          </a:solidFill>
+                          <a:latin typeface="Cambria" pitchFamily="34" charset="0"/>
+                          <a:ea typeface="Cambria" pitchFamily="34" charset="-122"/>
+                          <a:cs typeface="Cambria" pitchFamily="34" charset="-120"/>
+                        </a:rPr>
+                        <a:t>12.7%</a:t>
+                      </a:r>
+                      <a:endParaRPr lang="en-US" sz="1100" dirty="0">
+                        <a:latin typeface="Cambria" charset="0"/>
+                        <a:ea typeface="Cambria" charset="0"/>
+                        <a:cs typeface="Cambria" charset="0"/>
+                      </a:endParaRPr>
+                    </a:p>
+                  </a:txBody>
+                  <a:tcPr marL="82296" marR="82296" marT="36576" marB="36576" anchor="ctr">
+                    <a:lnL w="6350" cap="flat" cmpd="sng" algn="ctr">
+                      <a:solidFill>
+                        <a:srgbClr val="D8DFE9"/>
+                      </a:solidFill>
+                      <a:prstDash val="solid"/>
+                      <a:round/>
+                      <a:headEnd type="none" w="med" len="med"/>
+                      <a:tailEnd type="none" w="med" len="med"/>
+                    </a:lnL>
+                    <a:lnR w="6350" cap="flat" cmpd="sng" algn="ctr">
+                      <a:solidFill>
+                        <a:srgbClr val="D8DFE9"/>
+                      </a:solidFill>
+                      <a:prstDash val="solid"/>
+                      <a:round/>
+                      <a:headEnd type="none" w="med" len="med"/>
+                      <a:tailEnd type="none" w="med" len="med"/>
+                    </a:lnR>
+                    <a:lnT w="6350" cap="flat" cmpd="sng" algn="ctr">
+                      <a:solidFill>
+                        <a:srgbClr val="D8DFE9"/>
+                      </a:solidFill>
+                      <a:prstDash val="solid"/>
+                      <a:round/>
+                      <a:headEnd type="none" w="med" len="med"/>
+                      <a:tailEnd type="none" w="med" len="med"/>
+                    </a:lnT>
+                    <a:lnB w="6350" cap="flat" cmpd="sng" algn="ctr">
+                      <a:solidFill>
+                        <a:srgbClr val="D8DFE9"/>
+                      </a:solidFill>
+                      <a:prstDash val="solid"/>
+                      <a:round/>
+                      <a:headEnd type="none" w="med" len="med"/>
+                      <a:tailEnd type="none" w="med" len="med"/>
+                    </a:lnB>
+                    <a:solidFill>
+                      <a:srgbClr val="FFFFFF"/>
+                    </a:solidFill>
+                  </a:tcPr>
+                </a:tc>
+                <a:tc>
+                  <a:txBody>
+                    <a:bodyPr/>
+                    <a:lstStyle/>
+                    <a:p>
+                      <a:pPr algn="l" indent="0" marL="0">
+                        <a:buNone/>
+                      </a:pPr>
+                      <a:r>
+                        <a:rPr lang="en-US" sz="1100" dirty="0">
+                          <a:solidFill>
+                            <a:srgbClr val="16233D"/>
+                          </a:solidFill>
+                          <a:latin typeface="Cambria" pitchFamily="34" charset="0"/>
+                          <a:ea typeface="Cambria" pitchFamily="34" charset="-122"/>
+                          <a:cs typeface="Cambria" pitchFamily="34" charset="-120"/>
+                        </a:rPr>
+                        <a:t>4.6%</a:t>
+                      </a:r>
+                      <a:endParaRPr lang="en-US" sz="1100" dirty="0">
+                        <a:latin typeface="Cambria" charset="0"/>
+                        <a:ea typeface="Cambria" charset="0"/>
+                        <a:cs typeface="Cambria" charset="0"/>
+                      </a:endParaRPr>
+                    </a:p>
+                  </a:txBody>
+                  <a:tcPr marL="82296" marR="82296" marT="36576" marB="36576" anchor="ctr">
+                    <a:lnL w="6350" cap="flat" cmpd="sng" algn="ctr">
+                      <a:solidFill>
+                        <a:srgbClr val="D8DFE9"/>
+                      </a:solidFill>
+                      <a:prstDash val="solid"/>
+                      <a:round/>
+                      <a:headEnd type="none" w="med" len="med"/>
+                      <a:tailEnd type="none" w="med" len="med"/>
+                    </a:lnL>
+                    <a:lnR w="6350" cap="flat" cmpd="sng" algn="ctr">
+                      <a:solidFill>
+                        <a:srgbClr val="D8DFE9"/>
+                      </a:solidFill>
+                      <a:prstDash val="solid"/>
+                      <a:round/>
+                      <a:headEnd type="none" w="med" len="med"/>
+                      <a:tailEnd type="none" w="med" len="med"/>
+                    </a:lnR>
+                    <a:lnT w="6350" cap="flat" cmpd="sng" algn="ctr">
+                      <a:solidFill>
+                        <a:srgbClr val="D8DFE9"/>
+                      </a:solidFill>
+                      <a:prstDash val="solid"/>
+                      <a:round/>
+                      <a:headEnd type="none" w="med" len="med"/>
+                      <a:tailEnd type="none" w="med" len="med"/>
+                    </a:lnT>
+                    <a:lnB w="6350" cap="flat" cmpd="sng" algn="ctr">
+                      <a:solidFill>
+                        <a:srgbClr val="D8DFE9"/>
+                      </a:solidFill>
+                      <a:prstDash val="solid"/>
+                      <a:round/>
+                      <a:headEnd type="none" w="med" len="med"/>
+                      <a:tailEnd type="none" w="med" len="med"/>
+                    </a:lnB>
+                    <a:solidFill>
+                      <a:srgbClr val="FFFFFF"/>
+                    </a:solidFill>
+                  </a:tcPr>
+                </a:tc>
+                <a:tc>
+                  <a:txBody>
+                    <a:bodyPr/>
+                    <a:lstStyle/>
+                    <a:p>
+                      <a:pPr algn="l" indent="0" marL="0">
+                        <a:buNone/>
+                      </a:pPr>
+                      <a:r>
+                        <a:rPr lang="en-US" sz="1100" dirty="0">
+                          <a:solidFill>
+                            <a:srgbClr val="16233D"/>
+                          </a:solidFill>
+                          <a:latin typeface="Cambria" pitchFamily="34" charset="0"/>
+                          <a:ea typeface="Cambria" pitchFamily="34" charset="-122"/>
+                          <a:cs typeface="Cambria" pitchFamily="34" charset="-120"/>
+                        </a:rPr>
+                        <a:t>0.0%</a:t>
+                      </a:r>
+                      <a:endParaRPr lang="en-US" sz="1100" dirty="0">
+                        <a:latin typeface="Cambria" charset="0"/>
+                        <a:ea typeface="Cambria" charset="0"/>
+                        <a:cs typeface="Cambria" charset="0"/>
+                      </a:endParaRPr>
+                    </a:p>
+                  </a:txBody>
+                  <a:tcPr marL="82296" marR="82296" marT="36576" marB="36576" anchor="ctr">
+                    <a:lnL w="6350" cap="flat" cmpd="sng" algn="ctr">
+                      <a:solidFill>
+                        <a:srgbClr val="D8DFE9"/>
+                      </a:solidFill>
+                      <a:prstDash val="solid"/>
+                      <a:round/>
+                      <a:headEnd type="none" w="med" len="med"/>
+                      <a:tailEnd type="none" w="med" len="med"/>
+                    </a:lnL>
+                    <a:lnR w="6350" cap="flat" cmpd="sng" algn="ctr">
+                      <a:solidFill>
+                        <a:srgbClr val="D8DFE9"/>
+                      </a:solidFill>
+                      <a:prstDash val="solid"/>
+                      <a:round/>
+                      <a:headEnd type="none" w="med" len="med"/>
+                      <a:tailEnd type="none" w="med" len="med"/>
+                    </a:lnR>
+                    <a:lnT w="6350" cap="flat" cmpd="sng" algn="ctr">
+                      <a:solidFill>
+                        <a:srgbClr val="D8DFE9"/>
+                      </a:solidFill>
+                      <a:prstDash val="solid"/>
+                      <a:round/>
+                      <a:headEnd type="none" w="med" len="med"/>
+                      <a:tailEnd type="none" w="med" len="med"/>
+                    </a:lnT>
+                    <a:lnB w="6350" cap="flat" cmpd="sng" algn="ctr">
+                      <a:solidFill>
+                        <a:srgbClr val="D8DFE9"/>
+                      </a:solidFill>
+                      <a:prstDash val="solid"/>
+                      <a:round/>
+                      <a:headEnd type="none" w="med" len="med"/>
+                      <a:tailEnd type="none" w="med" len="med"/>
+                    </a:lnB>
+                    <a:solidFill>
+                      <a:srgbClr val="FFFFFF"/>
+                    </a:solidFill>
+                  </a:tcPr>
+                </a:tc>
+                <a:tc>
+                  <a:txBody>
+                    <a:bodyPr/>
+                    <a:lstStyle/>
+                    <a:p>
+                      <a:pPr algn="l" indent="0" marL="0">
+                        <a:buNone/>
+                      </a:pPr>
+                      <a:r>
+                        <a:rPr lang="en-US" sz="1100" dirty="0">
+                          <a:solidFill>
+                            <a:srgbClr val="16233D"/>
+                          </a:solidFill>
+                          <a:latin typeface="Cambria" pitchFamily="34" charset="0"/>
+                          <a:ea typeface="Cambria" pitchFamily="34" charset="-122"/>
+                          <a:cs typeface="Cambria" pitchFamily="34" charset="-120"/>
+                        </a:rPr>
+                        <a:t>—</a:t>
+                      </a:r>
+                      <a:endParaRPr lang="en-US" sz="1100" dirty="0">
+                        <a:latin typeface="Cambria" charset="0"/>
+                        <a:ea typeface="Cambria" charset="0"/>
+                        <a:cs typeface="Cambria" charset="0"/>
+                      </a:endParaRPr>
+                    </a:p>
+                  </a:txBody>
+                  <a:tcPr marL="82296" marR="82296" marT="36576" marB="36576" anchor="ctr">
+                    <a:lnL w="6350" cap="flat" cmpd="sng" algn="ctr">
+                      <a:solidFill>
+                        <a:srgbClr val="D8DFE9"/>
+                      </a:solidFill>
+                      <a:prstDash val="solid"/>
+                      <a:round/>
+                      <a:headEnd type="none" w="med" len="med"/>
+                      <a:tailEnd type="none" w="med" len="med"/>
+                    </a:lnL>
+                    <a:lnR w="6350" cap="flat" cmpd="sng" algn="ctr">
+                      <a:solidFill>
+                        <a:srgbClr val="D8DFE9"/>
+                      </a:solidFill>
+                      <a:prstDash val="solid"/>
+                      <a:round/>
+                      <a:headEnd type="none" w="med" len="med"/>
+                      <a:tailEnd type="none" w="med" len="med"/>
+                    </a:lnR>
+                    <a:lnT w="6350" cap="flat" cmpd="sng" algn="ctr">
+                      <a:solidFill>
+                        <a:srgbClr val="D8DFE9"/>
+                      </a:solidFill>
+                      <a:prstDash val="solid"/>
+                      <a:round/>
+                      <a:headEnd type="none" w="med" len="med"/>
+                      <a:tailEnd type="none" w="med" len="med"/>
+                    </a:lnT>
+                    <a:lnB w="6350" cap="flat" cmpd="sng" algn="ctr">
+                      <a:solidFill>
+                        <a:srgbClr val="D8DFE9"/>
+                      </a:solidFill>
+                      <a:prstDash val="solid"/>
+                      <a:round/>
+                      <a:headEnd type="none" w="med" len="med"/>
+                      <a:tailEnd type="none" w="med" len="med"/>
+                    </a:lnB>
+                    <a:solidFill>
+                      <a:srgbClr val="FFFFFF"/>
+                    </a:solidFill>
+                  </a:tcPr>
+                </a:tc>
+                <a:tc>
+                  <a:txBody>
+                    <a:bodyPr/>
+                    <a:lstStyle/>
+                    <a:p>
+                      <a:pPr algn="l" indent="0" marL="0">
+                        <a:buNone/>
+                      </a:pPr>
+                      <a:r>
+                        <a:rPr lang="en-US" sz="1100" dirty="0">
+                          <a:solidFill>
+                            <a:srgbClr val="16233D"/>
+                          </a:solidFill>
+                          <a:latin typeface="Cambria" pitchFamily="34" charset="0"/>
+                          <a:ea typeface="Cambria" pitchFamily="34" charset="-122"/>
+                          <a:cs typeface="Cambria" pitchFamily="34" charset="-120"/>
+                        </a:rPr>
+                        <a:t>—</a:t>
+                      </a:r>
+                      <a:endParaRPr lang="en-US" sz="1100" dirty="0">
+                        <a:latin typeface="Cambria" charset="0"/>
+                        <a:ea typeface="Cambria" charset="0"/>
+                        <a:cs typeface="Cambria" charset="0"/>
+                      </a:endParaRPr>
+                    </a:p>
+                  </a:txBody>
+                  <a:tcPr marL="82296" marR="82296" marT="36576" marB="36576" anchor="ctr">
+                    <a:lnL w="6350" cap="flat" cmpd="sng" algn="ctr">
+                      <a:solidFill>
+                        <a:srgbClr val="D8DFE9"/>
+                      </a:solidFill>
+                      <a:prstDash val="solid"/>
+                      <a:round/>
+                      <a:headEnd type="none" w="med" len="med"/>
+                      <a:tailEnd type="none" w="med" len="med"/>
+                    </a:lnL>
+                    <a:lnR w="6350" cap="flat" cmpd="sng" algn="ctr">
+                      <a:solidFill>
+                        <a:srgbClr val="D8DFE9"/>
+                      </a:solidFill>
+                      <a:prstDash val="solid"/>
+                      <a:round/>
+                      <a:headEnd type="none" w="med" len="med"/>
+                      <a:tailEnd type="none" w="med" len="med"/>
+                    </a:lnR>
+                    <a:lnT w="6350" cap="flat" cmpd="sng" algn="ctr">
+                      <a:solidFill>
+                        <a:srgbClr val="D8DFE9"/>
+                      </a:solidFill>
+                      <a:prstDash val="solid"/>
+                      <a:round/>
+                      <a:headEnd type="none" w="med" len="med"/>
+                      <a:tailEnd type="none" w="med" len="med"/>
+                    </a:lnT>
+                    <a:lnB w="6350" cap="flat" cmpd="sng" algn="ctr">
+                      <a:solidFill>
+                        <a:srgbClr val="D8DFE9"/>
+                      </a:solidFill>
+                      <a:prstDash val="solid"/>
+                      <a:round/>
+                      <a:headEnd type="none" w="med" len="med"/>
+                      <a:tailEnd type="none" w="med" len="med"/>
+                    </a:lnB>
+                    <a:solidFill>
+                      <a:srgbClr val="FFFFFF"/>
+                    </a:solidFill>
+                  </a:tcPr>
+                </a:tc>
+                <a:tc>
+                  <a:txBody>
+                    <a:bodyPr/>
+                    <a:lstStyle/>
+                    <a:p>
+                      <a:pPr algn="l" indent="0" marL="0">
+                        <a:buNone/>
+                      </a:pPr>
+                      <a:r>
+                        <a:rPr lang="en-US" sz="1000" dirty="0">
+                          <a:solidFill>
+                            <a:srgbClr val="5A6B82"/>
+                          </a:solidFill>
+                          <a:latin typeface="Calibri" pitchFamily="34" charset="0"/>
+                          <a:ea typeface="Calibri" pitchFamily="34" charset="-122"/>
+                          <a:cs typeface="Calibri" pitchFamily="34" charset="-120"/>
+                        </a:rPr>
+                        <a:t>Half the leads, nothing out the other end</a:t>
+                      </a:r>
+                      <a:endParaRPr lang="en-US" sz="1000" dirty="0">
+                        <a:latin typeface="Calibri" charset="0"/>
+                        <a:ea typeface="Calibri" charset="0"/>
+                        <a:cs typeface="Calibri" charset="0"/>
+                      </a:endParaRPr>
+                    </a:p>
+                  </a:txBody>
+                  <a:tcPr marL="82296" marR="82296" marT="36576" marB="36576" anchor="ctr">
+                    <a:lnL w="6350" cap="flat" cmpd="sng" algn="ctr">
+                      <a:solidFill>
+                        <a:srgbClr val="D8DFE9"/>
+                      </a:solidFill>
+                      <a:prstDash val="solid"/>
+                      <a:round/>
+                      <a:headEnd type="none" w="med" len="med"/>
+                      <a:tailEnd type="none" w="med" len="med"/>
+                    </a:lnL>
+                    <a:lnR w="6350" cap="flat" cmpd="sng" algn="ctr">
+                      <a:solidFill>
+                        <a:srgbClr val="D8DFE9"/>
+                      </a:solidFill>
+                      <a:prstDash val="solid"/>
+                      <a:round/>
+                      <a:headEnd type="none" w="med" len="med"/>
+                      <a:tailEnd type="none" w="med" len="med"/>
+                    </a:lnR>
+                    <a:lnT w="6350" cap="flat" cmpd="sng" algn="ctr">
+                      <a:solidFill>
+                        <a:srgbClr val="D8DFE9"/>
+                      </a:solidFill>
+                      <a:prstDash val="solid"/>
+                      <a:round/>
+                      <a:headEnd type="none" w="med" len="med"/>
+                      <a:tailEnd type="none" w="med" len="med"/>
+                    </a:lnT>
+                    <a:lnB w="6350" cap="flat" cmpd="sng" algn="ctr">
+                      <a:solidFill>
+                        <a:srgbClr val="D8DFE9"/>
+                      </a:solidFill>
+                      <a:prstDash val="solid"/>
+                      <a:round/>
+                      <a:headEnd type="none" w="med" len="med"/>
+                      <a:tailEnd type="none" w="med" len="med"/>
+                    </a:lnB>
+                    <a:solidFill>
+                      <a:srgbClr val="FFFFFF"/>
+                    </a:solidFill>
+                  </a:tcPr>
+                </a:tc>
+              </a:tr>
+            </a:tbl>
+          </a:graphicData>
+        </a:graphic>
+      </p:graphicFrame>
+      <p:sp>
+        <p:nvSpPr>
+          <p:cNvPr id="17" name="Shape 14"/>
+          <p:cNvSpPr/>
+          <p:nvPr/>
+        </p:nvSpPr>
+        <p:spPr>
+          <a:xfrm>
+            <a:off x="548640" y="5138928"/>
+            <a:ext cx="11064240" cy="969264"/>
+          </a:xfrm>
+          <a:prstGeom prst="roundRect">
+            <a:avLst>
+              <a:gd name="adj" fmla="val 8491"/>
+            </a:avLst>
+          </a:prstGeom>
+          <a:solidFill>
+            <a:srgbClr val="0E1E3C"/>
+          </a:solidFill>
+          <a:ln/>
+        </p:spPr>
+      </p:sp>
+      <p:sp>
+        <p:nvSpPr>
+          <p:cNvPr id="18" name="Text 15"/>
+          <p:cNvSpPr/>
+          <p:nvPr/>
+        </p:nvSpPr>
+        <p:spPr>
+          <a:xfrm>
+            <a:off x="914400" y="5138928"/>
+            <a:ext cx="10332720" cy="969264"/>
+          </a:xfrm>
+          <a:prstGeom prst="rect">
+            <a:avLst/>
+          </a:prstGeom>
+          <a:noFill/>
+          <a:ln/>
+        </p:spPr>
+        <p:txBody>
+          <a:bodyPr wrap="square" lIns="0" tIns="0" rIns="0" bIns="0" rtlCol="0" anchor="ctr"/>
+          <a:lstStyle/>
+          <a:p>
+            <a:pPr indent="0" marL="0">
+              <a:buNone/>
+            </a:pPr>
+            <a:r>
+              <a:rPr lang="en-US" sz="1250" b="1" dirty="0">
+                <a:solidFill>
+                  <a:srgbClr val="5FD6BE"/>
+                </a:solidFill>
+                <a:latin typeface="Calibri" pitchFamily="34" charset="0"/>
+                <a:ea typeface="Calibri" pitchFamily="34" charset="-122"/>
+                <a:cs typeface="Calibri" pitchFamily="34" charset="-120"/>
+              </a:rPr>
+              <a:t>Loan carries all 0.1B of approved amount and all 0.1B of set credit</a:t>
+            </a:r>
+            <a:pPr indent="0" marL="0">
+              <a:buNone/>
+            </a:pPr>
+            <a:r>
+              <a:rPr lang="en-US" sz="1250" dirty="0">
+                <a:solidFill>
+                  <a:srgbClr val="C3D0E2"/>
+                </a:solidFill>
+                <a:latin typeface="Calibri" pitchFamily="34" charset="0"/>
+                <a:ea typeface="Calibri" pitchFamily="34" charset="-122"/>
+                <a:cs typeface="Calibri" pitchFamily="34" charset="-120"/>
+              </a:rPr>
+              <a:t> at 11.3K / 10.8K per customer. Deposit adds 5.5M of amount at 0.7K each but never enters approval. Service sends </a:t>
+            </a:r>
+            <a:pPr indent="0" marL="0">
+              <a:buNone/>
+            </a:pPr>
+            <a:r>
+              <a:rPr lang="en-US" sz="1250" b="1" dirty="0">
+                <a:solidFill>
+                  <a:srgbClr val="5FD6BE"/>
+                </a:solidFill>
+                <a:latin typeface="Calibri" pitchFamily="34" charset="0"/>
+                <a:ea typeface="Calibri" pitchFamily="34" charset="-122"/>
+                <a:cs typeface="Calibri" pitchFamily="34" charset="-120"/>
+              </a:rPr>
+              <a:t>79.6% of its clickers to a detail page</a:t>
+            </a:r>
+            <a:pPr indent="0" marL="0">
+              <a:buNone/>
+            </a:pPr>
+            <a:r>
+              <a:rPr lang="en-US" sz="1250" dirty="0">
+                <a:solidFill>
+                  <a:srgbClr val="C3D0E2"/>
+                </a:solidFill>
+                <a:latin typeface="Calibri" pitchFamily="34" charset="0"/>
+                <a:ea typeface="Calibri" pitchFamily="34" charset="-122"/>
+                <a:cs typeface="Calibri" pitchFamily="34" charset="-120"/>
+              </a:rPr>
+              <a:t> and 0.3K through a branch door — the only Thru-The-Door volume anywhere. Marketing produces none of it.</a:t>
+            </a:r>
+            <a:endParaRPr lang="en-US" sz="1250" dirty="0"/>
+          </a:p>
+        </p:txBody>
+      </p:sp>
+      <p:sp>
+        <p:nvSpPr>
+          <p:cNvPr id="19" name="Text 16"/>
+          <p:cNvSpPr/>
+          <p:nvPr/>
+        </p:nvSpPr>
+        <p:spPr>
+          <a:xfrm>
+            <a:off x="548640" y="6345936"/>
+            <a:ext cx="11064240" cy="292608"/>
+          </a:xfrm>
+          <a:prstGeom prst="rect">
+            <a:avLst/>
+          </a:prstGeom>
+          <a:noFill/>
+          <a:ln/>
+        </p:spPr>
+        <p:txBody>
+          <a:bodyPr wrap="square" lIns="0" tIns="0" rIns="0" bIns="0" rtlCol="0" anchor="ctr"/>
+          <a:lstStyle/>
+          <a:p>
+            <a:pPr indent="0" marL="0">
+              <a:buNone/>
+            </a:pPr>
+            <a:r>
+              <a:rPr lang="en-US" sz="950" i="1" dirty="0">
+                <a:solidFill>
+                  <a:srgbClr val="6B7A90"/>
+                </a:solidFill>
+                <a:latin typeface="Calibri" pitchFamily="34" charset="0"/>
+                <a:ea typeface="Calibri" pitchFamily="34" charset="-122"/>
+                <a:cs typeface="Calibri" pitchFamily="34" charset="-120"/>
+              </a:rPr>
+              <a:t>Strict View-and-Click criteria (the rest of this deck is the Loose all-groups view). Windows differ by group — Service spans 2 days, Loan 19, Marketing 45, Deposit 46 — so rates are not like-for-like. Administrative (3 campaigns, ~609.8K leads) not shown.</a:t>
+            </a:r>
+            <a:endParaRPr lang="en-US" sz="950" dirty="0"/>
+          </a:p>
+        </p:txBody>
+      </p:sp>
+    </p:spTree>
+  </p:cSld>
+  <p:clrMapOvr>
+    <a:masterClrMapping/>
+  </p:clrMapOvr>
+</p:sld>
+</file>
+
+<file path=ppt/slides/slide7.xml><?xml version="1.0" encoding="utf-8"?>
+<p:sld xmlns:a="http://schemas.openxmlformats.org/drawingml/2006/main" xmlns:r="http://schemas.openxmlformats.org/officeDocument/2006/relationships" xmlns:p="http://schemas.openxmlformats.org/presentationml/2006/main">
+  <p:cSld name="Slide 7">
+    <p:bg>
+      <p:bgPr>
+        <a:solidFill>
           <a:srgbClr val="0E1E3C"/>
         </a:solidFill>
       </p:bgPr>
@@ -12043,950 +17245,6 @@
                 <a:cs typeface="Calibri" pitchFamily="34" charset="-120"/>
               </a:rPr>
               <a:t>Dashboard prints approve amount and set credit amount both as 0.1B; the per-customer averages above give ~0.147B approved and ~0.105B set.</a:t>
-            </a:r>
-            <a:endParaRPr lang="en-US" sz="950" dirty="0"/>
-          </a:p>
-        </p:txBody>
-      </p:sp>
-    </p:spTree>
-  </p:cSld>
-  <p:clrMapOvr>
-    <a:masterClrMapping/>
-  </p:clrMapOvr>
-</p:sld>
-</file>
-
-<file path=ppt/slides/slide7.xml><?xml version="1.0" encoding="utf-8"?>
-<p:sld xmlns:a="http://schemas.openxmlformats.org/drawingml/2006/main" xmlns:r="http://schemas.openxmlformats.org/officeDocument/2006/relationships" xmlns:p="http://schemas.openxmlformats.org/presentationml/2006/main">
-  <p:cSld name="Slide 7">
-    <p:bg>
-      <p:bgPr>
-        <a:solidFill>
-          <a:srgbClr val="FFFFFF"/>
-        </a:solidFill>
-      </p:bgPr>
-    </p:bg>
-    <p:spTree>
-      <p:nvGrpSpPr>
-        <p:cNvPr id="1" name=""/>
-        <p:cNvGrpSpPr/>
-        <p:nvPr/>
-      </p:nvGrpSpPr>
-      <p:grpSpPr>
-        <a:xfrm>
-          <a:off x="0" y="0"/>
-          <a:ext cx="0" cy="0"/>
-          <a:chOff x="0" y="0"/>
-          <a:chExt cx="0" cy="0"/>
-        </a:xfrm>
-      </p:grpSpPr>
-      <p:sp>
-        <p:nvSpPr>
-          <p:cNvPr id="2" name="Text 0"/>
-          <p:cNvSpPr/>
-          <p:nvPr/>
-        </p:nvSpPr>
-        <p:spPr>
-          <a:xfrm>
-            <a:off x="548640" y="329184"/>
-            <a:ext cx="11064240" cy="237744"/>
-          </a:xfrm>
-          <a:prstGeom prst="rect">
-            <a:avLst/>
-          </a:prstGeom>
-          <a:noFill/>
-          <a:ln/>
-        </p:spPr>
-        <p:txBody>
-          <a:bodyPr wrap="square" lIns="0" tIns="0" rIns="0" bIns="0" rtlCol="0" anchor="ctr"/>
-          <a:lstStyle/>
-          <a:p>
-            <a:pPr indent="0" marL="0">
-              <a:buNone/>
-            </a:pPr>
-            <a:r>
-              <a:rPr lang="en-US" sz="1150" b="1" spc="220" kern="0" dirty="0">
-                <a:solidFill>
-                  <a:srgbClr val="00A896"/>
-                </a:solidFill>
-                <a:latin typeface="Calibri" pitchFamily="34" charset="0"/>
-                <a:ea typeface="Calibri" pitchFamily="34" charset="-122"/>
-                <a:cs typeface="Calibri" pitchFamily="34" charset="-120"/>
-              </a:rPr>
-              <a:t>DATA INTEGRITY</a:t>
-            </a:r>
-            <a:endParaRPr lang="en-US" sz="1150" dirty="0"/>
-          </a:p>
-        </p:txBody>
-      </p:sp>
-      <p:sp>
-        <p:nvSpPr>
-          <p:cNvPr id="3" name="Text 1"/>
-          <p:cNvSpPr/>
-          <p:nvPr/>
-        </p:nvSpPr>
-        <p:spPr>
-          <a:xfrm>
-            <a:off x="548640" y="603504"/>
-            <a:ext cx="11064240" cy="658368"/>
-          </a:xfrm>
-          <a:prstGeom prst="rect">
-            <a:avLst/>
-          </a:prstGeom>
-          <a:noFill/>
-          <a:ln/>
-        </p:spPr>
-        <p:txBody>
-          <a:bodyPr wrap="square" lIns="0" tIns="0" rIns="0" bIns="0" rtlCol="0" anchor="t"/>
-          <a:lstStyle/>
-          <a:p>
-            <a:pPr indent="0" marL="0">
-              <a:buNone/>
-            </a:pPr>
-            <a:r>
-              <a:rPr lang="en-US" sz="3200" b="1" dirty="0">
-                <a:solidFill>
-                  <a:srgbClr val="16233D"/>
-                </a:solidFill>
-                <a:latin typeface="Cambria" pitchFamily="34" charset="0"/>
-                <a:ea typeface="Cambria" pitchFamily="34" charset="-122"/>
-                <a:cs typeface="Cambria" pitchFamily="34" charset="-120"/>
-              </a:rPr>
-              <a:t>Fix these five before acting on the numbers</a:t>
-            </a:r>
-            <a:endParaRPr lang="en-US" sz="3200" dirty="0"/>
-          </a:p>
-        </p:txBody>
-      </p:sp>
-      <p:sp>
-        <p:nvSpPr>
-          <p:cNvPr id="4" name="Shape 2"/>
-          <p:cNvSpPr/>
-          <p:nvPr/>
-        </p:nvSpPr>
-        <p:spPr>
-          <a:xfrm>
-            <a:off x="548640" y="1463040"/>
-            <a:ext cx="3529584" cy="2121408"/>
-          </a:xfrm>
-          <a:prstGeom prst="roundRect">
-            <a:avLst>
-              <a:gd name="adj" fmla="val 3879"/>
-            </a:avLst>
-          </a:prstGeom>
-          <a:solidFill>
-            <a:srgbClr val="F1F4F9"/>
-          </a:solidFill>
-          <a:ln/>
-        </p:spPr>
-      </p:sp>
-      <p:sp>
-        <p:nvSpPr>
-          <p:cNvPr id="5" name="Shape 3"/>
-          <p:cNvSpPr/>
-          <p:nvPr/>
-        </p:nvSpPr>
-        <p:spPr>
-          <a:xfrm>
-            <a:off x="822960" y="1700784"/>
-            <a:ext cx="457200" cy="457200"/>
-          </a:xfrm>
-          <a:prstGeom prst="ellipse">
-            <a:avLst/>
-          </a:prstGeom>
-          <a:solidFill>
-            <a:srgbClr val="D9503F"/>
-          </a:solidFill>
-          <a:ln/>
-        </p:spPr>
-      </p:sp>
-      <p:sp>
-        <p:nvSpPr>
-          <p:cNvPr id="6" name="Text 4"/>
-          <p:cNvSpPr/>
-          <p:nvPr/>
-        </p:nvSpPr>
-        <p:spPr>
-          <a:xfrm>
-            <a:off x="822960" y="1700784"/>
-            <a:ext cx="457200" cy="457200"/>
-          </a:xfrm>
-          <a:prstGeom prst="rect">
-            <a:avLst/>
-          </a:prstGeom>
-          <a:noFill/>
-          <a:ln/>
-        </p:spPr>
-        <p:txBody>
-          <a:bodyPr wrap="square" lIns="0" tIns="0" rIns="0" bIns="0" rtlCol="0" anchor="ctr"/>
-          <a:lstStyle/>
-          <a:p>
-            <a:pPr algn="ctr" indent="0" marL="0">
-              <a:buNone/>
-            </a:pPr>
-            <a:r>
-              <a:rPr lang="en-US" sz="1500" b="1" dirty="0">
-                <a:solidFill>
-                  <a:srgbClr val="FFFFFF"/>
-                </a:solidFill>
-                <a:latin typeface="Cambria" pitchFamily="34" charset="0"/>
-                <a:ea typeface="Cambria" pitchFamily="34" charset="-122"/>
-                <a:cs typeface="Cambria" pitchFamily="34" charset="-120"/>
-              </a:rPr>
-              <a:t>!</a:t>
-            </a:r>
-            <a:endParaRPr lang="en-US" sz="1500" dirty="0"/>
-          </a:p>
-        </p:txBody>
-      </p:sp>
-      <p:sp>
-        <p:nvSpPr>
-          <p:cNvPr id="7" name="Text 5"/>
-          <p:cNvSpPr/>
-          <p:nvPr/>
-        </p:nvSpPr>
-        <p:spPr>
-          <a:xfrm>
-            <a:off x="822960" y="2286000"/>
-            <a:ext cx="2980944" cy="566928"/>
-          </a:xfrm>
-          <a:prstGeom prst="rect">
-            <a:avLst/>
-          </a:prstGeom>
-          <a:noFill/>
-          <a:ln/>
-        </p:spPr>
-        <p:txBody>
-          <a:bodyPr wrap="square" lIns="0" tIns="0" rIns="0" bIns="0" rtlCol="0" anchor="t"/>
-          <a:lstStyle/>
-          <a:p>
-            <a:pPr indent="0" marL="0">
-              <a:buNone/>
-            </a:pPr>
-            <a:r>
-              <a:rPr lang="en-US" sz="1400" b="1" dirty="0">
-                <a:solidFill>
-                  <a:srgbClr val="16233D"/>
-                </a:solidFill>
-                <a:latin typeface="Cambria" pitchFamily="34" charset="0"/>
-                <a:ea typeface="Cambria" pitchFamily="34" charset="-122"/>
-                <a:cs typeface="Cambria" pitchFamily="34" charset="-120"/>
-              </a:rPr>
-              <a:t>Conversions exceed detail-page views</a:t>
-            </a:r>
-            <a:endParaRPr lang="en-US" sz="1400" dirty="0"/>
-          </a:p>
-        </p:txBody>
-      </p:sp>
-      <p:sp>
-        <p:nvSpPr>
-          <p:cNvPr id="8" name="Text 6"/>
-          <p:cNvSpPr/>
-          <p:nvPr/>
-        </p:nvSpPr>
-        <p:spPr>
-          <a:xfrm>
-            <a:off x="822960" y="2834640"/>
-            <a:ext cx="2980944" cy="658368"/>
-          </a:xfrm>
-          <a:prstGeom prst="rect">
-            <a:avLst/>
-          </a:prstGeom>
-          <a:noFill/>
-          <a:ln/>
-        </p:spPr>
-        <p:txBody>
-          <a:bodyPr wrap="square" lIns="0" tIns="0" rIns="0" bIns="0" rtlCol="0" anchor="ctr"/>
-          <a:lstStyle/>
-          <a:p>
-            <a:pPr indent="0" marL="0">
-              <a:buNone/>
-            </a:pPr>
-            <a:r>
-              <a:rPr lang="en-US" sz="1050" dirty="0">
-                <a:solidFill>
-                  <a:srgbClr val="44536B"/>
-                </a:solidFill>
-                <a:latin typeface="Calibri" pitchFamily="34" charset="0"/>
-                <a:ea typeface="Calibri" pitchFamily="34" charset="-122"/>
-                <a:cs typeface="Calibri" pitchFamily="34" charset="-120"/>
-              </a:rPr>
-              <a:t>38.7K conversions against 31.7K detail-page views. In a strict click-path funnel that cannot happen — a Loose Criteria attribution artefact.</a:t>
-            </a:r>
-            <a:endParaRPr lang="en-US" sz="1050" dirty="0"/>
-          </a:p>
-        </p:txBody>
-      </p:sp>
-      <p:sp>
-        <p:nvSpPr>
-          <p:cNvPr id="9" name="Shape 7"/>
-          <p:cNvSpPr/>
-          <p:nvPr/>
-        </p:nvSpPr>
-        <p:spPr>
-          <a:xfrm>
-            <a:off x="4270248" y="1463040"/>
-            <a:ext cx="3529584" cy="2121408"/>
-          </a:xfrm>
-          <a:prstGeom prst="roundRect">
-            <a:avLst>
-              <a:gd name="adj" fmla="val 3879"/>
-            </a:avLst>
-          </a:prstGeom>
-          <a:solidFill>
-            <a:srgbClr val="F1F4F9"/>
-          </a:solidFill>
-          <a:ln/>
-        </p:spPr>
-      </p:sp>
-      <p:sp>
-        <p:nvSpPr>
-          <p:cNvPr id="10" name="Shape 8"/>
-          <p:cNvSpPr/>
-          <p:nvPr/>
-        </p:nvSpPr>
-        <p:spPr>
-          <a:xfrm>
-            <a:off x="4544568" y="1700784"/>
-            <a:ext cx="457200" cy="457200"/>
-          </a:xfrm>
-          <a:prstGeom prst="ellipse">
-            <a:avLst/>
-          </a:prstGeom>
-          <a:solidFill>
-            <a:srgbClr val="D9503F"/>
-          </a:solidFill>
-          <a:ln/>
-        </p:spPr>
-      </p:sp>
-      <p:sp>
-        <p:nvSpPr>
-          <p:cNvPr id="11" name="Text 9"/>
-          <p:cNvSpPr/>
-          <p:nvPr/>
-        </p:nvSpPr>
-        <p:spPr>
-          <a:xfrm>
-            <a:off x="4544568" y="1700784"/>
-            <a:ext cx="457200" cy="457200"/>
-          </a:xfrm>
-          <a:prstGeom prst="rect">
-            <a:avLst/>
-          </a:prstGeom>
-          <a:noFill/>
-          <a:ln/>
-        </p:spPr>
-        <p:txBody>
-          <a:bodyPr wrap="square" lIns="0" tIns="0" rIns="0" bIns="0" rtlCol="0" anchor="ctr"/>
-          <a:lstStyle/>
-          <a:p>
-            <a:pPr algn="ctr" indent="0" marL="0">
-              <a:buNone/>
-            </a:pPr>
-            <a:r>
-              <a:rPr lang="en-US" sz="1500" b="1" dirty="0">
-                <a:solidFill>
-                  <a:srgbClr val="FFFFFF"/>
-                </a:solidFill>
-                <a:latin typeface="Cambria" pitchFamily="34" charset="0"/>
-                <a:ea typeface="Cambria" pitchFamily="34" charset="-122"/>
-                <a:cs typeface="Cambria" pitchFamily="34" charset="-120"/>
-              </a:rPr>
-              <a:t>!</a:t>
-            </a:r>
-            <a:endParaRPr lang="en-US" sz="1500" dirty="0"/>
-          </a:p>
-        </p:txBody>
-      </p:sp>
-      <p:sp>
-        <p:nvSpPr>
-          <p:cNvPr id="12" name="Text 10"/>
-          <p:cNvSpPr/>
-          <p:nvPr/>
-        </p:nvSpPr>
-        <p:spPr>
-          <a:xfrm>
-            <a:off x="4544568" y="2286000"/>
-            <a:ext cx="2980944" cy="566928"/>
-          </a:xfrm>
-          <a:prstGeom prst="rect">
-            <a:avLst/>
-          </a:prstGeom>
-          <a:noFill/>
-          <a:ln/>
-        </p:spPr>
-        <p:txBody>
-          <a:bodyPr wrap="square" lIns="0" tIns="0" rIns="0" bIns="0" rtlCol="0" anchor="t"/>
-          <a:lstStyle/>
-          <a:p>
-            <a:pPr indent="0" marL="0">
-              <a:buNone/>
-            </a:pPr>
-            <a:r>
-              <a:rPr lang="en-US" sz="1400" b="1" dirty="0">
-                <a:solidFill>
-                  <a:srgbClr val="16233D"/>
-                </a:solidFill>
-                <a:latin typeface="Cambria" pitchFamily="34" charset="0"/>
-                <a:ea typeface="Cambria" pitchFamily="34" charset="-122"/>
-                <a:cs typeface="Cambria" pitchFamily="34" charset="-120"/>
-              </a:rPr>
-              <a:t>App-in is identical to conversion</a:t>
-            </a:r>
-            <a:endParaRPr lang="en-US" sz="1400" dirty="0"/>
-          </a:p>
-        </p:txBody>
-      </p:sp>
-      <p:sp>
-        <p:nvSpPr>
-          <p:cNvPr id="13" name="Text 11"/>
-          <p:cNvSpPr/>
-          <p:nvPr/>
-        </p:nvSpPr>
-        <p:spPr>
-          <a:xfrm>
-            <a:off x="4544568" y="2834640"/>
-            <a:ext cx="2980944" cy="658368"/>
-          </a:xfrm>
-          <a:prstGeom prst="rect">
-            <a:avLst/>
-          </a:prstGeom>
-          <a:noFill/>
-          <a:ln/>
-        </p:spPr>
-        <p:txBody>
-          <a:bodyPr wrap="square" lIns="0" tIns="0" rIns="0" bIns="0" rtlCol="0" anchor="ctr"/>
-          <a:lstStyle/>
-          <a:p>
-            <a:pPr indent="0" marL="0">
-              <a:buNone/>
-            </a:pPr>
-            <a:r>
-              <a:rPr lang="en-US" sz="1050" dirty="0">
-                <a:solidFill>
-                  <a:srgbClr val="44536B"/>
-                </a:solidFill>
-                <a:latin typeface="Calibri" pitchFamily="34" charset="0"/>
-                <a:ea typeface="Calibri" pitchFamily="34" charset="-122"/>
-                <a:cs typeface="Calibri" pitchFamily="34" charset="-120"/>
-              </a:rPr>
-              <a:t>Both read 38.7K at exactly 30.5% of clicks. The two columns look like one event under two names; confirm the definitions.</a:t>
-            </a:r>
-            <a:endParaRPr lang="en-US" sz="1050" dirty="0"/>
-          </a:p>
-        </p:txBody>
-      </p:sp>
-      <p:sp>
-        <p:nvSpPr>
-          <p:cNvPr id="14" name="Shape 12"/>
-          <p:cNvSpPr/>
-          <p:nvPr/>
-        </p:nvSpPr>
-        <p:spPr>
-          <a:xfrm>
-            <a:off x="7991856" y="1463040"/>
-            <a:ext cx="3529584" cy="2121408"/>
-          </a:xfrm>
-          <a:prstGeom prst="roundRect">
-            <a:avLst>
-              <a:gd name="adj" fmla="val 3879"/>
-            </a:avLst>
-          </a:prstGeom>
-          <a:solidFill>
-            <a:srgbClr val="F1F4F9"/>
-          </a:solidFill>
-          <a:ln/>
-        </p:spPr>
-      </p:sp>
-      <p:sp>
-        <p:nvSpPr>
-          <p:cNvPr id="15" name="Shape 13"/>
-          <p:cNvSpPr/>
-          <p:nvPr/>
-        </p:nvSpPr>
-        <p:spPr>
-          <a:xfrm>
-            <a:off x="8266176" y="1700784"/>
-            <a:ext cx="457200" cy="457200"/>
-          </a:xfrm>
-          <a:prstGeom prst="ellipse">
-            <a:avLst/>
-          </a:prstGeom>
-          <a:solidFill>
-            <a:srgbClr val="D9503F"/>
-          </a:solidFill>
-          <a:ln/>
-        </p:spPr>
-      </p:sp>
-      <p:sp>
-        <p:nvSpPr>
-          <p:cNvPr id="16" name="Text 14"/>
-          <p:cNvSpPr/>
-          <p:nvPr/>
-        </p:nvSpPr>
-        <p:spPr>
-          <a:xfrm>
-            <a:off x="8266176" y="1700784"/>
-            <a:ext cx="457200" cy="457200"/>
-          </a:xfrm>
-          <a:prstGeom prst="rect">
-            <a:avLst/>
-          </a:prstGeom>
-          <a:noFill/>
-          <a:ln/>
-        </p:spPr>
-        <p:txBody>
-          <a:bodyPr wrap="square" lIns="0" tIns="0" rIns="0" bIns="0" rtlCol="0" anchor="ctr"/>
-          <a:lstStyle/>
-          <a:p>
-            <a:pPr algn="ctr" indent="0" marL="0">
-              <a:buNone/>
-            </a:pPr>
-            <a:r>
-              <a:rPr lang="en-US" sz="1500" b="1" dirty="0">
-                <a:solidFill>
-                  <a:srgbClr val="FFFFFF"/>
-                </a:solidFill>
-                <a:latin typeface="Cambria" pitchFamily="34" charset="0"/>
-                <a:ea typeface="Cambria" pitchFamily="34" charset="-122"/>
-                <a:cs typeface="Cambria" pitchFamily="34" charset="-120"/>
-              </a:rPr>
-              <a:t>!</a:t>
-            </a:r>
-            <a:endParaRPr lang="en-US" sz="1500" dirty="0"/>
-          </a:p>
-        </p:txBody>
-      </p:sp>
-      <p:sp>
-        <p:nvSpPr>
-          <p:cNvPr id="17" name="Text 15"/>
-          <p:cNvSpPr/>
-          <p:nvPr/>
-        </p:nvSpPr>
-        <p:spPr>
-          <a:xfrm>
-            <a:off x="8266176" y="2286000"/>
-            <a:ext cx="2980944" cy="566928"/>
-          </a:xfrm>
-          <a:prstGeom prst="rect">
-            <a:avLst/>
-          </a:prstGeom>
-          <a:noFill/>
-          <a:ln/>
-        </p:spPr>
-        <p:txBody>
-          <a:bodyPr wrap="square" lIns="0" tIns="0" rIns="0" bIns="0" rtlCol="0" anchor="t"/>
-          <a:lstStyle/>
-          <a:p>
-            <a:pPr indent="0" marL="0">
-              <a:buNone/>
-            </a:pPr>
-            <a:r>
-              <a:rPr lang="en-US" sz="1400" b="1" dirty="0">
-                <a:solidFill>
-                  <a:srgbClr val="16233D"/>
-                </a:solidFill>
-                <a:latin typeface="Cambria" pitchFamily="34" charset="0"/>
-                <a:ea typeface="Cambria" pitchFamily="34" charset="-122"/>
-                <a:cs typeface="Cambria" pitchFamily="34" charset="-120"/>
-              </a:rPr>
-              <a:t>App-in amount is empty</a:t>
-            </a:r>
-            <a:endParaRPr lang="en-US" sz="1400" dirty="0"/>
-          </a:p>
-        </p:txBody>
-      </p:sp>
-      <p:sp>
-        <p:nvSpPr>
-          <p:cNvPr id="18" name="Text 16"/>
-          <p:cNvSpPr/>
-          <p:nvPr/>
-        </p:nvSpPr>
-        <p:spPr>
-          <a:xfrm>
-            <a:off x="8266176" y="2834640"/>
-            <a:ext cx="2980944" cy="658368"/>
-          </a:xfrm>
-          <a:prstGeom prst="rect">
-            <a:avLst/>
-          </a:prstGeom>
-          <a:noFill/>
-          <a:ln/>
-        </p:spPr>
-        <p:txBody>
-          <a:bodyPr wrap="square" lIns="0" tIns="0" rIns="0" bIns="0" rtlCol="0" anchor="ctr"/>
-          <a:lstStyle/>
-          <a:p>
-            <a:pPr indent="0" marL="0">
-              <a:buNone/>
-            </a:pPr>
-            <a:r>
-              <a:rPr lang="en-US" sz="1050" dirty="0">
-                <a:solidFill>
-                  <a:srgbClr val="44536B"/>
-                </a:solidFill>
-                <a:latin typeface="Calibri" pitchFamily="34" charset="0"/>
-                <a:ea typeface="Calibri" pitchFamily="34" charset="-122"/>
-                <a:cs typeface="Calibri" pitchFamily="34" charset="-120"/>
-              </a:rPr>
-              <a:t>Reads 0.0B while approve amount reads 0.1B. Approved value cannot exceed applied value — amount is not being captured at application.</a:t>
-            </a:r>
-            <a:endParaRPr lang="en-US" sz="1050" dirty="0"/>
-          </a:p>
-        </p:txBody>
-      </p:sp>
-      <p:sp>
-        <p:nvSpPr>
-          <p:cNvPr id="19" name="Shape 17"/>
-          <p:cNvSpPr/>
-          <p:nvPr/>
-        </p:nvSpPr>
-        <p:spPr>
-          <a:xfrm>
-            <a:off x="548640" y="3767328"/>
-            <a:ext cx="5468112" cy="1755648"/>
-          </a:xfrm>
-          <a:prstGeom prst="roundRect">
-            <a:avLst>
-              <a:gd name="adj" fmla="val 4688"/>
-            </a:avLst>
-          </a:prstGeom>
-          <a:solidFill>
-            <a:srgbClr val="FBF0E6"/>
-          </a:solidFill>
-          <a:ln/>
-        </p:spPr>
-      </p:sp>
-      <p:sp>
-        <p:nvSpPr>
-          <p:cNvPr id="20" name="Shape 18"/>
-          <p:cNvSpPr/>
-          <p:nvPr/>
-        </p:nvSpPr>
-        <p:spPr>
-          <a:xfrm>
-            <a:off x="841248" y="4005072"/>
-            <a:ext cx="457200" cy="457200"/>
-          </a:xfrm>
-          <a:prstGeom prst="ellipse">
-            <a:avLst/>
-          </a:prstGeom>
-          <a:solidFill>
-            <a:srgbClr val="E9A03B"/>
-          </a:solidFill>
-          <a:ln/>
-        </p:spPr>
-      </p:sp>
-      <p:sp>
-        <p:nvSpPr>
-          <p:cNvPr id="21" name="Text 19"/>
-          <p:cNvSpPr/>
-          <p:nvPr/>
-        </p:nvSpPr>
-        <p:spPr>
-          <a:xfrm>
-            <a:off x="841248" y="4005072"/>
-            <a:ext cx="457200" cy="457200"/>
-          </a:xfrm>
-          <a:prstGeom prst="rect">
-            <a:avLst/>
-          </a:prstGeom>
-          <a:noFill/>
-          <a:ln/>
-        </p:spPr>
-        <p:txBody>
-          <a:bodyPr wrap="square" lIns="0" tIns="0" rIns="0" bIns="0" rtlCol="0" anchor="ctr"/>
-          <a:lstStyle/>
-          <a:p>
-            <a:pPr algn="ctr" indent="0" marL="0">
-              <a:buNone/>
-            </a:pPr>
-            <a:r>
-              <a:rPr lang="en-US" sz="1500" b="1" dirty="0">
-                <a:solidFill>
-                  <a:srgbClr val="FFFFFF"/>
-                </a:solidFill>
-                <a:latin typeface="Cambria" pitchFamily="34" charset="0"/>
-                <a:ea typeface="Cambria" pitchFamily="34" charset="-122"/>
-                <a:cs typeface="Cambria" pitchFamily="34" charset="-120"/>
-              </a:rPr>
-              <a:t>!</a:t>
-            </a:r>
-            <a:endParaRPr lang="en-US" sz="1500" dirty="0"/>
-          </a:p>
-        </p:txBody>
-      </p:sp>
-      <p:sp>
-        <p:nvSpPr>
-          <p:cNvPr id="22" name="Text 20"/>
-          <p:cNvSpPr/>
-          <p:nvPr/>
-        </p:nvSpPr>
-        <p:spPr>
-          <a:xfrm>
-            <a:off x="1463040" y="4005072"/>
-            <a:ext cx="4261104" cy="457200"/>
-          </a:xfrm>
-          <a:prstGeom prst="rect">
-            <a:avLst/>
-          </a:prstGeom>
-          <a:noFill/>
-          <a:ln/>
-        </p:spPr>
-        <p:txBody>
-          <a:bodyPr wrap="square" lIns="0" tIns="0" rIns="0" bIns="0" rtlCol="0" anchor="ctr"/>
-          <a:lstStyle/>
-          <a:p>
-            <a:pPr indent="0" marL="0">
-              <a:buNone/>
-            </a:pPr>
-            <a:r>
-              <a:rPr lang="en-US" sz="1400" b="1" dirty="0">
-                <a:solidFill>
-                  <a:srgbClr val="16233D"/>
-                </a:solidFill>
-                <a:latin typeface="Cambria" pitchFamily="34" charset="0"/>
-                <a:ea typeface="Cambria" pitchFamily="34" charset="-122"/>
-                <a:cs typeface="Cambria" pitchFamily="34" charset="-120"/>
-              </a:rPr>
-              <a:t>Thru-The-Door is effectively unmeasured</a:t>
-            </a:r>
-            <a:endParaRPr lang="en-US" sz="1400" dirty="0"/>
-          </a:p>
-        </p:txBody>
-      </p:sp>
-      <p:sp>
-        <p:nvSpPr>
-          <p:cNvPr id="23" name="Text 21"/>
-          <p:cNvSpPr/>
-          <p:nvPr/>
-        </p:nvSpPr>
-        <p:spPr>
-          <a:xfrm>
-            <a:off x="841248" y="4553712"/>
-            <a:ext cx="4882896" cy="1115568"/>
-          </a:xfrm>
-          <a:prstGeom prst="rect">
-            <a:avLst/>
-          </a:prstGeom>
-          <a:noFill/>
-          <a:ln/>
-        </p:spPr>
-        <p:txBody>
-          <a:bodyPr wrap="square" lIns="0" tIns="0" rIns="0" bIns="0" rtlCol="0" anchor="t"/>
-          <a:lstStyle/>
-          <a:p>
-            <a:pPr indent="0" marL="0">
-              <a:buNone/>
-            </a:pPr>
-            <a:r>
-              <a:rPr lang="en-US" sz="1100" dirty="0">
-                <a:solidFill>
-                  <a:srgbClr val="44536B"/>
-                </a:solidFill>
-                <a:latin typeface="Calibri" pitchFamily="34" charset="0"/>
-                <a:ea typeface="Calibri" pitchFamily="34" charset="-122"/>
-                <a:cs typeface="Calibri" pitchFamily="34" charset="-120"/>
-              </a:rPr>
-              <a:t>TTD1 at 0.3K (0.2% of clicks) and TTD2 at 0.0K. Either the offline/branch journey is not instrumented, or the columns should be retired.</a:t>
-            </a:r>
-            <a:endParaRPr lang="en-US" sz="1100" dirty="0"/>
-          </a:p>
-        </p:txBody>
-      </p:sp>
-      <p:sp>
-        <p:nvSpPr>
-          <p:cNvPr id="24" name="Shape 22"/>
-          <p:cNvSpPr/>
-          <p:nvPr/>
-        </p:nvSpPr>
-        <p:spPr>
-          <a:xfrm>
-            <a:off x="6208776" y="3767328"/>
-            <a:ext cx="5468112" cy="1755648"/>
-          </a:xfrm>
-          <a:prstGeom prst="roundRect">
-            <a:avLst>
-              <a:gd name="adj" fmla="val 4688"/>
-            </a:avLst>
-          </a:prstGeom>
-          <a:solidFill>
-            <a:srgbClr val="FBF0E6"/>
-          </a:solidFill>
-          <a:ln/>
-        </p:spPr>
-      </p:sp>
-      <p:sp>
-        <p:nvSpPr>
-          <p:cNvPr id="25" name="Shape 23"/>
-          <p:cNvSpPr/>
-          <p:nvPr/>
-        </p:nvSpPr>
-        <p:spPr>
-          <a:xfrm>
-            <a:off x="6501384" y="4005072"/>
-            <a:ext cx="457200" cy="457200"/>
-          </a:xfrm>
-          <a:prstGeom prst="ellipse">
-            <a:avLst/>
-          </a:prstGeom>
-          <a:solidFill>
-            <a:srgbClr val="E9A03B"/>
-          </a:solidFill>
-          <a:ln/>
-        </p:spPr>
-      </p:sp>
-      <p:sp>
-        <p:nvSpPr>
-          <p:cNvPr id="26" name="Text 24"/>
-          <p:cNvSpPr/>
-          <p:nvPr/>
-        </p:nvSpPr>
-        <p:spPr>
-          <a:xfrm>
-            <a:off x="6501384" y="4005072"/>
-            <a:ext cx="457200" cy="457200"/>
-          </a:xfrm>
-          <a:prstGeom prst="rect">
-            <a:avLst/>
-          </a:prstGeom>
-          <a:noFill/>
-          <a:ln/>
-        </p:spPr>
-        <p:txBody>
-          <a:bodyPr wrap="square" lIns="0" tIns="0" rIns="0" bIns="0" rtlCol="0" anchor="ctr"/>
-          <a:lstStyle/>
-          <a:p>
-            <a:pPr algn="ctr" indent="0" marL="0">
-              <a:buNone/>
-            </a:pPr>
-            <a:r>
-              <a:rPr lang="en-US" sz="1500" b="1" dirty="0">
-                <a:solidFill>
-                  <a:srgbClr val="FFFFFF"/>
-                </a:solidFill>
-                <a:latin typeface="Cambria" pitchFamily="34" charset="0"/>
-                <a:ea typeface="Cambria" pitchFamily="34" charset="-122"/>
-                <a:cs typeface="Cambria" pitchFamily="34" charset="-120"/>
-              </a:rPr>
-              <a:t>!</a:t>
-            </a:r>
-            <a:endParaRPr lang="en-US" sz="1500" dirty="0"/>
-          </a:p>
-        </p:txBody>
-      </p:sp>
-      <p:sp>
-        <p:nvSpPr>
-          <p:cNvPr id="27" name="Text 25"/>
-          <p:cNvSpPr/>
-          <p:nvPr/>
-        </p:nvSpPr>
-        <p:spPr>
-          <a:xfrm>
-            <a:off x="7123176" y="4005072"/>
-            <a:ext cx="4261104" cy="457200"/>
-          </a:xfrm>
-          <a:prstGeom prst="rect">
-            <a:avLst/>
-          </a:prstGeom>
-          <a:noFill/>
-          <a:ln/>
-        </p:spPr>
-        <p:txBody>
-          <a:bodyPr wrap="square" lIns="0" tIns="0" rIns="0" bIns="0" rtlCol="0" anchor="ctr"/>
-          <a:lstStyle/>
-          <a:p>
-            <a:pPr indent="0" marL="0">
-              <a:buNone/>
-            </a:pPr>
-            <a:r>
-              <a:rPr lang="en-US" sz="1400" b="1" dirty="0">
-                <a:solidFill>
-                  <a:srgbClr val="16233D"/>
-                </a:solidFill>
-                <a:latin typeface="Cambria" pitchFamily="34" charset="0"/>
-                <a:ea typeface="Cambria" pitchFamily="34" charset="-122"/>
-                <a:cs typeface="Cambria" pitchFamily="34" charset="-120"/>
-              </a:rPr>
-              <a:t>Loose vs Strict criteria not pinned</a:t>
-            </a:r>
-            <a:endParaRPr lang="en-US" sz="1400" dirty="0"/>
-          </a:p>
-        </p:txBody>
-      </p:sp>
-      <p:sp>
-        <p:nvSpPr>
-          <p:cNvPr id="28" name="Text 26"/>
-          <p:cNvSpPr/>
-          <p:nvPr/>
-        </p:nvSpPr>
-        <p:spPr>
-          <a:xfrm>
-            <a:off x="6501384" y="4553712"/>
-            <a:ext cx="4882896" cy="1115568"/>
-          </a:xfrm>
-          <a:prstGeom prst="rect">
-            <a:avLst/>
-          </a:prstGeom>
-          <a:noFill/>
-          <a:ln/>
-        </p:spPr>
-        <p:txBody>
-          <a:bodyPr wrap="square" lIns="0" tIns="0" rIns="0" bIns="0" rtlCol="0" anchor="t"/>
-          <a:lstStyle/>
-          <a:p>
-            <a:pPr indent="0" marL="0">
-              <a:buNone/>
-            </a:pPr>
-            <a:r>
-              <a:rPr lang="en-US" sz="1100" dirty="0">
-                <a:solidFill>
-                  <a:srgbClr val="44536B"/>
-                </a:solidFill>
-                <a:latin typeface="Calibri" pitchFamily="34" charset="0"/>
-                <a:ea typeface="Calibri" pitchFamily="34" charset="-122"/>
-                <a:cs typeface="Calibri" pitchFamily="34" charset="-120"/>
-              </a:rPr>
-              <a:t>The dashboard itself warns that Loose Criteria can push response rates above 100%. Every rate in this deck should be re-baselined on Strict View-and-Click.</a:t>
-            </a:r>
-            <a:endParaRPr lang="en-US" sz="1100" dirty="0"/>
-          </a:p>
-        </p:txBody>
-      </p:sp>
-      <p:sp>
-        <p:nvSpPr>
-          <p:cNvPr id="29" name="Text 27"/>
-          <p:cNvSpPr/>
-          <p:nvPr/>
-        </p:nvSpPr>
-        <p:spPr>
-          <a:xfrm>
-            <a:off x="548640" y="6345936"/>
-            <a:ext cx="11064240" cy="292608"/>
-          </a:xfrm>
-          <a:prstGeom prst="rect">
-            <a:avLst/>
-          </a:prstGeom>
-          <a:noFill/>
-          <a:ln/>
-        </p:spPr>
-        <p:txBody>
-          <a:bodyPr wrap="square" lIns="0" tIns="0" rIns="0" bIns="0" rtlCol="0" anchor="ctr"/>
-          <a:lstStyle/>
-          <a:p>
-            <a:pPr indent="0" marL="0">
-              <a:buNone/>
-            </a:pPr>
-            <a:r>
-              <a:rPr lang="en-US" sz="950" i="1" dirty="0">
-                <a:solidFill>
-                  <a:srgbClr val="6B7A90"/>
-                </a:solidFill>
-                <a:latin typeface="Calibri" pitchFamily="34" charset="0"/>
-                <a:ea typeface="Calibri" pitchFamily="34" charset="-122"/>
-                <a:cs typeface="Calibri" pitchFamily="34" charset="-120"/>
-              </a:rPr>
-              <a:t>None of these invalidate the direction of the findings — the top-funnel gap is far too large to be a measurement artefact — but they do move the exact rates.</a:t>
             </a:r>
             <a:endParaRPr lang="en-US" sz="950" dirty="0"/>
           </a:p>
@@ -13057,7 +17315,7 @@
                 <a:ea typeface="Calibri" pitchFamily="34" charset="-122"/>
                 <a:cs typeface="Calibri" pitchFamily="34" charset="-120"/>
               </a:rPr>
-              <a:t>SIZING THE PRIZE</a:t>
+              <a:t>DATA INTEGRITY</a:t>
             </a:r>
             <a:endParaRPr lang="en-US" sz="1150" dirty="0"/>
           </a:p>
@@ -13096,42 +17354,26 @@
                 <a:ea typeface="Cambria" pitchFamily="34" charset="-122"/>
                 <a:cs typeface="Cambria" pitchFamily="34" charset="-120"/>
               </a:rPr>
-              <a:t>Three levers, 6.3K incremental bookings</a:t>
+              <a:t>Fix these five before acting on the numbers</a:t>
             </a:r>
             <a:endParaRPr lang="en-US" sz="3200" dirty="0"/>
           </a:p>
         </p:txBody>
       </p:sp>
-      <p:graphicFrame>
-        <p:nvGraphicFramePr>
-          <p:cNvPr id="4" name="Chart 0" descr=""/>
-          <p:cNvGraphicFramePr/>
-          <p:nvPr/>
-        </p:nvGraphicFramePr>
-        <p:xfrm>
-          <a:off x="457200" y="1389888"/>
-          <a:ext cx="7086600" cy="4160520"/>
-        </p:xfrm>
-        <a:graphic xmlns:a="http://schemas.openxmlformats.org/drawingml/2006/main">
-          <a:graphicData uri="http://schemas.openxmlformats.org/drawingml/2006/chart">
-            <c:chart xmlns:c="http://schemas.openxmlformats.org/drawingml/2006/chart" r:id="rId1"/>
-          </a:graphicData>
-        </a:graphic>
-      </p:graphicFrame>
-      <p:sp>
-        <p:nvSpPr>
-          <p:cNvPr id="5" name="Shape 2"/>
-          <p:cNvSpPr/>
-          <p:nvPr/>
-        </p:nvSpPr>
-        <p:spPr>
-          <a:xfrm>
-            <a:off x="7818120" y="1463040"/>
-            <a:ext cx="3794760" cy="1243584"/>
+      <p:sp>
+        <p:nvSpPr>
+          <p:cNvPr id="4" name="Shape 2"/>
+          <p:cNvSpPr/>
+          <p:nvPr/>
+        </p:nvSpPr>
+        <p:spPr>
+          <a:xfrm>
+            <a:off x="548640" y="1463040"/>
+            <a:ext cx="3529584" cy="2121408"/>
           </a:xfrm>
           <a:prstGeom prst="roundRect">
             <a:avLst>
-              <a:gd name="adj" fmla="val 6618"/>
+              <a:gd name="adj" fmla="val 3879"/>
             </a:avLst>
           </a:prstGeom>
           <a:solidFill>
@@ -13142,34 +17384,34 @@
       </p:sp>
       <p:sp>
         <p:nvSpPr>
-          <p:cNvPr id="6" name="Shape 3"/>
-          <p:cNvSpPr/>
-          <p:nvPr/>
-        </p:nvSpPr>
-        <p:spPr>
-          <a:xfrm>
-            <a:off x="8065008" y="1609344"/>
-            <a:ext cx="420624" cy="420624"/>
+          <p:cNvPr id="5" name="Shape 3"/>
+          <p:cNvSpPr/>
+          <p:nvPr/>
+        </p:nvSpPr>
+        <p:spPr>
+          <a:xfrm>
+            <a:off x="822960" y="1700784"/>
+            <a:ext cx="457200" cy="457200"/>
           </a:xfrm>
           <a:prstGeom prst="ellipse">
             <a:avLst/>
           </a:prstGeom>
           <a:solidFill>
-            <a:srgbClr val="00A896"/>
+            <a:srgbClr val="D9503F"/>
           </a:solidFill>
           <a:ln/>
         </p:spPr>
       </p:sp>
       <p:sp>
         <p:nvSpPr>
-          <p:cNvPr id="7" name="Text 4"/>
-          <p:cNvSpPr/>
-          <p:nvPr/>
-        </p:nvSpPr>
-        <p:spPr>
-          <a:xfrm>
-            <a:off x="8065008" y="1609344"/>
-            <a:ext cx="420624" cy="420624"/>
+          <p:cNvPr id="6" name="Text 4"/>
+          <p:cNvSpPr/>
+          <p:nvPr/>
+        </p:nvSpPr>
+        <p:spPr>
+          <a:xfrm>
+            <a:off x="822960" y="1700784"/>
+            <a:ext cx="457200" cy="457200"/>
           </a:xfrm>
           <a:prstGeom prst="rect">
             <a:avLst/>
@@ -13193,7 +17435,7 @@
                 <a:ea typeface="Cambria" pitchFamily="34" charset="-122"/>
                 <a:cs typeface="Cambria" pitchFamily="34" charset="-120"/>
               </a:rPr>
-              <a:t>A</a:t>
+              <a:t>!</a:t>
             </a:r>
             <a:endParaRPr lang="en-US" sz="1500" dirty="0"/>
           </a:p>
@@ -13201,14 +17443,14 @@
       </p:sp>
       <p:sp>
         <p:nvSpPr>
-          <p:cNvPr id="8" name="Text 5"/>
-          <p:cNvSpPr/>
-          <p:nvPr/>
-        </p:nvSpPr>
-        <p:spPr>
-          <a:xfrm>
-            <a:off x="8613648" y="1591056"/>
-            <a:ext cx="2788920" cy="292608"/>
+          <p:cNvPr id="7" name="Text 5"/>
+          <p:cNvSpPr/>
+          <p:nvPr/>
+        </p:nvSpPr>
+        <p:spPr>
+          <a:xfrm>
+            <a:off x="822960" y="2286000"/>
+            <a:ext cx="2980944" cy="566928"/>
           </a:xfrm>
           <a:prstGeom prst="rect">
             <a:avLst/>
@@ -13217,7 +17459,7 @@
           <a:ln/>
         </p:spPr>
         <p:txBody>
-          <a:bodyPr wrap="square" lIns="0" tIns="0" rIns="0" bIns="0" rtlCol="0" anchor="ctr"/>
+          <a:bodyPr wrap="square" lIns="0" tIns="0" rIns="0" bIns="0" rtlCol="0" anchor="t"/>
           <a:lstStyle/>
           <a:p>
             <a:pPr indent="0" marL="0">
@@ -13232,7 +17474,7 @@
                 <a:ea typeface="Cambria" pitchFamily="34" charset="-122"/>
                 <a:cs typeface="Cambria" pitchFamily="34" charset="-120"/>
               </a:rPr>
-              <a:t>Click rate</a:t>
+              <a:t>Conversions exceed detail-page views</a:t>
             </a:r>
             <a:endParaRPr lang="en-US" sz="1400" dirty="0"/>
           </a:p>
@@ -13240,14 +17482,14 @@
       </p:sp>
       <p:sp>
         <p:nvSpPr>
-          <p:cNvPr id="9" name="Text 6"/>
-          <p:cNvSpPr/>
-          <p:nvPr/>
-        </p:nvSpPr>
-        <p:spPr>
-          <a:xfrm>
-            <a:off x="8613648" y="1874520"/>
-            <a:ext cx="2788920" cy="256032"/>
+          <p:cNvPr id="8" name="Text 6"/>
+          <p:cNvSpPr/>
+          <p:nvPr/>
+        </p:nvSpPr>
+        <p:spPr>
+          <a:xfrm>
+            <a:off x="822960" y="2834640"/>
+            <a:ext cx="2980944" cy="658368"/>
           </a:xfrm>
           <a:prstGeom prst="rect">
             <a:avLst/>
@@ -13263,15 +17505,15 @@
               <a:buNone/>
             </a:pPr>
             <a:r>
-              <a:rPr lang="en-US" sz="1050" b="1" dirty="0">
-                <a:solidFill>
-                  <a:srgbClr val="00A896"/>
+              <a:rPr lang="en-US" sz="1050" dirty="0">
+                <a:solidFill>
+                  <a:srgbClr val="44536B"/>
                 </a:solidFill>
                 <a:latin typeface="Calibri" pitchFamily="34" charset="0"/>
                 <a:ea typeface="Calibri" pitchFamily="34" charset="-122"/>
                 <a:cs typeface="Calibri" pitchFamily="34" charset="-120"/>
               </a:rPr>
-              <a:t>+2.57K books  ·  ~28M set credit</a:t>
+              <a:t>38.7K conversions against 31.7K detail-page views. In a strict click-path funnel that cannot happen — a Loose Criteria attribution artefact.</a:t>
             </a:r>
             <a:endParaRPr lang="en-US" sz="1050" dirty="0"/>
           </a:p>
@@ -13279,14 +17521,56 @@
       </p:sp>
       <p:sp>
         <p:nvSpPr>
-          <p:cNvPr id="10" name="Text 7"/>
-          <p:cNvSpPr/>
-          <p:nvPr/>
-        </p:nvSpPr>
-        <p:spPr>
-          <a:xfrm>
-            <a:off x="8065008" y="2157984"/>
-            <a:ext cx="3337560" cy="475488"/>
+          <p:cNvPr id="9" name="Shape 7"/>
+          <p:cNvSpPr/>
+          <p:nvPr/>
+        </p:nvSpPr>
+        <p:spPr>
+          <a:xfrm>
+            <a:off x="4270248" y="1463040"/>
+            <a:ext cx="3529584" cy="2121408"/>
+          </a:xfrm>
+          <a:prstGeom prst="roundRect">
+            <a:avLst>
+              <a:gd name="adj" fmla="val 3879"/>
+            </a:avLst>
+          </a:prstGeom>
+          <a:solidFill>
+            <a:srgbClr val="F1F4F9"/>
+          </a:solidFill>
+          <a:ln/>
+        </p:spPr>
+      </p:sp>
+      <p:sp>
+        <p:nvSpPr>
+          <p:cNvPr id="10" name="Shape 8"/>
+          <p:cNvSpPr/>
+          <p:nvPr/>
+        </p:nvSpPr>
+        <p:spPr>
+          <a:xfrm>
+            <a:off x="4544568" y="1700784"/>
+            <a:ext cx="457200" cy="457200"/>
+          </a:xfrm>
+          <a:prstGeom prst="ellipse">
+            <a:avLst/>
+          </a:prstGeom>
+          <a:solidFill>
+            <a:srgbClr val="D9503F"/>
+          </a:solidFill>
+          <a:ln/>
+        </p:spPr>
+      </p:sp>
+      <p:sp>
+        <p:nvSpPr>
+          <p:cNvPr id="11" name="Text 9"/>
+          <p:cNvSpPr/>
+          <p:nvPr/>
+        </p:nvSpPr>
+        <p:spPr>
+          <a:xfrm>
+            <a:off x="4544568" y="1700784"/>
+            <a:ext cx="457200" cy="457200"/>
           </a:xfrm>
           <a:prstGeom prst="rect">
             <a:avLst/>
@@ -13298,11 +17582,89 @@
           <a:bodyPr wrap="square" lIns="0" tIns="0" rIns="0" bIns="0" rtlCol="0" anchor="ctr"/>
           <a:lstStyle/>
           <a:p>
+            <a:pPr algn="ctr" indent="0" marL="0">
+              <a:buNone/>
+            </a:pPr>
+            <a:r>
+              <a:rPr lang="en-US" sz="1500" b="1" dirty="0">
+                <a:solidFill>
+                  <a:srgbClr val="FFFFFF"/>
+                </a:solidFill>
+                <a:latin typeface="Cambria" pitchFamily="34" charset="0"/>
+                <a:ea typeface="Cambria" pitchFamily="34" charset="-122"/>
+                <a:cs typeface="Cambria" pitchFamily="34" charset="-120"/>
+              </a:rPr>
+              <a:t>!</a:t>
+            </a:r>
+            <a:endParaRPr lang="en-US" sz="1500" dirty="0"/>
+          </a:p>
+        </p:txBody>
+      </p:sp>
+      <p:sp>
+        <p:nvSpPr>
+          <p:cNvPr id="12" name="Text 10"/>
+          <p:cNvSpPr/>
+          <p:nvPr/>
+        </p:nvSpPr>
+        <p:spPr>
+          <a:xfrm>
+            <a:off x="4544568" y="2286000"/>
+            <a:ext cx="2980944" cy="566928"/>
+          </a:xfrm>
+          <a:prstGeom prst="rect">
+            <a:avLst/>
+          </a:prstGeom>
+          <a:noFill/>
+          <a:ln/>
+        </p:spPr>
+        <p:txBody>
+          <a:bodyPr wrap="square" lIns="0" tIns="0" rIns="0" bIns="0" rtlCol="0" anchor="t"/>
+          <a:lstStyle/>
+          <a:p>
             <a:pPr indent="0" marL="0">
               <a:buNone/>
             </a:pPr>
             <a:r>
-              <a:rPr lang="en-US" sz="1000" dirty="0">
+              <a:rPr lang="en-US" sz="1400" b="1" dirty="0">
+                <a:solidFill>
+                  <a:srgbClr val="16233D"/>
+                </a:solidFill>
+                <a:latin typeface="Cambria" pitchFamily="34" charset="0"/>
+                <a:ea typeface="Cambria" pitchFamily="34" charset="-122"/>
+                <a:cs typeface="Cambria" pitchFamily="34" charset="-120"/>
+              </a:rPr>
+              <a:t>App-in is identical to conversion</a:t>
+            </a:r>
+            <a:endParaRPr lang="en-US" sz="1400" dirty="0"/>
+          </a:p>
+        </p:txBody>
+      </p:sp>
+      <p:sp>
+        <p:nvSpPr>
+          <p:cNvPr id="13" name="Text 11"/>
+          <p:cNvSpPr/>
+          <p:nvPr/>
+        </p:nvSpPr>
+        <p:spPr>
+          <a:xfrm>
+            <a:off x="4544568" y="2834640"/>
+            <a:ext cx="2980944" cy="658368"/>
+          </a:xfrm>
+          <a:prstGeom prst="rect">
+            <a:avLst/>
+          </a:prstGeom>
+          <a:noFill/>
+          <a:ln/>
+        </p:spPr>
+        <p:txBody>
+          <a:bodyPr wrap="square" lIns="0" tIns="0" rIns="0" bIns="0" rtlCol="0" anchor="ctr"/>
+          <a:lstStyle/>
+          <a:p>
+            <a:pPr indent="0" marL="0">
+              <a:buNone/>
+            </a:pPr>
+            <a:r>
+              <a:rPr lang="en-US" sz="1050" dirty="0">
                 <a:solidFill>
                   <a:srgbClr val="44536B"/>
                 </a:solidFill>
@@ -13310,26 +17672,26 @@
                 <a:ea typeface="Calibri" pitchFamily="34" charset="-122"/>
                 <a:cs typeface="Calibri" pitchFamily="34" charset="-120"/>
               </a:rPr>
-              <a:t>Highest leverage. 33.6K extra clicks off the existing 1.60M views — creative and offer work, no new reach.</a:t>
-            </a:r>
-            <a:endParaRPr lang="en-US" sz="1000" dirty="0"/>
-          </a:p>
-        </p:txBody>
-      </p:sp>
-      <p:sp>
-        <p:nvSpPr>
-          <p:cNvPr id="11" name="Shape 8"/>
-          <p:cNvSpPr/>
-          <p:nvPr/>
-        </p:nvSpPr>
-        <p:spPr>
-          <a:xfrm>
-            <a:off x="7818120" y="2880360"/>
-            <a:ext cx="3794760" cy="1243584"/>
+              <a:t>Both read 38.7K at exactly 30.5% of clicks. The two columns look like one event under two names; confirm the definitions.</a:t>
+            </a:r>
+            <a:endParaRPr lang="en-US" sz="1050" dirty="0"/>
+          </a:p>
+        </p:txBody>
+      </p:sp>
+      <p:sp>
+        <p:nvSpPr>
+          <p:cNvPr id="14" name="Shape 12"/>
+          <p:cNvSpPr/>
+          <p:nvPr/>
+        </p:nvSpPr>
+        <p:spPr>
+          <a:xfrm>
+            <a:off x="7991856" y="1463040"/>
+            <a:ext cx="3529584" cy="2121408"/>
           </a:xfrm>
           <a:prstGeom prst="roundRect">
             <a:avLst>
-              <a:gd name="adj" fmla="val 6618"/>
+              <a:gd name="adj" fmla="val 3879"/>
             </a:avLst>
           </a:prstGeom>
           <a:solidFill>
@@ -13340,34 +17702,34 @@
       </p:sp>
       <p:sp>
         <p:nvSpPr>
-          <p:cNvPr id="12" name="Shape 9"/>
-          <p:cNvSpPr/>
-          <p:nvPr/>
-        </p:nvSpPr>
-        <p:spPr>
-          <a:xfrm>
-            <a:off x="8065008" y="3026664"/>
-            <a:ext cx="420624" cy="420624"/>
+          <p:cNvPr id="15" name="Shape 13"/>
+          <p:cNvSpPr/>
+          <p:nvPr/>
+        </p:nvSpPr>
+        <p:spPr>
+          <a:xfrm>
+            <a:off x="8266176" y="1700784"/>
+            <a:ext cx="457200" cy="457200"/>
           </a:xfrm>
           <a:prstGeom prst="ellipse">
             <a:avLst/>
           </a:prstGeom>
           <a:solidFill>
-            <a:srgbClr val="00A896"/>
+            <a:srgbClr val="D9503F"/>
           </a:solidFill>
           <a:ln/>
         </p:spPr>
       </p:sp>
       <p:sp>
         <p:nvSpPr>
-          <p:cNvPr id="13" name="Text 10"/>
-          <p:cNvSpPr/>
-          <p:nvPr/>
-        </p:nvSpPr>
-        <p:spPr>
-          <a:xfrm>
-            <a:off x="8065008" y="3026664"/>
-            <a:ext cx="420624" cy="420624"/>
+          <p:cNvPr id="16" name="Text 14"/>
+          <p:cNvSpPr/>
+          <p:nvPr/>
+        </p:nvSpPr>
+        <p:spPr>
+          <a:xfrm>
+            <a:off x="8266176" y="1700784"/>
+            <a:ext cx="457200" cy="457200"/>
           </a:xfrm>
           <a:prstGeom prst="rect">
             <a:avLst/>
@@ -13391,7 +17753,7 @@
                 <a:ea typeface="Cambria" pitchFamily="34" charset="-122"/>
                 <a:cs typeface="Cambria" pitchFamily="34" charset="-120"/>
               </a:rPr>
-              <a:t>B</a:t>
+              <a:t>!</a:t>
             </a:r>
             <a:endParaRPr lang="en-US" sz="1500" dirty="0"/>
           </a:p>
@@ -13399,14 +17761,14 @@
       </p:sp>
       <p:sp>
         <p:nvSpPr>
-          <p:cNvPr id="14" name="Text 11"/>
-          <p:cNvSpPr/>
-          <p:nvPr/>
-        </p:nvSpPr>
-        <p:spPr>
-          <a:xfrm>
-            <a:off x="8613648" y="3008376"/>
-            <a:ext cx="2788920" cy="292608"/>
+          <p:cNvPr id="17" name="Text 15"/>
+          <p:cNvSpPr/>
+          <p:nvPr/>
+        </p:nvSpPr>
+        <p:spPr>
+          <a:xfrm>
+            <a:off x="8266176" y="2286000"/>
+            <a:ext cx="2980944" cy="566928"/>
           </a:xfrm>
           <a:prstGeom prst="rect">
             <a:avLst/>
@@ -13415,7 +17777,7 @@
           <a:ln/>
         </p:spPr>
         <p:txBody>
-          <a:bodyPr wrap="square" lIns="0" tIns="0" rIns="0" bIns="0" rtlCol="0" anchor="ctr"/>
+          <a:bodyPr wrap="square" lIns="0" tIns="0" rIns="0" bIns="0" rtlCol="0" anchor="t"/>
           <a:lstStyle/>
           <a:p>
             <a:pPr indent="0" marL="0">
@@ -13430,7 +17792,7 @@
                 <a:ea typeface="Cambria" pitchFamily="34" charset="-122"/>
                 <a:cs typeface="Cambria" pitchFamily="34" charset="-120"/>
               </a:rPr>
-              <a:t>View rate</a:t>
+              <a:t>App-in amount is empty</a:t>
             </a:r>
             <a:endParaRPr lang="en-US" sz="1400" dirty="0"/>
           </a:p>
@@ -13438,14 +17800,14 @@
       </p:sp>
       <p:sp>
         <p:nvSpPr>
-          <p:cNvPr id="15" name="Text 12"/>
-          <p:cNvSpPr/>
-          <p:nvPr/>
-        </p:nvSpPr>
-        <p:spPr>
-          <a:xfrm>
-            <a:off x="8613648" y="3291840"/>
-            <a:ext cx="2788920" cy="256032"/>
+          <p:cNvPr id="18" name="Text 16"/>
+          <p:cNvSpPr/>
+          <p:nvPr/>
+        </p:nvSpPr>
+        <p:spPr>
+          <a:xfrm>
+            <a:off x="8266176" y="2834640"/>
+            <a:ext cx="2980944" cy="658368"/>
           </a:xfrm>
           <a:prstGeom prst="rect">
             <a:avLst/>
@@ -13461,15 +17823,15 @@
               <a:buNone/>
             </a:pPr>
             <a:r>
-              <a:rPr lang="en-US" sz="1050" b="1" dirty="0">
-                <a:solidFill>
-                  <a:srgbClr val="00A896"/>
+              <a:rPr lang="en-US" sz="1050" dirty="0">
+                <a:solidFill>
+                  <a:srgbClr val="44536B"/>
                 </a:solidFill>
                 <a:latin typeface="Calibri" pitchFamily="34" charset="0"/>
                 <a:ea typeface="Calibri" pitchFamily="34" charset="-122"/>
                 <a:cs typeface="Calibri" pitchFamily="34" charset="-120"/>
               </a:rPr>
-              <a:t>+1.38K books  ·  ~15M set credit</a:t>
+              <a:t>Reads 0.0B while approve amount reads 0.1B. Approved value cannot exceed applied value — amount is not being captured at application.</a:t>
             </a:r>
             <a:endParaRPr lang="en-US" sz="1050" dirty="0"/>
           </a:p>
@@ -13477,14 +17839,56 @@
       </p:sp>
       <p:sp>
         <p:nvSpPr>
-          <p:cNvPr id="16" name="Text 13"/>
-          <p:cNvSpPr/>
-          <p:nvPr/>
-        </p:nvSpPr>
-        <p:spPr>
-          <a:xfrm>
-            <a:off x="8065008" y="3575304"/>
-            <a:ext cx="3337560" cy="475488"/>
+          <p:cNvPr id="19" name="Shape 17"/>
+          <p:cNvSpPr/>
+          <p:nvPr/>
+        </p:nvSpPr>
+        <p:spPr>
+          <a:xfrm>
+            <a:off x="548640" y="3767328"/>
+            <a:ext cx="5468112" cy="1755648"/>
+          </a:xfrm>
+          <a:prstGeom prst="roundRect">
+            <a:avLst>
+              <a:gd name="adj" fmla="val 4688"/>
+            </a:avLst>
+          </a:prstGeom>
+          <a:solidFill>
+            <a:srgbClr val="FBF0E6"/>
+          </a:solidFill>
+          <a:ln/>
+        </p:spPr>
+      </p:sp>
+      <p:sp>
+        <p:nvSpPr>
+          <p:cNvPr id="20" name="Shape 18"/>
+          <p:cNvSpPr/>
+          <p:nvPr/>
+        </p:nvSpPr>
+        <p:spPr>
+          <a:xfrm>
+            <a:off x="841248" y="4005072"/>
+            <a:ext cx="457200" cy="457200"/>
+          </a:xfrm>
+          <a:prstGeom prst="ellipse">
+            <a:avLst/>
+          </a:prstGeom>
+          <a:solidFill>
+            <a:srgbClr val="E9A03B"/>
+          </a:solidFill>
+          <a:ln/>
+        </p:spPr>
+      </p:sp>
+      <p:sp>
+        <p:nvSpPr>
+          <p:cNvPr id="21" name="Text 19"/>
+          <p:cNvSpPr/>
+          <p:nvPr/>
+        </p:nvSpPr>
+        <p:spPr>
+          <a:xfrm>
+            <a:off x="841248" y="4005072"/>
+            <a:ext cx="457200" cy="457200"/>
           </a:xfrm>
           <a:prstGeom prst="rect">
             <a:avLst/>
@@ -13496,11 +17900,89 @@
           <a:bodyPr wrap="square" lIns="0" tIns="0" rIns="0" bIns="0" rtlCol="0" anchor="ctr"/>
           <a:lstStyle/>
           <a:p>
+            <a:pPr algn="ctr" indent="0" marL="0">
+              <a:buNone/>
+            </a:pPr>
+            <a:r>
+              <a:rPr lang="en-US" sz="1500" b="1" dirty="0">
+                <a:solidFill>
+                  <a:srgbClr val="FFFFFF"/>
+                </a:solidFill>
+                <a:latin typeface="Cambria" pitchFamily="34" charset="0"/>
+                <a:ea typeface="Cambria" pitchFamily="34" charset="-122"/>
+                <a:cs typeface="Cambria" pitchFamily="34" charset="-120"/>
+              </a:rPr>
+              <a:t>!</a:t>
+            </a:r>
+            <a:endParaRPr lang="en-US" sz="1500" dirty="0"/>
+          </a:p>
+        </p:txBody>
+      </p:sp>
+      <p:sp>
+        <p:nvSpPr>
+          <p:cNvPr id="22" name="Text 20"/>
+          <p:cNvSpPr/>
+          <p:nvPr/>
+        </p:nvSpPr>
+        <p:spPr>
+          <a:xfrm>
+            <a:off x="1463040" y="4005072"/>
+            <a:ext cx="4261104" cy="457200"/>
+          </a:xfrm>
+          <a:prstGeom prst="rect">
+            <a:avLst/>
+          </a:prstGeom>
+          <a:noFill/>
+          <a:ln/>
+        </p:spPr>
+        <p:txBody>
+          <a:bodyPr wrap="square" lIns="0" tIns="0" rIns="0" bIns="0" rtlCol="0" anchor="ctr"/>
+          <a:lstStyle/>
+          <a:p>
             <a:pPr indent="0" marL="0">
               <a:buNone/>
             </a:pPr>
             <a:r>
-              <a:rPr lang="en-US" sz="1000" dirty="0">
+              <a:rPr lang="en-US" sz="1400" b="1" dirty="0">
+                <a:solidFill>
+                  <a:srgbClr val="16233D"/>
+                </a:solidFill>
+                <a:latin typeface="Cambria" pitchFamily="34" charset="0"/>
+                <a:ea typeface="Cambria" pitchFamily="34" charset="-122"/>
+                <a:cs typeface="Cambria" pitchFamily="34" charset="-120"/>
+              </a:rPr>
+              <a:t>Thru-The-Door is effectively unmeasured</a:t>
+            </a:r>
+            <a:endParaRPr lang="en-US" sz="1400" dirty="0"/>
+          </a:p>
+        </p:txBody>
+      </p:sp>
+      <p:sp>
+        <p:nvSpPr>
+          <p:cNvPr id="23" name="Text 21"/>
+          <p:cNvSpPr/>
+          <p:nvPr/>
+        </p:nvSpPr>
+        <p:spPr>
+          <a:xfrm>
+            <a:off x="841248" y="4553712"/>
+            <a:ext cx="4882896" cy="1115568"/>
+          </a:xfrm>
+          <a:prstGeom prst="rect">
+            <a:avLst/>
+          </a:prstGeom>
+          <a:noFill/>
+          <a:ln/>
+        </p:spPr>
+        <p:txBody>
+          <a:bodyPr wrap="square" lIns="0" tIns="0" rIns="0" bIns="0" rtlCol="0" anchor="t"/>
+          <a:lstStyle/>
+          <a:p>
+            <a:pPr indent="0" marL="0">
+              <a:buNone/>
+            </a:pPr>
+            <a:r>
+              <a:rPr lang="en-US" sz="1100" dirty="0">
                 <a:solidFill>
                   <a:srgbClr val="44536B"/>
                 </a:solidFill>
@@ -13508,64 +17990,64 @@
                 <a:ea typeface="Calibri" pitchFamily="34" charset="-122"/>
                 <a:cs typeface="Calibri" pitchFamily="34" charset="-120"/>
               </a:rPr>
-              <a:t>229K extra views off leads already assigned. Deliverability, channel mix, frequency capping.</a:t>
-            </a:r>
-            <a:endParaRPr lang="en-US" sz="1000" dirty="0"/>
-          </a:p>
-        </p:txBody>
-      </p:sp>
-      <p:sp>
-        <p:nvSpPr>
-          <p:cNvPr id="17" name="Shape 14"/>
-          <p:cNvSpPr/>
-          <p:nvPr/>
-        </p:nvSpPr>
-        <p:spPr>
-          <a:xfrm>
-            <a:off x="7818120" y="4297680"/>
-            <a:ext cx="3794760" cy="1243584"/>
+              <a:t>TTD1 at 0.3K (0.2% of clicks) and TTD2 at 0.0K. Either the offline/branch journey is not instrumented, or the columns should be retired.</a:t>
+            </a:r>
+            <a:endParaRPr lang="en-US" sz="1100" dirty="0"/>
+          </a:p>
+        </p:txBody>
+      </p:sp>
+      <p:sp>
+        <p:nvSpPr>
+          <p:cNvPr id="24" name="Shape 22"/>
+          <p:cNvSpPr/>
+          <p:nvPr/>
+        </p:nvSpPr>
+        <p:spPr>
+          <a:xfrm>
+            <a:off x="6208776" y="3767328"/>
+            <a:ext cx="5468112" cy="1755648"/>
           </a:xfrm>
           <a:prstGeom prst="roundRect">
             <a:avLst>
-              <a:gd name="adj" fmla="val 6618"/>
+              <a:gd name="adj" fmla="val 4688"/>
             </a:avLst>
           </a:prstGeom>
           <a:solidFill>
-            <a:srgbClr val="F1F4F9"/>
+            <a:srgbClr val="FBF0E6"/>
           </a:solidFill>
           <a:ln/>
         </p:spPr>
       </p:sp>
       <p:sp>
         <p:nvSpPr>
-          <p:cNvPr id="18" name="Shape 15"/>
-          <p:cNvSpPr/>
-          <p:nvPr/>
-        </p:nvSpPr>
-        <p:spPr>
-          <a:xfrm>
-            <a:off x="8065008" y="4443984"/>
-            <a:ext cx="420624" cy="420624"/>
+          <p:cNvPr id="25" name="Shape 23"/>
+          <p:cNvSpPr/>
+          <p:nvPr/>
+        </p:nvSpPr>
+        <p:spPr>
+          <a:xfrm>
+            <a:off x="6501384" y="4005072"/>
+            <a:ext cx="457200" cy="457200"/>
           </a:xfrm>
           <a:prstGeom prst="ellipse">
             <a:avLst/>
           </a:prstGeom>
           <a:solidFill>
-            <a:srgbClr val="00A896"/>
+            <a:srgbClr val="E9A03B"/>
           </a:solidFill>
           <a:ln/>
         </p:spPr>
       </p:sp>
       <p:sp>
         <p:nvSpPr>
-          <p:cNvPr id="19" name="Text 16"/>
-          <p:cNvSpPr/>
-          <p:nvPr/>
-        </p:nvSpPr>
-        <p:spPr>
-          <a:xfrm>
-            <a:off x="8065008" y="4443984"/>
-            <a:ext cx="420624" cy="420624"/>
+          <p:cNvPr id="26" name="Text 24"/>
+          <p:cNvSpPr/>
+          <p:nvPr/>
+        </p:nvSpPr>
+        <p:spPr>
+          <a:xfrm>
+            <a:off x="6501384" y="4005072"/>
+            <a:ext cx="457200" cy="457200"/>
           </a:xfrm>
           <a:prstGeom prst="rect">
             <a:avLst/>
@@ -13589,7 +18071,7 @@
                 <a:ea typeface="Cambria" pitchFamily="34" charset="-122"/>
                 <a:cs typeface="Cambria" pitchFamily="34" charset="-120"/>
               </a:rPr>
-              <a:t>C</a:t>
+              <a:t>!</a:t>
             </a:r>
             <a:endParaRPr lang="en-US" sz="1500" dirty="0"/>
           </a:p>
@@ -13597,14 +18079,14 @@
       </p:sp>
       <p:sp>
         <p:nvSpPr>
-          <p:cNvPr id="20" name="Text 17"/>
-          <p:cNvSpPr/>
-          <p:nvPr/>
-        </p:nvSpPr>
-        <p:spPr>
-          <a:xfrm>
-            <a:off x="8613648" y="4425696"/>
-            <a:ext cx="2788920" cy="292608"/>
+          <p:cNvPr id="27" name="Text 25"/>
+          <p:cNvSpPr/>
+          <p:nvPr/>
+        </p:nvSpPr>
+        <p:spPr>
+          <a:xfrm>
+            <a:off x="7123176" y="4005072"/>
+            <a:ext cx="4261104" cy="457200"/>
           </a:xfrm>
           <a:prstGeom prst="rect">
             <a:avLst/>
@@ -13628,7 +18110,7 @@
                 <a:ea typeface="Cambria" pitchFamily="34" charset="-122"/>
                 <a:cs typeface="Cambria" pitchFamily="34" charset="-120"/>
               </a:rPr>
-              <a:t>Book rate</a:t>
+              <a:t>Loose vs Strict criteria not pinned</a:t>
             </a:r>
             <a:endParaRPr lang="en-US" sz="1400" dirty="0"/>
           </a:p>
@@ -13636,14 +18118,14 @@
       </p:sp>
       <p:sp>
         <p:nvSpPr>
-          <p:cNvPr id="21" name="Text 18"/>
-          <p:cNvSpPr/>
-          <p:nvPr/>
-        </p:nvSpPr>
-        <p:spPr>
-          <a:xfrm>
-            <a:off x="8613648" y="4709160"/>
-            <a:ext cx="2788920" cy="256032"/>
+          <p:cNvPr id="28" name="Text 26"/>
+          <p:cNvSpPr/>
+          <p:nvPr/>
+        </p:nvSpPr>
+        <p:spPr>
+          <a:xfrm>
+            <a:off x="6501384" y="4553712"/>
+            <a:ext cx="4882896" cy="1115568"/>
           </a:xfrm>
           <a:prstGeom prst="rect">
             <a:avLst/>
@@ -13652,37 +18134,37 @@
           <a:ln/>
         </p:spPr>
         <p:txBody>
-          <a:bodyPr wrap="square" lIns="0" tIns="0" rIns="0" bIns="0" rtlCol="0" anchor="ctr"/>
+          <a:bodyPr wrap="square" lIns="0" tIns="0" rIns="0" bIns="0" rtlCol="0" anchor="t"/>
           <a:lstStyle/>
           <a:p>
             <a:pPr indent="0" marL="0">
               <a:buNone/>
             </a:pPr>
             <a:r>
-              <a:rPr lang="en-US" sz="1050" b="1" dirty="0">
-                <a:solidFill>
-                  <a:srgbClr val="00A896"/>
+              <a:rPr lang="en-US" sz="1100" dirty="0">
+                <a:solidFill>
+                  <a:srgbClr val="44536B"/>
                 </a:solidFill>
                 <a:latin typeface="Calibri" pitchFamily="34" charset="0"/>
                 <a:ea typeface="Calibri" pitchFamily="34" charset="-122"/>
                 <a:cs typeface="Calibri" pitchFamily="34" charset="-120"/>
               </a:rPr>
-              <a:t>+1.30K books  ·  ~14M set credit</a:t>
-            </a:r>
-            <a:endParaRPr lang="en-US" sz="1050" dirty="0"/>
-          </a:p>
-        </p:txBody>
-      </p:sp>
-      <p:sp>
-        <p:nvSpPr>
-          <p:cNvPr id="22" name="Text 19"/>
-          <p:cNvSpPr/>
-          <p:nvPr/>
-        </p:nvSpPr>
-        <p:spPr>
-          <a:xfrm>
-            <a:off x="8065008" y="4992624"/>
-            <a:ext cx="3337560" cy="475488"/>
+              <a:t>The dashboard itself warns that Loose Criteria can push response rates above 100%. Every rate in this deck should be re-baselined on Strict View-and-Click.</a:t>
+            </a:r>
+            <a:endParaRPr lang="en-US" sz="1100" dirty="0"/>
+          </a:p>
+        </p:txBody>
+      </p:sp>
+      <p:sp>
+        <p:nvSpPr>
+          <p:cNvPr id="29" name="Text 27"/>
+          <p:cNvSpPr/>
+          <p:nvPr/>
+        </p:nvSpPr>
+        <p:spPr>
+          <a:xfrm>
+            <a:off x="548640" y="6345936"/>
+            <a:ext cx="11064240" cy="292608"/>
           </a:xfrm>
           <a:prstGeom prst="rect">
             <a:avLst/>
@@ -13698,115 +18180,15 @@
               <a:buNone/>
             </a:pPr>
             <a:r>
-              <a:rPr lang="en-US" sz="1000" dirty="0">
-                <a:solidFill>
-                  <a:srgbClr val="44536B"/>
+              <a:rPr lang="en-US" sz="950" i="1" dirty="0">
+                <a:solidFill>
+                  <a:srgbClr val="6B7A90"/>
                 </a:solidFill>
                 <a:latin typeface="Calibri" pitchFamily="34" charset="0"/>
                 <a:ea typeface="Calibri" pitchFamily="34" charset="-122"/>
                 <a:cs typeface="Calibri" pitchFamily="34" charset="-120"/>
               </a:rPr>
-              <a:t>Cheapest of the three: no new traffic at all, just closing 1.3K already-approved customers.</a:t>
-            </a:r>
-            <a:endParaRPr lang="en-US" sz="1000" dirty="0"/>
-          </a:p>
-        </p:txBody>
-      </p:sp>
-      <p:sp>
-        <p:nvSpPr>
-          <p:cNvPr id="23" name="Shape 20"/>
-          <p:cNvSpPr/>
-          <p:nvPr/>
-        </p:nvSpPr>
-        <p:spPr>
-          <a:xfrm>
-            <a:off x="7818120" y="5715000"/>
-            <a:ext cx="3794760" cy="566928"/>
-          </a:xfrm>
-          <a:prstGeom prst="roundRect">
-            <a:avLst>
-              <a:gd name="adj" fmla="val 14516"/>
-            </a:avLst>
-          </a:prstGeom>
-          <a:solidFill>
-            <a:srgbClr val="0E1E3C"/>
-          </a:solidFill>
-          <a:ln/>
-        </p:spPr>
-      </p:sp>
-      <p:sp>
-        <p:nvSpPr>
-          <p:cNvPr id="24" name="Text 21"/>
-          <p:cNvSpPr/>
-          <p:nvPr/>
-        </p:nvSpPr>
-        <p:spPr>
-          <a:xfrm>
-            <a:off x="7818120" y="5715000"/>
-            <a:ext cx="3794760" cy="566928"/>
-          </a:xfrm>
-          <a:prstGeom prst="rect">
-            <a:avLst/>
-          </a:prstGeom>
-          <a:noFill/>
-          <a:ln/>
-        </p:spPr>
-        <p:txBody>
-          <a:bodyPr wrap="square" lIns="0" tIns="0" rIns="0" bIns="0" rtlCol="0" anchor="ctr"/>
-          <a:lstStyle/>
-          <a:p>
-            <a:pPr algn="ctr" indent="0" marL="0">
-              <a:buNone/>
-            </a:pPr>
-            <a:r>
-              <a:rPr lang="en-US" sz="1400" b="1" dirty="0">
-                <a:solidFill>
-                  <a:srgbClr val="5FD6BE"/>
-                </a:solidFill>
-                <a:latin typeface="Cambria" pitchFamily="34" charset="0"/>
-                <a:ea typeface="Cambria" pitchFamily="34" charset="-122"/>
-                <a:cs typeface="Cambria" pitchFamily="34" charset="-120"/>
-              </a:rPr>
-              <a:t>Together: 9.7K → 16.0K bookings</a:t>
-            </a:r>
-            <a:endParaRPr lang="en-US" sz="1400" dirty="0"/>
-          </a:p>
-        </p:txBody>
-      </p:sp>
-      <p:sp>
-        <p:nvSpPr>
-          <p:cNvPr id="25" name="Text 22"/>
-          <p:cNvSpPr/>
-          <p:nvPr/>
-        </p:nvSpPr>
-        <p:spPr>
-          <a:xfrm>
-            <a:off x="548640" y="6345936"/>
-            <a:ext cx="11064240" cy="292608"/>
-          </a:xfrm>
-          <a:prstGeom prst="rect">
-            <a:avLst/>
-          </a:prstGeom>
-          <a:noFill/>
-          <a:ln/>
-        </p:spPr>
-        <p:txBody>
-          <a:bodyPr wrap="square" lIns="0" tIns="0" rIns="0" bIns="0" rtlCol="0" anchor="ctr"/>
-          <a:lstStyle/>
-          <a:p>
-            <a:pPr indent="0" marL="0">
-              <a:buNone/>
-            </a:pPr>
-            <a:r>
-              <a:rPr lang="en-US" sz="950" i="1" dirty="0">
-                <a:solidFill>
-                  <a:srgbClr val="6B7A90"/>
-                </a:solidFill>
-                <a:latin typeface="Calibri" pitchFamily="34" charset="0"/>
-                <a:ea typeface="Calibri" pitchFamily="34" charset="-122"/>
-                <a:cs typeface="Calibri" pitchFamily="34" charset="-120"/>
-              </a:rPr>
-              <a:t>Each lever holds all downstream rates constant at their observed values; set-credit uplift priced at the observed 10.8K average per booked customer.</a:t>
+              <a:t>None of these invalidate the direction of the findings — the top-funnel gap is far too large to be a measurement artefact — but they do move the exact rates.</a:t>
             </a:r>
             <a:endParaRPr lang="en-US" sz="950" dirty="0"/>
           </a:p>
@@ -13826,7 +18208,7 @@
     <p:bg>
       <p:bgPr>
         <a:solidFill>
-          <a:srgbClr val="0E1E3C"/>
+          <a:srgbClr val="FFFFFF"/>
         </a:solidFill>
       </p:bgPr>
     </p:bg>
@@ -13871,13 +18253,13 @@
             <a:r>
               <a:rPr lang="en-US" sz="1150" b="1" spc="220" kern="0" dirty="0">
                 <a:solidFill>
-                  <a:srgbClr val="5FD6BE"/>
+                  <a:srgbClr val="00A896"/>
                 </a:solidFill>
                 <a:latin typeface="Calibri" pitchFamily="34" charset="0"/>
                 <a:ea typeface="Calibri" pitchFamily="34" charset="-122"/>
                 <a:cs typeface="Calibri" pitchFamily="34" charset="-120"/>
               </a:rPr>
-              <a:t>RECOMMENDATIONS</a:t>
+              <a:t>SIZING THE PRIZE</a:t>
             </a:r>
             <a:endParaRPr lang="en-US" sz="1150" dirty="0"/>
           </a:p>
@@ -13910,50 +18292,66 @@
             <a:r>
               <a:rPr lang="en-US" sz="3200" b="1" dirty="0">
                 <a:solidFill>
-                  <a:srgbClr val="FFFFFF"/>
+                  <a:srgbClr val="16233D"/>
                 </a:solidFill>
                 <a:latin typeface="Cambria" pitchFamily="34" charset="0"/>
                 <a:ea typeface="Cambria" pitchFamily="34" charset="-122"/>
                 <a:cs typeface="Cambria" pitchFamily="34" charset="-120"/>
               </a:rPr>
-              <a:t>What to do next</a:t>
+              <a:t>Three levers, 6.3K incremental bookings</a:t>
             </a:r>
             <a:endParaRPr lang="en-US" sz="3200" dirty="0"/>
           </a:p>
         </p:txBody>
       </p:sp>
-      <p:sp>
-        <p:nvSpPr>
-          <p:cNvPr id="4" name="Shape 2"/>
-          <p:cNvSpPr/>
-          <p:nvPr/>
-        </p:nvSpPr>
-        <p:spPr>
-          <a:xfrm>
-            <a:off x="548640" y="1517904"/>
-            <a:ext cx="5468112" cy="1389888"/>
+      <p:graphicFrame>
+        <p:nvGraphicFramePr>
+          <p:cNvPr id="4" name="Chart 0" descr=""/>
+          <p:cNvGraphicFramePr/>
+          <p:nvPr/>
+        </p:nvGraphicFramePr>
+        <p:xfrm>
+          <a:off x="457200" y="1389888"/>
+          <a:ext cx="7086600" cy="4160520"/>
+        </p:xfrm>
+        <a:graphic xmlns:a="http://schemas.openxmlformats.org/drawingml/2006/main">
+          <a:graphicData uri="http://schemas.openxmlformats.org/drawingml/2006/chart">
+            <c:chart xmlns:c="http://schemas.openxmlformats.org/drawingml/2006/chart" r:id="rId1"/>
+          </a:graphicData>
+        </a:graphic>
+      </p:graphicFrame>
+      <p:sp>
+        <p:nvSpPr>
+          <p:cNvPr id="5" name="Shape 2"/>
+          <p:cNvSpPr/>
+          <p:nvPr/>
+        </p:nvSpPr>
+        <p:spPr>
+          <a:xfrm>
+            <a:off x="7818120" y="1463040"/>
+            <a:ext cx="3794760" cy="1243584"/>
           </a:xfrm>
           <a:prstGeom prst="roundRect">
             <a:avLst>
-              <a:gd name="adj" fmla="val 5921"/>
+              <a:gd name="adj" fmla="val 6618"/>
             </a:avLst>
           </a:prstGeom>
           <a:solidFill>
-            <a:srgbClr val="17294B"/>
+            <a:srgbClr val="F1F4F9"/>
           </a:solidFill>
           <a:ln/>
         </p:spPr>
       </p:sp>
       <p:sp>
         <p:nvSpPr>
-          <p:cNvPr id="5" name="Shape 3"/>
-          <p:cNvSpPr/>
-          <p:nvPr/>
-        </p:nvSpPr>
-        <p:spPr>
-          <a:xfrm>
-            <a:off x="841248" y="1755648"/>
-            <a:ext cx="457200" cy="457200"/>
+          <p:cNvPr id="6" name="Shape 3"/>
+          <p:cNvSpPr/>
+          <p:nvPr/>
+        </p:nvSpPr>
+        <p:spPr>
+          <a:xfrm>
+            <a:off x="8065008" y="1609344"/>
+            <a:ext cx="420624" cy="420624"/>
           </a:xfrm>
           <a:prstGeom prst="ellipse">
             <a:avLst/>
@@ -13966,14 +18364,14 @@
       </p:sp>
       <p:sp>
         <p:nvSpPr>
-          <p:cNvPr id="6" name="Text 4"/>
-          <p:cNvSpPr/>
-          <p:nvPr/>
-        </p:nvSpPr>
-        <p:spPr>
-          <a:xfrm>
-            <a:off x="841248" y="1755648"/>
-            <a:ext cx="457200" cy="457200"/>
+          <p:cNvPr id="7" name="Text 4"/>
+          <p:cNvSpPr/>
+          <p:nvPr/>
+        </p:nvSpPr>
+        <p:spPr>
+          <a:xfrm>
+            <a:off x="8065008" y="1609344"/>
+            <a:ext cx="420624" cy="420624"/>
           </a:xfrm>
           <a:prstGeom prst="rect">
             <a:avLst/>
@@ -13997,7 +18395,7 @@
                 <a:ea typeface="Cambria" pitchFamily="34" charset="-122"/>
                 <a:cs typeface="Cambria" pitchFamily="34" charset="-120"/>
               </a:rPr>
-              <a:t>1</a:t>
+              <a:t>A</a:t>
             </a:r>
             <a:endParaRPr lang="en-US" sz="1500" dirty="0"/>
           </a:p>
@@ -14005,14 +18403,14 @@
       </p:sp>
       <p:sp>
         <p:nvSpPr>
-          <p:cNvPr id="7" name="Text 5"/>
-          <p:cNvSpPr/>
-          <p:nvPr/>
-        </p:nvSpPr>
-        <p:spPr>
-          <a:xfrm>
-            <a:off x="1463040" y="1755648"/>
-            <a:ext cx="4261104" cy="457200"/>
+          <p:cNvPr id="8" name="Text 5"/>
+          <p:cNvSpPr/>
+          <p:nvPr/>
+        </p:nvSpPr>
+        <p:spPr>
+          <a:xfrm>
+            <a:off x="8613648" y="1591056"/>
+            <a:ext cx="2788920" cy="292608"/>
           </a:xfrm>
           <a:prstGeom prst="rect">
             <a:avLst/>
@@ -14028,30 +18426,30 @@
               <a:buNone/>
             </a:pPr>
             <a:r>
-              <a:rPr lang="en-US" sz="1450" b="1" dirty="0">
-                <a:solidFill>
-                  <a:srgbClr val="FFFFFF"/>
+              <a:rPr lang="en-US" sz="1400" b="1" dirty="0">
+                <a:solidFill>
+                  <a:srgbClr val="16233D"/>
                 </a:solidFill>
                 <a:latin typeface="Cambria" pitchFamily="34" charset="0"/>
                 <a:ea typeface="Cambria" pitchFamily="34" charset="-122"/>
                 <a:cs typeface="Cambria" pitchFamily="34" charset="-120"/>
               </a:rPr>
-              <a:t>Re-baseline on Strict criteria</a:t>
-            </a:r>
-            <a:endParaRPr lang="en-US" sz="1450" dirty="0"/>
-          </a:p>
-        </p:txBody>
-      </p:sp>
-      <p:sp>
-        <p:nvSpPr>
-          <p:cNvPr id="8" name="Text 6"/>
-          <p:cNvSpPr/>
-          <p:nvPr/>
-        </p:nvSpPr>
-        <p:spPr>
-          <a:xfrm>
-            <a:off x="841248" y="2249424"/>
-            <a:ext cx="4882896" cy="384048"/>
+              <a:t>Click rate</a:t>
+            </a:r>
+            <a:endParaRPr lang="en-US" sz="1400" dirty="0"/>
+          </a:p>
+        </p:txBody>
+      </p:sp>
+      <p:sp>
+        <p:nvSpPr>
+          <p:cNvPr id="9" name="Text 6"/>
+          <p:cNvSpPr/>
+          <p:nvPr/>
+        </p:nvSpPr>
+        <p:spPr>
+          <a:xfrm>
+            <a:off x="8613648" y="1874520"/>
+            <a:ext cx="2788920" cy="256032"/>
           </a:xfrm>
           <a:prstGeom prst="rect">
             <a:avLst/>
@@ -14067,15 +18465,15 @@
               <a:buNone/>
             </a:pPr>
             <a:r>
-              <a:rPr lang="en-US" sz="1050" dirty="0">
-                <a:solidFill>
-                  <a:srgbClr val="C3D0E2"/>
+              <a:rPr lang="en-US" sz="1050" b="1" dirty="0">
+                <a:solidFill>
+                  <a:srgbClr val="00A896"/>
                 </a:solidFill>
                 <a:latin typeface="Calibri" pitchFamily="34" charset="0"/>
                 <a:ea typeface="Calibri" pitchFamily="34" charset="-122"/>
                 <a:cs typeface="Calibri" pitchFamily="34" charset="-120"/>
               </a:rPr>
-              <a:t>Rerun the funnel under Strict View-and-Click before any budget or targeting decision is taken off these numbers.</a:t>
+              <a:t>+2.57K books  ·  ~28M set credit</a:t>
             </a:r>
             <a:endParaRPr lang="en-US" sz="1050" dirty="0"/>
           </a:p>
@@ -14083,14 +18481,14 @@
       </p:sp>
       <p:sp>
         <p:nvSpPr>
-          <p:cNvPr id="9" name="Text 7"/>
-          <p:cNvSpPr/>
-          <p:nvPr/>
-        </p:nvSpPr>
-        <p:spPr>
-          <a:xfrm>
-            <a:off x="841248" y="2615184"/>
-            <a:ext cx="4882896" cy="237744"/>
+          <p:cNvPr id="10" name="Text 7"/>
+          <p:cNvSpPr/>
+          <p:nvPr/>
+        </p:nvSpPr>
+        <p:spPr>
+          <a:xfrm>
+            <a:off x="8065008" y="2157984"/>
+            <a:ext cx="3337560" cy="475488"/>
           </a:xfrm>
           <a:prstGeom prst="rect">
             <a:avLst/>
@@ -14106,15 +18504,15 @@
               <a:buNone/>
             </a:pPr>
             <a:r>
-              <a:rPr lang="en-US" sz="1000" b="1" spc="80" kern="0" dirty="0">
-                <a:solidFill>
-                  <a:srgbClr val="5FD6BE"/>
+              <a:rPr lang="en-US" sz="1000" dirty="0">
+                <a:solidFill>
+                  <a:srgbClr val="44536B"/>
                 </a:solidFill>
                 <a:latin typeface="Calibri" pitchFamily="34" charset="0"/>
                 <a:ea typeface="Calibri" pitchFamily="34" charset="-122"/>
                 <a:cs typeface="Calibri" pitchFamily="34" charset="-120"/>
               </a:rPr>
-              <a:t>Analytics   ·   This week</a:t>
+              <a:t>Highest leverage. 33.6K extra clicks off the existing 1.60M views — creative and offer work, no new reach.</a:t>
             </a:r>
             <a:endParaRPr lang="en-US" sz="1000" dirty="0"/>
           </a:p>
@@ -14122,36 +18520,36 @@
       </p:sp>
       <p:sp>
         <p:nvSpPr>
-          <p:cNvPr id="10" name="Shape 8"/>
-          <p:cNvSpPr/>
-          <p:nvPr/>
-        </p:nvSpPr>
-        <p:spPr>
-          <a:xfrm>
-            <a:off x="6208776" y="1517904"/>
-            <a:ext cx="5468112" cy="1389888"/>
+          <p:cNvPr id="11" name="Shape 8"/>
+          <p:cNvSpPr/>
+          <p:nvPr/>
+        </p:nvSpPr>
+        <p:spPr>
+          <a:xfrm>
+            <a:off x="7818120" y="2880360"/>
+            <a:ext cx="3794760" cy="1243584"/>
           </a:xfrm>
           <a:prstGeom prst="roundRect">
             <a:avLst>
-              <a:gd name="adj" fmla="val 5921"/>
+              <a:gd name="adj" fmla="val 6618"/>
             </a:avLst>
           </a:prstGeom>
           <a:solidFill>
-            <a:srgbClr val="17294B"/>
+            <a:srgbClr val="F1F4F9"/>
           </a:solidFill>
           <a:ln/>
         </p:spPr>
       </p:sp>
       <p:sp>
         <p:nvSpPr>
-          <p:cNvPr id="11" name="Shape 9"/>
-          <p:cNvSpPr/>
-          <p:nvPr/>
-        </p:nvSpPr>
-        <p:spPr>
-          <a:xfrm>
-            <a:off x="6501384" y="1755648"/>
-            <a:ext cx="457200" cy="457200"/>
+          <p:cNvPr id="12" name="Shape 9"/>
+          <p:cNvSpPr/>
+          <p:nvPr/>
+        </p:nvSpPr>
+        <p:spPr>
+          <a:xfrm>
+            <a:off x="8065008" y="3026664"/>
+            <a:ext cx="420624" cy="420624"/>
           </a:xfrm>
           <a:prstGeom prst="ellipse">
             <a:avLst/>
@@ -14164,14 +18562,14 @@
       </p:sp>
       <p:sp>
         <p:nvSpPr>
-          <p:cNvPr id="12" name="Text 10"/>
-          <p:cNvSpPr/>
-          <p:nvPr/>
-        </p:nvSpPr>
-        <p:spPr>
-          <a:xfrm>
-            <a:off x="6501384" y="1755648"/>
-            <a:ext cx="457200" cy="457200"/>
+          <p:cNvPr id="13" name="Text 10"/>
+          <p:cNvSpPr/>
+          <p:nvPr/>
+        </p:nvSpPr>
+        <p:spPr>
+          <a:xfrm>
+            <a:off x="8065008" y="3026664"/>
+            <a:ext cx="420624" cy="420624"/>
           </a:xfrm>
           <a:prstGeom prst="rect">
             <a:avLst/>
@@ -14195,7 +18593,7 @@
                 <a:ea typeface="Cambria" pitchFamily="34" charset="-122"/>
                 <a:cs typeface="Cambria" pitchFamily="34" charset="-120"/>
               </a:rPr>
-              <a:t>2</a:t>
+              <a:t>B</a:t>
             </a:r>
             <a:endParaRPr lang="en-US" sz="1500" dirty="0"/>
           </a:p>
@@ -14203,14 +18601,14 @@
       </p:sp>
       <p:sp>
         <p:nvSpPr>
-          <p:cNvPr id="13" name="Text 11"/>
-          <p:cNvSpPr/>
-          <p:nvPr/>
-        </p:nvSpPr>
-        <p:spPr>
-          <a:xfrm>
-            <a:off x="7123176" y="1755648"/>
-            <a:ext cx="4261104" cy="457200"/>
+          <p:cNvPr id="14" name="Text 11"/>
+          <p:cNvSpPr/>
+          <p:nvPr/>
+        </p:nvSpPr>
+        <p:spPr>
+          <a:xfrm>
+            <a:off x="8613648" y="3008376"/>
+            <a:ext cx="2788920" cy="292608"/>
           </a:xfrm>
           <a:prstGeom prst="rect">
             <a:avLst/>
@@ -14226,30 +18624,30 @@
               <a:buNone/>
             </a:pPr>
             <a:r>
-              <a:rPr lang="en-US" sz="1450" b="1" dirty="0">
-                <a:solidFill>
-                  <a:srgbClr val="FFFFFF"/>
+              <a:rPr lang="en-US" sz="1400" b="1" dirty="0">
+                <a:solidFill>
+                  <a:srgbClr val="16233D"/>
                 </a:solidFill>
                 <a:latin typeface="Cambria" pitchFamily="34" charset="0"/>
                 <a:ea typeface="Cambria" pitchFamily="34" charset="-122"/>
                 <a:cs typeface="Cambria" pitchFamily="34" charset="-120"/>
               </a:rPr>
-              <a:t>Fix amount capture at app-in</a:t>
-            </a:r>
-            <a:endParaRPr lang="en-US" sz="1450" dirty="0"/>
-          </a:p>
-        </p:txBody>
-      </p:sp>
-      <p:sp>
-        <p:nvSpPr>
-          <p:cNvPr id="14" name="Text 12"/>
-          <p:cNvSpPr/>
-          <p:nvPr/>
-        </p:nvSpPr>
-        <p:spPr>
-          <a:xfrm>
-            <a:off x="6501384" y="2249424"/>
-            <a:ext cx="4882896" cy="384048"/>
+              <a:t>View rate</a:t>
+            </a:r>
+            <a:endParaRPr lang="en-US" sz="1400" dirty="0"/>
+          </a:p>
+        </p:txBody>
+      </p:sp>
+      <p:sp>
+        <p:nvSpPr>
+          <p:cNvPr id="15" name="Text 12"/>
+          <p:cNvSpPr/>
+          <p:nvPr/>
+        </p:nvSpPr>
+        <p:spPr>
+          <a:xfrm>
+            <a:off x="8613648" y="3291840"/>
+            <a:ext cx="2788920" cy="256032"/>
           </a:xfrm>
           <a:prstGeom prst="rect">
             <a:avLst/>
@@ -14265,15 +18663,15 @@
               <a:buNone/>
             </a:pPr>
             <a:r>
-              <a:rPr lang="en-US" sz="1050" dirty="0">
-                <a:solidFill>
-                  <a:srgbClr val="C3D0E2"/>
+              <a:rPr lang="en-US" sz="1050" b="1" dirty="0">
+                <a:solidFill>
+                  <a:srgbClr val="00A896"/>
                 </a:solidFill>
                 <a:latin typeface="Calibri" pitchFamily="34" charset="0"/>
                 <a:ea typeface="Calibri" pitchFamily="34" charset="-122"/>
                 <a:cs typeface="Calibri" pitchFamily="34" charset="-120"/>
               </a:rPr>
-              <a:t>0.0B applied against 0.1B approved is not a rounding issue. Reconcile the App-in and Conversion definitions at the same time.</a:t>
+              <a:t>+1.38K books  ·  ~15M set credit</a:t>
             </a:r>
             <a:endParaRPr lang="en-US" sz="1050" dirty="0"/>
           </a:p>
@@ -14281,14 +18679,14 @@
       </p:sp>
       <p:sp>
         <p:nvSpPr>
-          <p:cNvPr id="15" name="Text 13"/>
-          <p:cNvSpPr/>
-          <p:nvPr/>
-        </p:nvSpPr>
-        <p:spPr>
-          <a:xfrm>
-            <a:off x="6501384" y="2615184"/>
-            <a:ext cx="4882896" cy="237744"/>
+          <p:cNvPr id="16" name="Text 13"/>
+          <p:cNvSpPr/>
+          <p:nvPr/>
+        </p:nvSpPr>
+        <p:spPr>
+          <a:xfrm>
+            <a:off x="8065008" y="3575304"/>
+            <a:ext cx="3337560" cy="475488"/>
           </a:xfrm>
           <a:prstGeom prst="rect">
             <a:avLst/>
@@ -14304,15 +18702,15 @@
               <a:buNone/>
             </a:pPr>
             <a:r>
-              <a:rPr lang="en-US" sz="1000" b="1" spc="80" kern="0" dirty="0">
-                <a:solidFill>
-                  <a:srgbClr val="5FD6BE"/>
+              <a:rPr lang="en-US" sz="1000" dirty="0">
+                <a:solidFill>
+                  <a:srgbClr val="44536B"/>
                 </a:solidFill>
                 <a:latin typeface="Calibri" pitchFamily="34" charset="0"/>
                 <a:ea typeface="Calibri" pitchFamily="34" charset="-122"/>
                 <a:cs typeface="Calibri" pitchFamily="34" charset="-120"/>
               </a:rPr>
-              <a:t>Data eng.   ·   This week</a:t>
+              <a:t>229K extra views off leads already assigned. Deliverability, channel mix, frequency capping.</a:t>
             </a:r>
             <a:endParaRPr lang="en-US" sz="1000" dirty="0"/>
           </a:p>
@@ -14320,36 +18718,36 @@
       </p:sp>
       <p:sp>
         <p:nvSpPr>
-          <p:cNvPr id="16" name="Shape 14"/>
-          <p:cNvSpPr/>
-          <p:nvPr/>
-        </p:nvSpPr>
-        <p:spPr>
-          <a:xfrm>
-            <a:off x="548640" y="3090672"/>
-            <a:ext cx="5468112" cy="1389888"/>
+          <p:cNvPr id="17" name="Shape 14"/>
+          <p:cNvSpPr/>
+          <p:nvPr/>
+        </p:nvSpPr>
+        <p:spPr>
+          <a:xfrm>
+            <a:off x="7818120" y="4297680"/>
+            <a:ext cx="3794760" cy="1243584"/>
           </a:xfrm>
           <a:prstGeom prst="roundRect">
             <a:avLst>
-              <a:gd name="adj" fmla="val 5921"/>
+              <a:gd name="adj" fmla="val 6618"/>
             </a:avLst>
           </a:prstGeom>
           <a:solidFill>
-            <a:srgbClr val="17294B"/>
+            <a:srgbClr val="F1F4F9"/>
           </a:solidFill>
           <a:ln/>
         </p:spPr>
       </p:sp>
       <p:sp>
         <p:nvSpPr>
-          <p:cNvPr id="17" name="Shape 15"/>
-          <p:cNvSpPr/>
-          <p:nvPr/>
-        </p:nvSpPr>
-        <p:spPr>
-          <a:xfrm>
-            <a:off x="841248" y="3328416"/>
-            <a:ext cx="457200" cy="457200"/>
+          <p:cNvPr id="18" name="Shape 15"/>
+          <p:cNvSpPr/>
+          <p:nvPr/>
+        </p:nvSpPr>
+        <p:spPr>
+          <a:xfrm>
+            <a:off x="8065008" y="4443984"/>
+            <a:ext cx="420624" cy="420624"/>
           </a:xfrm>
           <a:prstGeom prst="ellipse">
             <a:avLst/>
@@ -14362,14 +18760,14 @@
       </p:sp>
       <p:sp>
         <p:nvSpPr>
-          <p:cNvPr id="18" name="Text 16"/>
-          <p:cNvSpPr/>
-          <p:nvPr/>
-        </p:nvSpPr>
-        <p:spPr>
-          <a:xfrm>
-            <a:off x="841248" y="3328416"/>
-            <a:ext cx="457200" cy="457200"/>
+          <p:cNvPr id="19" name="Text 16"/>
+          <p:cNvSpPr/>
+          <p:nvPr/>
+        </p:nvSpPr>
+        <p:spPr>
+          <a:xfrm>
+            <a:off x="8065008" y="4443984"/>
+            <a:ext cx="420624" cy="420624"/>
           </a:xfrm>
           <a:prstGeom prst="rect">
             <a:avLst/>
@@ -14393,7 +18791,7 @@
                 <a:ea typeface="Cambria" pitchFamily="34" charset="-122"/>
                 <a:cs typeface="Cambria" pitchFamily="34" charset="-120"/>
               </a:rPr>
-              <a:t>3</a:t>
+              <a:t>C</a:t>
             </a:r>
             <a:endParaRPr lang="en-US" sz="1500" dirty="0"/>
           </a:p>
@@ -14401,14 +18799,14 @@
       </p:sp>
       <p:sp>
         <p:nvSpPr>
-          <p:cNvPr id="19" name="Text 17"/>
-          <p:cNvSpPr/>
-          <p:nvPr/>
-        </p:nvSpPr>
-        <p:spPr>
-          <a:xfrm>
-            <a:off x="1463040" y="3328416"/>
-            <a:ext cx="4261104" cy="457200"/>
+          <p:cNvPr id="20" name="Text 17"/>
+          <p:cNvSpPr/>
+          <p:nvPr/>
+        </p:nvSpPr>
+        <p:spPr>
+          <a:xfrm>
+            <a:off x="8613648" y="4425696"/>
+            <a:ext cx="2788920" cy="292608"/>
           </a:xfrm>
           <a:prstGeom prst="rect">
             <a:avLst/>
@@ -14424,30 +18822,30 @@
               <a:buNone/>
             </a:pPr>
             <a:r>
-              <a:rPr lang="en-US" sz="1450" b="1" dirty="0">
-                <a:solidFill>
-                  <a:srgbClr val="FFFFFF"/>
+              <a:rPr lang="en-US" sz="1400" b="1" dirty="0">
+                <a:solidFill>
+                  <a:srgbClr val="16233D"/>
                 </a:solidFill>
                 <a:latin typeface="Cambria" pitchFamily="34" charset="0"/>
                 <a:ea typeface="Cambria" pitchFamily="34" charset="-122"/>
                 <a:cs typeface="Cambria" pitchFamily="34" charset="-120"/>
               </a:rPr>
-              <a:t>Attack the click rate first</a:t>
-            </a:r>
-            <a:endParaRPr lang="en-US" sz="1450" dirty="0"/>
-          </a:p>
-        </p:txBody>
-      </p:sp>
-      <p:sp>
-        <p:nvSpPr>
-          <p:cNvPr id="20" name="Text 18"/>
-          <p:cNvSpPr/>
-          <p:nvPr/>
-        </p:nvSpPr>
-        <p:spPr>
-          <a:xfrm>
-            <a:off x="841248" y="3822192"/>
-            <a:ext cx="4882896" cy="384048"/>
+              <a:t>Book rate</a:t>
+            </a:r>
+            <a:endParaRPr lang="en-US" sz="1400" dirty="0"/>
+          </a:p>
+        </p:txBody>
+      </p:sp>
+      <p:sp>
+        <p:nvSpPr>
+          <p:cNvPr id="21" name="Text 18"/>
+          <p:cNvSpPr/>
+          <p:nvPr/>
+        </p:nvSpPr>
+        <p:spPr>
+          <a:xfrm>
+            <a:off x="8613648" y="4709160"/>
+            <a:ext cx="2788920" cy="256032"/>
           </a:xfrm>
           <a:prstGeom prst="rect">
             <a:avLst/>
@@ -14463,15 +18861,15 @@
               <a:buNone/>
             </a:pPr>
             <a:r>
-              <a:rPr lang="en-US" sz="1050" dirty="0">
-                <a:solidFill>
-                  <a:srgbClr val="C3D0E2"/>
+              <a:rPr lang="en-US" sz="1050" b="1" dirty="0">
+                <a:solidFill>
+                  <a:srgbClr val="00A896"/>
                 </a:solidFill>
                 <a:latin typeface="Calibri" pitchFamily="34" charset="0"/>
                 <a:ea typeface="Calibri" pitchFamily="34" charset="-122"/>
                 <a:cs typeface="Calibri" pitchFamily="34" charset="-120"/>
               </a:rPr>
-              <a:t>7.9% of viewers click. This is the single highest-leverage number on the dashboard — worth ~2.6K bookings for 2.1 points.</a:t>
+              <a:t>+1.30K books  ·  ~14M set credit</a:t>
             </a:r>
             <a:endParaRPr lang="en-US" sz="1050" dirty="0"/>
           </a:p>
@@ -14479,14 +18877,14 @@
       </p:sp>
       <p:sp>
         <p:nvSpPr>
-          <p:cNvPr id="21" name="Text 19"/>
-          <p:cNvSpPr/>
-          <p:nvPr/>
-        </p:nvSpPr>
-        <p:spPr>
-          <a:xfrm>
-            <a:off x="841248" y="4187952"/>
-            <a:ext cx="4882896" cy="237744"/>
+          <p:cNvPr id="22" name="Text 19"/>
+          <p:cNvSpPr/>
+          <p:nvPr/>
+        </p:nvSpPr>
+        <p:spPr>
+          <a:xfrm>
+            <a:off x="8065008" y="4992624"/>
+            <a:ext cx="3337560" cy="475488"/>
           </a:xfrm>
           <a:prstGeom prst="rect">
             <a:avLst/>
@@ -14502,15 +18900,15 @@
               <a:buNone/>
             </a:pPr>
             <a:r>
-              <a:rPr lang="en-US" sz="1000" b="1" spc="80" kern="0" dirty="0">
-                <a:solidFill>
-                  <a:srgbClr val="5FD6BE"/>
+              <a:rPr lang="en-US" sz="1000" dirty="0">
+                <a:solidFill>
+                  <a:srgbClr val="44536B"/>
                 </a:solidFill>
                 <a:latin typeface="Calibri" pitchFamily="34" charset="0"/>
                 <a:ea typeface="Calibri" pitchFamily="34" charset="-122"/>
                 <a:cs typeface="Calibri" pitchFamily="34" charset="-120"/>
               </a:rPr>
-              <a:t>Marketing   ·   Next cycle</a:t>
+              <a:t>Cheapest of the three: no new traffic at all, just closing 1.3K already-approved customers.</a:t>
             </a:r>
             <a:endParaRPr lang="en-US" sz="1000" dirty="0"/>
           </a:p>
@@ -14518,56 +18916,36 @@
       </p:sp>
       <p:sp>
         <p:nvSpPr>
-          <p:cNvPr id="22" name="Shape 20"/>
-          <p:cNvSpPr/>
-          <p:nvPr/>
-        </p:nvSpPr>
-        <p:spPr>
-          <a:xfrm>
-            <a:off x="6208776" y="3090672"/>
-            <a:ext cx="5468112" cy="1389888"/>
+          <p:cNvPr id="23" name="Shape 20"/>
+          <p:cNvSpPr/>
+          <p:nvPr/>
+        </p:nvSpPr>
+        <p:spPr>
+          <a:xfrm>
+            <a:off x="7818120" y="5715000"/>
+            <a:ext cx="3794760" cy="566928"/>
           </a:xfrm>
           <a:prstGeom prst="roundRect">
             <a:avLst>
-              <a:gd name="adj" fmla="val 5921"/>
+              <a:gd name="adj" fmla="val 14516"/>
             </a:avLst>
           </a:prstGeom>
           <a:solidFill>
-            <a:srgbClr val="17294B"/>
+            <a:srgbClr val="0E1E3C"/>
           </a:solidFill>
           <a:ln/>
         </p:spPr>
       </p:sp>
       <p:sp>
         <p:nvSpPr>
-          <p:cNvPr id="23" name="Shape 21"/>
-          <p:cNvSpPr/>
-          <p:nvPr/>
-        </p:nvSpPr>
-        <p:spPr>
-          <a:xfrm>
-            <a:off x="6501384" y="3328416"/>
-            <a:ext cx="457200" cy="457200"/>
-          </a:xfrm>
-          <a:prstGeom prst="ellipse">
-            <a:avLst/>
-          </a:prstGeom>
-          <a:solidFill>
-            <a:srgbClr val="00A896"/>
-          </a:solidFill>
-          <a:ln/>
-        </p:spPr>
-      </p:sp>
-      <p:sp>
-        <p:nvSpPr>
-          <p:cNvPr id="24" name="Text 22"/>
-          <p:cNvSpPr/>
-          <p:nvPr/>
-        </p:nvSpPr>
-        <p:spPr>
-          <a:xfrm>
-            <a:off x="6501384" y="3328416"/>
-            <a:ext cx="457200" cy="457200"/>
+          <p:cNvPr id="24" name="Text 21"/>
+          <p:cNvSpPr/>
+          <p:nvPr/>
+        </p:nvSpPr>
+        <p:spPr>
+          <a:xfrm>
+            <a:off x="7818120" y="5715000"/>
+            <a:ext cx="3794760" cy="566928"/>
           </a:xfrm>
           <a:prstGeom prst="rect">
             <a:avLst/>
@@ -14583,30 +18961,30 @@
               <a:buNone/>
             </a:pPr>
             <a:r>
-              <a:rPr lang="en-US" sz="1500" b="1" dirty="0">
-                <a:solidFill>
-                  <a:srgbClr val="FFFFFF"/>
+              <a:rPr lang="en-US" sz="1400" b="1" dirty="0">
+                <a:solidFill>
+                  <a:srgbClr val="5FD6BE"/>
                 </a:solidFill>
                 <a:latin typeface="Cambria" pitchFamily="34" charset="0"/>
                 <a:ea typeface="Cambria" pitchFamily="34" charset="-122"/>
                 <a:cs typeface="Cambria" pitchFamily="34" charset="-120"/>
               </a:rPr>
-              <a:t>4</a:t>
-            </a:r>
-            <a:endParaRPr lang="en-US" sz="1500" dirty="0"/>
-          </a:p>
-        </p:txBody>
-      </p:sp>
-      <p:sp>
-        <p:nvSpPr>
-          <p:cNvPr id="25" name="Text 23"/>
-          <p:cNvSpPr/>
-          <p:nvPr/>
-        </p:nvSpPr>
-        <p:spPr>
-          <a:xfrm>
-            <a:off x="7123176" y="3328416"/>
-            <a:ext cx="4261104" cy="457200"/>
+              <a:t>Together: 9.7K → 16.0K bookings</a:t>
+            </a:r>
+            <a:endParaRPr lang="en-US" sz="1400" dirty="0"/>
+          </a:p>
+        </p:txBody>
+      </p:sp>
+      <p:sp>
+        <p:nvSpPr>
+          <p:cNvPr id="25" name="Text 22"/>
+          <p:cNvSpPr/>
+          <p:nvPr/>
+        </p:nvSpPr>
+        <p:spPr>
+          <a:xfrm>
+            <a:off x="548640" y="6345936"/>
+            <a:ext cx="11064240" cy="292608"/>
           </a:xfrm>
           <a:prstGeom prst="rect">
             <a:avLst/>
@@ -14622,528 +19000,15 @@
               <a:buNone/>
             </a:pPr>
             <a:r>
-              <a:rPr lang="en-US" sz="1450" b="1" dirty="0">
-                <a:solidFill>
-                  <a:srgbClr val="FFFFFF"/>
-                </a:solidFill>
-                <a:latin typeface="Cambria" pitchFamily="34" charset="0"/>
-                <a:ea typeface="Cambria" pitchFamily="34" charset="-122"/>
-                <a:cs typeface="Cambria" pitchFamily="34" charset="-120"/>
-              </a:rPr>
-              <a:t>Audit the 82.5% who never view</a:t>
-            </a:r>
-            <a:endParaRPr lang="en-US" sz="1450" dirty="0"/>
-          </a:p>
-        </p:txBody>
-      </p:sp>
-      <p:sp>
-        <p:nvSpPr>
-          <p:cNvPr id="26" name="Text 24"/>
-          <p:cNvSpPr/>
-          <p:nvPr/>
-        </p:nvSpPr>
-        <p:spPr>
-          <a:xfrm>
-            <a:off x="6501384" y="3822192"/>
-            <a:ext cx="4882896" cy="384048"/>
-          </a:xfrm>
-          <a:prstGeom prst="rect">
-            <a:avLst/>
-          </a:prstGeom>
-          <a:noFill/>
-          <a:ln/>
-        </p:spPr>
-        <p:txBody>
-          <a:bodyPr wrap="square" lIns="0" tIns="0" rIns="0" bIns="0" rtlCol="0" anchor="ctr"/>
-          <a:lstStyle/>
-          <a:p>
-            <a:pPr indent="0" marL="0">
-              <a:buNone/>
-            </a:pPr>
-            <a:r>
-              <a:rPr lang="en-US" sz="1050" dirty="0">
-                <a:solidFill>
-                  <a:srgbClr val="C3D0E2"/>
+              <a:rPr lang="en-US" sz="950" i="1" dirty="0">
+                <a:solidFill>
+                  <a:srgbClr val="6B7A90"/>
                 </a:solidFill>
                 <a:latin typeface="Calibri" pitchFamily="34" charset="0"/>
                 <a:ea typeface="Calibri" pitchFamily="34" charset="-122"/>
                 <a:cs typeface="Calibri" pitchFamily="34" charset="-120"/>
               </a:rPr>
-              <a:t>7.57M assigned leads register no view at all. Separate 'not delivered' from 'delivered, not opened' before spending on creative.</a:t>
-            </a:r>
-            <a:endParaRPr lang="en-US" sz="1050" dirty="0"/>
-          </a:p>
-        </p:txBody>
-      </p:sp>
-      <p:sp>
-        <p:nvSpPr>
-          <p:cNvPr id="27" name="Text 25"/>
-          <p:cNvSpPr/>
-          <p:nvPr/>
-        </p:nvSpPr>
-        <p:spPr>
-          <a:xfrm>
-            <a:off x="6501384" y="4187952"/>
-            <a:ext cx="4882896" cy="237744"/>
-          </a:xfrm>
-          <a:prstGeom prst="rect">
-            <a:avLst/>
-          </a:prstGeom>
-          <a:noFill/>
-          <a:ln/>
-        </p:spPr>
-        <p:txBody>
-          <a:bodyPr wrap="square" lIns="0" tIns="0" rIns="0" bIns="0" rtlCol="0" anchor="ctr"/>
-          <a:lstStyle/>
-          <a:p>
-            <a:pPr indent="0" marL="0">
-              <a:buNone/>
-            </a:pPr>
-            <a:r>
-              <a:rPr lang="en-US" sz="1000" b="1" spc="80" kern="0" dirty="0">
-                <a:solidFill>
-                  <a:srgbClr val="5FD6BE"/>
-                </a:solidFill>
-                <a:latin typeface="Calibri" pitchFamily="34" charset="0"/>
-                <a:ea typeface="Calibri" pitchFamily="34" charset="-122"/>
-                <a:cs typeface="Calibri" pitchFamily="34" charset="-120"/>
-              </a:rPr>
-              <a:t>Campaign ops   ·   Next cycle</a:t>
-            </a:r>
-            <a:endParaRPr lang="en-US" sz="1000" dirty="0"/>
-          </a:p>
-        </p:txBody>
-      </p:sp>
-      <p:sp>
-        <p:nvSpPr>
-          <p:cNvPr id="28" name="Shape 26"/>
-          <p:cNvSpPr/>
-          <p:nvPr/>
-        </p:nvSpPr>
-        <p:spPr>
-          <a:xfrm>
-            <a:off x="548640" y="4663440"/>
-            <a:ext cx="5468112" cy="1389888"/>
-          </a:xfrm>
-          <a:prstGeom prst="roundRect">
-            <a:avLst>
-              <a:gd name="adj" fmla="val 5921"/>
-            </a:avLst>
-          </a:prstGeom>
-          <a:solidFill>
-            <a:srgbClr val="17294B"/>
-          </a:solidFill>
-          <a:ln/>
-        </p:spPr>
-      </p:sp>
-      <p:sp>
-        <p:nvSpPr>
-          <p:cNvPr id="29" name="Shape 27"/>
-          <p:cNvSpPr/>
-          <p:nvPr/>
-        </p:nvSpPr>
-        <p:spPr>
-          <a:xfrm>
-            <a:off x="841248" y="4901184"/>
-            <a:ext cx="457200" cy="457200"/>
-          </a:xfrm>
-          <a:prstGeom prst="ellipse">
-            <a:avLst/>
-          </a:prstGeom>
-          <a:solidFill>
-            <a:srgbClr val="00A896"/>
-          </a:solidFill>
-          <a:ln/>
-        </p:spPr>
-      </p:sp>
-      <p:sp>
-        <p:nvSpPr>
-          <p:cNvPr id="30" name="Text 28"/>
-          <p:cNvSpPr/>
-          <p:nvPr/>
-        </p:nvSpPr>
-        <p:spPr>
-          <a:xfrm>
-            <a:off x="841248" y="4901184"/>
-            <a:ext cx="457200" cy="457200"/>
-          </a:xfrm>
-          <a:prstGeom prst="rect">
-            <a:avLst/>
-          </a:prstGeom>
-          <a:noFill/>
-          <a:ln/>
-        </p:spPr>
-        <p:txBody>
-          <a:bodyPr wrap="square" lIns="0" tIns="0" rIns="0" bIns="0" rtlCol="0" anchor="ctr"/>
-          <a:lstStyle/>
-          <a:p>
-            <a:pPr algn="ctr" indent="0" marL="0">
-              <a:buNone/>
-            </a:pPr>
-            <a:r>
-              <a:rPr lang="en-US" sz="1500" b="1" dirty="0">
-                <a:solidFill>
-                  <a:srgbClr val="FFFFFF"/>
-                </a:solidFill>
-                <a:latin typeface="Cambria" pitchFamily="34" charset="0"/>
-                <a:ea typeface="Cambria" pitchFamily="34" charset="-122"/>
-                <a:cs typeface="Cambria" pitchFamily="34" charset="-120"/>
-              </a:rPr>
-              <a:t>5</a:t>
-            </a:r>
-            <a:endParaRPr lang="en-US" sz="1500" dirty="0"/>
-          </a:p>
-        </p:txBody>
-      </p:sp>
-      <p:sp>
-        <p:nvSpPr>
-          <p:cNvPr id="31" name="Text 29"/>
-          <p:cNvSpPr/>
-          <p:nvPr/>
-        </p:nvSpPr>
-        <p:spPr>
-          <a:xfrm>
-            <a:off x="1463040" y="4901184"/>
-            <a:ext cx="4261104" cy="457200"/>
-          </a:xfrm>
-          <a:prstGeom prst="rect">
-            <a:avLst/>
-          </a:prstGeom>
-          <a:noFill/>
-          <a:ln/>
-        </p:spPr>
-        <p:txBody>
-          <a:bodyPr wrap="square" lIns="0" tIns="0" rIns="0" bIns="0" rtlCol="0" anchor="ctr"/>
-          <a:lstStyle/>
-          <a:p>
-            <a:pPr indent="0" marL="0">
-              <a:buNone/>
-            </a:pPr>
-            <a:r>
-              <a:rPr lang="en-US" sz="1450" b="1" dirty="0">
-                <a:solidFill>
-                  <a:srgbClr val="FFFFFF"/>
-                </a:solidFill>
-                <a:latin typeface="Cambria" pitchFamily="34" charset="0"/>
-                <a:ea typeface="Cambria" pitchFamily="34" charset="-122"/>
-                <a:cs typeface="Cambria" pitchFamily="34" charset="-120"/>
-              </a:rPr>
-              <a:t>Close the approved-not-booked gap</a:t>
-            </a:r>
-            <a:endParaRPr lang="en-US" sz="1450" dirty="0"/>
-          </a:p>
-        </p:txBody>
-      </p:sp>
-      <p:sp>
-        <p:nvSpPr>
-          <p:cNvPr id="32" name="Text 30"/>
-          <p:cNvSpPr/>
-          <p:nvPr/>
-        </p:nvSpPr>
-        <p:spPr>
-          <a:xfrm>
-            <a:off x="841248" y="5394960"/>
-            <a:ext cx="4882896" cy="384048"/>
-          </a:xfrm>
-          <a:prstGeom prst="rect">
-            <a:avLst/>
-          </a:prstGeom>
-          <a:noFill/>
-          <a:ln/>
-        </p:spPr>
-        <p:txBody>
-          <a:bodyPr wrap="square" lIns="0" tIns="0" rIns="0" bIns="0" rtlCol="0" anchor="ctr"/>
-          <a:lstStyle/>
-          <a:p>
-            <a:pPr indent="0" marL="0">
-              <a:buNone/>
-            </a:pPr>
-            <a:r>
-              <a:rPr lang="en-US" sz="1050" dirty="0">
-                <a:solidFill>
-                  <a:srgbClr val="C3D0E2"/>
-                </a:solidFill>
-                <a:latin typeface="Calibri" pitchFamily="34" charset="0"/>
-                <a:ea typeface="Calibri" pitchFamily="34" charset="-122"/>
-                <a:cs typeface="Calibri" pitchFamily="34" charset="-120"/>
-              </a:rPr>
-              <a:t>25% of approvals never book, and set credit lands 4% under approved. No new traffic needed — ~14M of set credit.</a:t>
-            </a:r>
-            <a:endParaRPr lang="en-US" sz="1050" dirty="0"/>
-          </a:p>
-        </p:txBody>
-      </p:sp>
-      <p:sp>
-        <p:nvSpPr>
-          <p:cNvPr id="33" name="Text 31"/>
-          <p:cNvSpPr/>
-          <p:nvPr/>
-        </p:nvSpPr>
-        <p:spPr>
-          <a:xfrm>
-            <a:off x="841248" y="5760720"/>
-            <a:ext cx="4882896" cy="237744"/>
-          </a:xfrm>
-          <a:prstGeom prst="rect">
-            <a:avLst/>
-          </a:prstGeom>
-          <a:noFill/>
-          <a:ln/>
-        </p:spPr>
-        <p:txBody>
-          <a:bodyPr wrap="square" lIns="0" tIns="0" rIns="0" bIns="0" rtlCol="0" anchor="ctr"/>
-          <a:lstStyle/>
-          <a:p>
-            <a:pPr indent="0" marL="0">
-              <a:buNone/>
-            </a:pPr>
-            <a:r>
-              <a:rPr lang="en-US" sz="1000" b="1" spc="80" kern="0" dirty="0">
-                <a:solidFill>
-                  <a:srgbClr val="5FD6BE"/>
-                </a:solidFill>
-                <a:latin typeface="Calibri" pitchFamily="34" charset="0"/>
-                <a:ea typeface="Calibri" pitchFamily="34" charset="-122"/>
-                <a:cs typeface="Calibri" pitchFamily="34" charset="-120"/>
-              </a:rPr>
-              <a:t>Fulfilment   ·   Next cycle</a:t>
-            </a:r>
-            <a:endParaRPr lang="en-US" sz="1000" dirty="0"/>
-          </a:p>
-        </p:txBody>
-      </p:sp>
-      <p:sp>
-        <p:nvSpPr>
-          <p:cNvPr id="34" name="Shape 32"/>
-          <p:cNvSpPr/>
-          <p:nvPr/>
-        </p:nvSpPr>
-        <p:spPr>
-          <a:xfrm>
-            <a:off x="6208776" y="4663440"/>
-            <a:ext cx="5468112" cy="1389888"/>
-          </a:xfrm>
-          <a:prstGeom prst="roundRect">
-            <a:avLst>
-              <a:gd name="adj" fmla="val 5921"/>
-            </a:avLst>
-          </a:prstGeom>
-          <a:solidFill>
-            <a:srgbClr val="17294B"/>
-          </a:solidFill>
-          <a:ln/>
-        </p:spPr>
-      </p:sp>
-      <p:sp>
-        <p:nvSpPr>
-          <p:cNvPr id="35" name="Shape 33"/>
-          <p:cNvSpPr/>
-          <p:nvPr/>
-        </p:nvSpPr>
-        <p:spPr>
-          <a:xfrm>
-            <a:off x="6501384" y="4901184"/>
-            <a:ext cx="457200" cy="457200"/>
-          </a:xfrm>
-          <a:prstGeom prst="ellipse">
-            <a:avLst/>
-          </a:prstGeom>
-          <a:solidFill>
-            <a:srgbClr val="00A896"/>
-          </a:solidFill>
-          <a:ln/>
-        </p:spPr>
-      </p:sp>
-      <p:sp>
-        <p:nvSpPr>
-          <p:cNvPr id="36" name="Text 34"/>
-          <p:cNvSpPr/>
-          <p:nvPr/>
-        </p:nvSpPr>
-        <p:spPr>
-          <a:xfrm>
-            <a:off x="6501384" y="4901184"/>
-            <a:ext cx="457200" cy="457200"/>
-          </a:xfrm>
-          <a:prstGeom prst="rect">
-            <a:avLst/>
-          </a:prstGeom>
-          <a:noFill/>
-          <a:ln/>
-        </p:spPr>
-        <p:txBody>
-          <a:bodyPr wrap="square" lIns="0" tIns="0" rIns="0" bIns="0" rtlCol="0" anchor="ctr"/>
-          <a:lstStyle/>
-          <a:p>
-            <a:pPr algn="ctr" indent="0" marL="0">
-              <a:buNone/>
-            </a:pPr>
-            <a:r>
-              <a:rPr lang="en-US" sz="1500" b="1" dirty="0">
-                <a:solidFill>
-                  <a:srgbClr val="FFFFFF"/>
-                </a:solidFill>
-                <a:latin typeface="Cambria" pitchFamily="34" charset="0"/>
-                <a:ea typeface="Cambria" pitchFamily="34" charset="-122"/>
-                <a:cs typeface="Cambria" pitchFamily="34" charset="-120"/>
-              </a:rPr>
-              <a:t>6</a:t>
-            </a:r>
-            <a:endParaRPr lang="en-US" sz="1500" dirty="0"/>
-          </a:p>
-        </p:txBody>
-      </p:sp>
-      <p:sp>
-        <p:nvSpPr>
-          <p:cNvPr id="37" name="Text 35"/>
-          <p:cNvSpPr/>
-          <p:nvPr/>
-        </p:nvSpPr>
-        <p:spPr>
-          <a:xfrm>
-            <a:off x="7123176" y="4901184"/>
-            <a:ext cx="4261104" cy="457200"/>
-          </a:xfrm>
-          <a:prstGeom prst="rect">
-            <a:avLst/>
-          </a:prstGeom>
-          <a:noFill/>
-          <a:ln/>
-        </p:spPr>
-        <p:txBody>
-          <a:bodyPr wrap="square" lIns="0" tIns="0" rIns="0" bIns="0" rtlCol="0" anchor="ctr"/>
-          <a:lstStyle/>
-          <a:p>
-            <a:pPr indent="0" marL="0">
-              <a:buNone/>
-            </a:pPr>
-            <a:r>
-              <a:rPr lang="en-US" sz="1450" b="1" dirty="0">
-                <a:solidFill>
-                  <a:srgbClr val="FFFFFF"/>
-                </a:solidFill>
-                <a:latin typeface="Cambria" pitchFamily="34" charset="0"/>
-                <a:ea typeface="Cambria" pitchFamily="34" charset="-122"/>
-                <a:cs typeface="Cambria" pitchFamily="34" charset="-120"/>
-              </a:rPr>
-              <a:t>Instrument or retire Thru-The-Door</a:t>
-            </a:r>
-            <a:endParaRPr lang="en-US" sz="1450" dirty="0"/>
-          </a:p>
-        </p:txBody>
-      </p:sp>
-      <p:sp>
-        <p:nvSpPr>
-          <p:cNvPr id="38" name="Text 36"/>
-          <p:cNvSpPr/>
-          <p:nvPr/>
-        </p:nvSpPr>
-        <p:spPr>
-          <a:xfrm>
-            <a:off x="6501384" y="5394960"/>
-            <a:ext cx="4882896" cy="384048"/>
-          </a:xfrm>
-          <a:prstGeom prst="rect">
-            <a:avLst/>
-          </a:prstGeom>
-          <a:noFill/>
-          <a:ln/>
-        </p:spPr>
-        <p:txBody>
-          <a:bodyPr wrap="square" lIns="0" tIns="0" rIns="0" bIns="0" rtlCol="0" anchor="ctr"/>
-          <a:lstStyle/>
-          <a:p>
-            <a:pPr indent="0" marL="0">
-              <a:buNone/>
-            </a:pPr>
-            <a:r>
-              <a:rPr lang="en-US" sz="1050" dirty="0">
-                <a:solidFill>
-                  <a:srgbClr val="C3D0E2"/>
-                </a:solidFill>
-                <a:latin typeface="Calibri" pitchFamily="34" charset="0"/>
-                <a:ea typeface="Calibri" pitchFamily="34" charset="-122"/>
-                <a:cs typeface="Calibri" pitchFamily="34" charset="-120"/>
-              </a:rPr>
-              <a:t>0.3K and 0.0K across 52 campaigns means the columns currently mislead more than they inform.</a:t>
-            </a:r>
-            <a:endParaRPr lang="en-US" sz="1050" dirty="0"/>
-          </a:p>
-        </p:txBody>
-      </p:sp>
-      <p:sp>
-        <p:nvSpPr>
-          <p:cNvPr id="39" name="Text 37"/>
-          <p:cNvSpPr/>
-          <p:nvPr/>
-        </p:nvSpPr>
-        <p:spPr>
-          <a:xfrm>
-            <a:off x="6501384" y="5760720"/>
-            <a:ext cx="4882896" cy="237744"/>
-          </a:xfrm>
-          <a:prstGeom prst="rect">
-            <a:avLst/>
-          </a:prstGeom>
-          <a:noFill/>
-          <a:ln/>
-        </p:spPr>
-        <p:txBody>
-          <a:bodyPr wrap="square" lIns="0" tIns="0" rIns="0" bIns="0" rtlCol="0" anchor="ctr"/>
-          <a:lstStyle/>
-          <a:p>
-            <a:pPr indent="0" marL="0">
-              <a:buNone/>
-            </a:pPr>
-            <a:r>
-              <a:rPr lang="en-US" sz="1000" b="1" spc="80" kern="0" dirty="0">
-                <a:solidFill>
-                  <a:srgbClr val="5FD6BE"/>
-                </a:solidFill>
-                <a:latin typeface="Calibri" pitchFamily="34" charset="0"/>
-                <a:ea typeface="Calibri" pitchFamily="34" charset="-122"/>
-                <a:cs typeface="Calibri" pitchFamily="34" charset="-120"/>
-              </a:rPr>
-              <a:t>Analytics   ·   Next quarter</a:t>
-            </a:r>
-            <a:endParaRPr lang="en-US" sz="1000" dirty="0"/>
-          </a:p>
-        </p:txBody>
-      </p:sp>
-      <p:sp>
-        <p:nvSpPr>
-          <p:cNvPr id="40" name="Text 38"/>
-          <p:cNvSpPr/>
-          <p:nvPr/>
-        </p:nvSpPr>
-        <p:spPr>
-          <a:xfrm>
-            <a:off x="548640" y="6345936"/>
-            <a:ext cx="11064240" cy="292608"/>
-          </a:xfrm>
-          <a:prstGeom prst="rect">
-            <a:avLst/>
-          </a:prstGeom>
-          <a:noFill/>
-          <a:ln/>
-        </p:spPr>
-        <p:txBody>
-          <a:bodyPr wrap="square" lIns="0" tIns="0" rIns="0" bIns="0" rtlCol="0" anchor="ctr"/>
-          <a:lstStyle/>
-          <a:p>
-            <a:pPr indent="0" marL="0">
-              <a:buNone/>
-            </a:pPr>
-            <a:r>
-              <a:rPr lang="en-US" sz="950" i="1" dirty="0">
-                <a:solidFill>
-                  <a:srgbClr val="A8B4C6"/>
-                </a:solidFill>
-                <a:latin typeface="Calibri" pitchFamily="34" charset="0"/>
-                <a:ea typeface="Calibri" pitchFamily="34" charset="-122"/>
-                <a:cs typeface="Calibri" pitchFamily="34" charset="-120"/>
-              </a:rPr>
-              <a:t>Owners are indicative — to be confirmed with the campaign steering group.</a:t>
+              <a:t>Each lever holds all downstream rates constant at their observed values; set-credit uplift priced at the observed 10.8K average per booked customer.</a:t>
             </a:r>
             <a:endParaRPr lang="en-US" sz="950" dirty="0"/>
           </a:p>
